--- a/Presentation.pptx
+++ b/Presentation.pptx
@@ -3702,7 +3702,7 @@
                   <a:tcPr marL="128016" marR="128016" marT="54864" marB="54864" anchor="ctr">
                     <a:lnL w="12700" cap="flat" cmpd="sng" algn="ctr">
                       <a:solidFill>
-                        <a:srgbClr val="D5DEE9"/>
+                        <a:srgbClr val="DDDDDD"/>
                       </a:solidFill>
                       <a:prstDash val="solid"/>
                       <a:round/>
@@ -3711,7 +3711,7 @@
                     </a:lnL>
                     <a:lnR w="12700" cap="flat" cmpd="sng" algn="ctr">
                       <a:solidFill>
-                        <a:srgbClr val="D5DEE9"/>
+                        <a:srgbClr val="DDDDDD"/>
                       </a:solidFill>
                       <a:prstDash val="solid"/>
                       <a:round/>
@@ -3720,7 +3720,7 @@
                     </a:lnR>
                     <a:lnT w="12700" cap="flat" cmpd="sng" algn="ctr">
                       <a:solidFill>
-                        <a:srgbClr val="D5DEE9"/>
+                        <a:srgbClr val="DDDDDD"/>
                       </a:solidFill>
                       <a:prstDash val="solid"/>
                       <a:round/>
@@ -3729,7 +3729,7 @@
                     </a:lnT>
                     <a:lnB w="12700" cap="flat" cmpd="sng" algn="ctr">
                       <a:solidFill>
-                        <a:srgbClr val="D5DEE9"/>
+                        <a:srgbClr val="DDDDDD"/>
                       </a:solidFill>
                       <a:prstDash val="solid"/>
                       <a:round/>
@@ -3737,7 +3737,7 @@
                       <a:tailEnd type="none" w="med" len="med"/>
                     </a:lnB>
                     <a:solidFill>
-                      <a:srgbClr val="16233F"/>
+                      <a:srgbClr val="222222"/>
                     </a:solidFill>
                   </a:tcPr>
                 </a:tc>
@@ -3770,7 +3770,7 @@
                   <a:tcPr marL="128016" marR="128016" marT="54864" marB="54864" anchor="ctr">
                     <a:lnL w="12700" cap="flat" cmpd="sng" algn="ctr">
                       <a:solidFill>
-                        <a:srgbClr val="D5DEE9"/>
+                        <a:srgbClr val="DDDDDD"/>
                       </a:solidFill>
                       <a:prstDash val="solid"/>
                       <a:round/>
@@ -3779,7 +3779,7 @@
                     </a:lnL>
                     <a:lnR w="12700" cap="flat" cmpd="sng" algn="ctr">
                       <a:solidFill>
-                        <a:srgbClr val="D5DEE9"/>
+                        <a:srgbClr val="DDDDDD"/>
                       </a:solidFill>
                       <a:prstDash val="solid"/>
                       <a:round/>
@@ -3788,7 +3788,7 @@
                     </a:lnR>
                     <a:lnT w="12700" cap="flat" cmpd="sng" algn="ctr">
                       <a:solidFill>
-                        <a:srgbClr val="D5DEE9"/>
+                        <a:srgbClr val="DDDDDD"/>
                       </a:solidFill>
                       <a:prstDash val="solid"/>
                       <a:round/>
@@ -3797,7 +3797,7 @@
                     </a:lnT>
                     <a:lnB w="12700" cap="flat" cmpd="sng" algn="ctr">
                       <a:solidFill>
-                        <a:srgbClr val="D5DEE9"/>
+                        <a:srgbClr val="DDDDDD"/>
                       </a:solidFill>
                       <a:prstDash val="solid"/>
                       <a:round/>
@@ -3805,7 +3805,7 @@
                       <a:tailEnd type="none" w="med" len="med"/>
                     </a:lnB>
                     <a:solidFill>
-                      <a:srgbClr val="16233F"/>
+                      <a:srgbClr val="222222"/>
                     </a:solidFill>
                   </a:tcPr>
                 </a:tc>
@@ -3838,7 +3838,7 @@
                   <a:tcPr marL="128016" marR="128016" marT="54864" marB="54864" anchor="ctr">
                     <a:lnL w="12700" cap="flat" cmpd="sng" algn="ctr">
                       <a:solidFill>
-                        <a:srgbClr val="D5DEE9"/>
+                        <a:srgbClr val="DDDDDD"/>
                       </a:solidFill>
                       <a:prstDash val="solid"/>
                       <a:round/>
@@ -3847,7 +3847,7 @@
                     </a:lnL>
                     <a:lnR w="12700" cap="flat" cmpd="sng" algn="ctr">
                       <a:solidFill>
-                        <a:srgbClr val="D5DEE9"/>
+                        <a:srgbClr val="DDDDDD"/>
                       </a:solidFill>
                       <a:prstDash val="solid"/>
                       <a:round/>
@@ -3856,7 +3856,7 @@
                     </a:lnR>
                     <a:lnT w="12700" cap="flat" cmpd="sng" algn="ctr">
                       <a:solidFill>
-                        <a:srgbClr val="D5DEE9"/>
+                        <a:srgbClr val="DDDDDD"/>
                       </a:solidFill>
                       <a:prstDash val="solid"/>
                       <a:round/>
@@ -3865,7 +3865,7 @@
                     </a:lnT>
                     <a:lnB w="12700" cap="flat" cmpd="sng" algn="ctr">
                       <a:solidFill>
-                        <a:srgbClr val="D5DEE9"/>
+                        <a:srgbClr val="DDDDDD"/>
                       </a:solidFill>
                       <a:prstDash val="solid"/>
                       <a:round/>
@@ -3873,7 +3873,7 @@
                       <a:tailEnd type="none" w="med" len="med"/>
                     </a:lnB>
                     <a:solidFill>
-                      <a:srgbClr val="16233F"/>
+                      <a:srgbClr val="222222"/>
                     </a:solidFill>
                   </a:tcPr>
                 </a:tc>
@@ -3906,7 +3906,7 @@
                   <a:tcPr marL="128016" marR="128016" marT="54864" marB="54864" anchor="ctr">
                     <a:lnL w="12700" cap="flat" cmpd="sng" algn="ctr">
                       <a:solidFill>
-                        <a:srgbClr val="D5DEE9"/>
+                        <a:srgbClr val="DDDDDD"/>
                       </a:solidFill>
                       <a:prstDash val="solid"/>
                       <a:round/>
@@ -3915,7 +3915,7 @@
                     </a:lnL>
                     <a:lnR w="12700" cap="flat" cmpd="sng" algn="ctr">
                       <a:solidFill>
-                        <a:srgbClr val="D5DEE9"/>
+                        <a:srgbClr val="DDDDDD"/>
                       </a:solidFill>
                       <a:prstDash val="solid"/>
                       <a:round/>
@@ -3924,7 +3924,7 @@
                     </a:lnR>
                     <a:lnT w="12700" cap="flat" cmpd="sng" algn="ctr">
                       <a:solidFill>
-                        <a:srgbClr val="D5DEE9"/>
+                        <a:srgbClr val="DDDDDD"/>
                       </a:solidFill>
                       <a:prstDash val="solid"/>
                       <a:round/>
@@ -3933,7 +3933,7 @@
                     </a:lnT>
                     <a:lnB w="12700" cap="flat" cmpd="sng" algn="ctr">
                       <a:solidFill>
-                        <a:srgbClr val="D5DEE9"/>
+                        <a:srgbClr val="DDDDDD"/>
                       </a:solidFill>
                       <a:prstDash val="solid"/>
                       <a:round/>
@@ -3941,7 +3941,7 @@
                       <a:tailEnd type="none" w="med" len="med"/>
                     </a:lnB>
                     <a:solidFill>
-                      <a:srgbClr val="16233F"/>
+                      <a:srgbClr val="222222"/>
                     </a:solidFill>
                   </a:tcPr>
                 </a:tc>
@@ -3974,7 +3974,7 @@
                   <a:tcPr marL="128016" marR="128016" marT="54864" marB="54864" anchor="ctr">
                     <a:lnL w="12700" cap="flat" cmpd="sng" algn="ctr">
                       <a:solidFill>
-                        <a:srgbClr val="D5DEE9"/>
+                        <a:srgbClr val="DDDDDD"/>
                       </a:solidFill>
                       <a:prstDash val="solid"/>
                       <a:round/>
@@ -3983,7 +3983,7 @@
                     </a:lnL>
                     <a:lnR w="12700" cap="flat" cmpd="sng" algn="ctr">
                       <a:solidFill>
-                        <a:srgbClr val="D5DEE9"/>
+                        <a:srgbClr val="DDDDDD"/>
                       </a:solidFill>
                       <a:prstDash val="solid"/>
                       <a:round/>
@@ -3992,7 +3992,7 @@
                     </a:lnR>
                     <a:lnT w="12700" cap="flat" cmpd="sng" algn="ctr">
                       <a:solidFill>
-                        <a:srgbClr val="D5DEE9"/>
+                        <a:srgbClr val="DDDDDD"/>
                       </a:solidFill>
                       <a:prstDash val="solid"/>
                       <a:round/>
@@ -4001,7 +4001,7 @@
                     </a:lnT>
                     <a:lnB w="12700" cap="flat" cmpd="sng" algn="ctr">
                       <a:solidFill>
-                        <a:srgbClr val="D5DEE9"/>
+                        <a:srgbClr val="DDDDDD"/>
                       </a:solidFill>
                       <a:prstDash val="solid"/>
                       <a:round/>
@@ -4009,7 +4009,7 @@
                       <a:tailEnd type="none" w="med" len="med"/>
                     </a:lnB>
                     <a:solidFill>
-                      <a:srgbClr val="16233F"/>
+                      <a:srgbClr val="222222"/>
                     </a:solidFill>
                   </a:tcPr>
                 </a:tc>
@@ -4026,7 +4026,7 @@
                       <a:r>
                         <a:rPr lang="en-US" sz="1500" b="1" dirty="0">
                           <a:solidFill>
-                            <a:srgbClr val="378ADD"/>
+                            <a:srgbClr val="7B7B7B"/>
                           </a:solidFill>
                           <a:latin typeface="Calibri" pitchFamily="34" charset="0"/>
                           <a:ea typeface="Calibri" pitchFamily="34" charset="-122"/>
@@ -4044,7 +4044,7 @@
                   <a:tcPr marL="128016" marR="128016" marT="54864" marB="54864" anchor="ctr">
                     <a:lnL w="12700" cap="flat" cmpd="sng" algn="ctr">
                       <a:solidFill>
-                        <a:srgbClr val="D5DEE9"/>
+                        <a:srgbClr val="DDDDDD"/>
                       </a:solidFill>
                       <a:prstDash val="solid"/>
                       <a:round/>
@@ -4053,7 +4053,7 @@
                     </a:lnL>
                     <a:lnR w="12700" cap="flat" cmpd="sng" algn="ctr">
                       <a:solidFill>
-                        <a:srgbClr val="D5DEE9"/>
+                        <a:srgbClr val="DDDDDD"/>
                       </a:solidFill>
                       <a:prstDash val="solid"/>
                       <a:round/>
@@ -4062,7 +4062,7 @@
                     </a:lnR>
                     <a:lnT w="12700" cap="flat" cmpd="sng" algn="ctr">
                       <a:solidFill>
-                        <a:srgbClr val="D5DEE9"/>
+                        <a:srgbClr val="DDDDDD"/>
                       </a:solidFill>
                       <a:prstDash val="solid"/>
                       <a:round/>
@@ -4071,7 +4071,7 @@
                     </a:lnT>
                     <a:lnB w="12700" cap="flat" cmpd="sng" algn="ctr">
                       <a:solidFill>
-                        <a:srgbClr val="D5DEE9"/>
+                        <a:srgbClr val="DDDDDD"/>
                       </a:solidFill>
                       <a:prstDash val="solid"/>
                       <a:round/>
@@ -4079,7 +4079,7 @@
                       <a:tailEnd type="none" w="med" len="med"/>
                     </a:lnB>
                     <a:solidFill>
-                      <a:srgbClr val="EEF3F9"/>
+                      <a:srgbClr val="F2F2F2"/>
                     </a:solidFill>
                   </a:tcPr>
                 </a:tc>
@@ -4094,7 +4094,7 @@
                       <a:r>
                         <a:rPr lang="en-US" sz="1500" dirty="0">
                           <a:solidFill>
-                            <a:srgbClr val="11182B"/>
+                            <a:srgbClr val="181818"/>
                           </a:solidFill>
                           <a:latin typeface="Calibri" pitchFamily="34" charset="0"/>
                           <a:ea typeface="Calibri" pitchFamily="34" charset="-122"/>
@@ -4112,7 +4112,7 @@
                   <a:tcPr marL="128016" marR="128016" marT="54864" marB="54864" anchor="ctr">
                     <a:lnL w="12700" cap="flat" cmpd="sng" algn="ctr">
                       <a:solidFill>
-                        <a:srgbClr val="D5DEE9"/>
+                        <a:srgbClr val="DDDDDD"/>
                       </a:solidFill>
                       <a:prstDash val="solid"/>
                       <a:round/>
@@ -4121,7 +4121,7 @@
                     </a:lnL>
                     <a:lnR w="12700" cap="flat" cmpd="sng" algn="ctr">
                       <a:solidFill>
-                        <a:srgbClr val="D5DEE9"/>
+                        <a:srgbClr val="DDDDDD"/>
                       </a:solidFill>
                       <a:prstDash val="solid"/>
                       <a:round/>
@@ -4130,7 +4130,7 @@
                     </a:lnR>
                     <a:lnT w="12700" cap="flat" cmpd="sng" algn="ctr">
                       <a:solidFill>
-                        <a:srgbClr val="D5DEE9"/>
+                        <a:srgbClr val="DDDDDD"/>
                       </a:solidFill>
                       <a:prstDash val="solid"/>
                       <a:round/>
@@ -4139,7 +4139,7 @@
                     </a:lnT>
                     <a:lnB w="12700" cap="flat" cmpd="sng" algn="ctr">
                       <a:solidFill>
-                        <a:srgbClr val="D5DEE9"/>
+                        <a:srgbClr val="DDDDDD"/>
                       </a:solidFill>
                       <a:prstDash val="solid"/>
                       <a:round/>
@@ -4147,7 +4147,7 @@
                       <a:tailEnd type="none" w="med" len="med"/>
                     </a:lnB>
                     <a:solidFill>
-                      <a:srgbClr val="EEF3F9"/>
+                      <a:srgbClr val="F2F2F2"/>
                     </a:solidFill>
                   </a:tcPr>
                 </a:tc>
@@ -4162,7 +4162,7 @@
                       <a:r>
                         <a:rPr lang="en-US" sz="1500" dirty="0">
                           <a:solidFill>
-                            <a:srgbClr val="11182B"/>
+                            <a:srgbClr val="181818"/>
                           </a:solidFill>
                           <a:latin typeface="Calibri" pitchFamily="34" charset="0"/>
                           <a:ea typeface="Calibri" pitchFamily="34" charset="-122"/>
@@ -4180,7 +4180,7 @@
                   <a:tcPr marL="128016" marR="128016" marT="54864" marB="54864" anchor="ctr">
                     <a:lnL w="12700" cap="flat" cmpd="sng" algn="ctr">
                       <a:solidFill>
-                        <a:srgbClr val="D5DEE9"/>
+                        <a:srgbClr val="DDDDDD"/>
                       </a:solidFill>
                       <a:prstDash val="solid"/>
                       <a:round/>
@@ -4189,7 +4189,7 @@
                     </a:lnL>
                     <a:lnR w="12700" cap="flat" cmpd="sng" algn="ctr">
                       <a:solidFill>
-                        <a:srgbClr val="D5DEE9"/>
+                        <a:srgbClr val="DDDDDD"/>
                       </a:solidFill>
                       <a:prstDash val="solid"/>
                       <a:round/>
@@ -4198,7 +4198,7 @@
                     </a:lnR>
                     <a:lnT w="12700" cap="flat" cmpd="sng" algn="ctr">
                       <a:solidFill>
-                        <a:srgbClr val="D5DEE9"/>
+                        <a:srgbClr val="DDDDDD"/>
                       </a:solidFill>
                       <a:prstDash val="solid"/>
                       <a:round/>
@@ -4207,7 +4207,7 @@
                     </a:lnT>
                     <a:lnB w="12700" cap="flat" cmpd="sng" algn="ctr">
                       <a:solidFill>
-                        <a:srgbClr val="D5DEE9"/>
+                        <a:srgbClr val="DDDDDD"/>
                       </a:solidFill>
                       <a:prstDash val="solid"/>
                       <a:round/>
@@ -4215,7 +4215,7 @@
                       <a:tailEnd type="none" w="med" len="med"/>
                     </a:lnB>
                     <a:solidFill>
-                      <a:srgbClr val="EEF3F9"/>
+                      <a:srgbClr val="F2F2F2"/>
                     </a:solidFill>
                   </a:tcPr>
                 </a:tc>
@@ -4230,7 +4230,7 @@
                       <a:r>
                         <a:rPr lang="en-US" sz="1500" dirty="0">
                           <a:solidFill>
-                            <a:srgbClr val="11182B"/>
+                            <a:srgbClr val="181818"/>
                           </a:solidFill>
                           <a:latin typeface="Calibri" pitchFamily="34" charset="0"/>
                           <a:ea typeface="Calibri" pitchFamily="34" charset="-122"/>
@@ -4248,7 +4248,7 @@
                   <a:tcPr marL="128016" marR="128016" marT="54864" marB="54864" anchor="ctr">
                     <a:lnL w="12700" cap="flat" cmpd="sng" algn="ctr">
                       <a:solidFill>
-                        <a:srgbClr val="D5DEE9"/>
+                        <a:srgbClr val="DDDDDD"/>
                       </a:solidFill>
                       <a:prstDash val="solid"/>
                       <a:round/>
@@ -4257,7 +4257,7 @@
                     </a:lnL>
                     <a:lnR w="12700" cap="flat" cmpd="sng" algn="ctr">
                       <a:solidFill>
-                        <a:srgbClr val="D5DEE9"/>
+                        <a:srgbClr val="DDDDDD"/>
                       </a:solidFill>
                       <a:prstDash val="solid"/>
                       <a:round/>
@@ -4266,7 +4266,7 @@
                     </a:lnR>
                     <a:lnT w="12700" cap="flat" cmpd="sng" algn="ctr">
                       <a:solidFill>
-                        <a:srgbClr val="D5DEE9"/>
+                        <a:srgbClr val="DDDDDD"/>
                       </a:solidFill>
                       <a:prstDash val="solid"/>
                       <a:round/>
@@ -4275,7 +4275,7 @@
                     </a:lnT>
                     <a:lnB w="12700" cap="flat" cmpd="sng" algn="ctr">
                       <a:solidFill>
-                        <a:srgbClr val="D5DEE9"/>
+                        <a:srgbClr val="DDDDDD"/>
                       </a:solidFill>
                       <a:prstDash val="solid"/>
                       <a:round/>
@@ -4283,7 +4283,7 @@
                       <a:tailEnd type="none" w="med" len="med"/>
                     </a:lnB>
                     <a:solidFill>
-                      <a:srgbClr val="EEF3F9"/>
+                      <a:srgbClr val="F2F2F2"/>
                     </a:solidFill>
                   </a:tcPr>
                 </a:tc>
@@ -4298,7 +4298,7 @@
                       <a:r>
                         <a:rPr lang="en-US" sz="1500" dirty="0">
                           <a:solidFill>
-                            <a:srgbClr val="11182B"/>
+                            <a:srgbClr val="181818"/>
                           </a:solidFill>
                           <a:latin typeface="Calibri" pitchFamily="34" charset="0"/>
                           <a:ea typeface="Calibri" pitchFamily="34" charset="-122"/>
@@ -4316,7 +4316,7 @@
                   <a:tcPr marL="128016" marR="128016" marT="54864" marB="54864" anchor="ctr">
                     <a:lnL w="12700" cap="flat" cmpd="sng" algn="ctr">
                       <a:solidFill>
-                        <a:srgbClr val="D5DEE9"/>
+                        <a:srgbClr val="DDDDDD"/>
                       </a:solidFill>
                       <a:prstDash val="solid"/>
                       <a:round/>
@@ -4325,7 +4325,7 @@
                     </a:lnL>
                     <a:lnR w="12700" cap="flat" cmpd="sng" algn="ctr">
                       <a:solidFill>
-                        <a:srgbClr val="D5DEE9"/>
+                        <a:srgbClr val="DDDDDD"/>
                       </a:solidFill>
                       <a:prstDash val="solid"/>
                       <a:round/>
@@ -4334,7 +4334,7 @@
                     </a:lnR>
                     <a:lnT w="12700" cap="flat" cmpd="sng" algn="ctr">
                       <a:solidFill>
-                        <a:srgbClr val="D5DEE9"/>
+                        <a:srgbClr val="DDDDDD"/>
                       </a:solidFill>
                       <a:prstDash val="solid"/>
                       <a:round/>
@@ -4343,7 +4343,7 @@
                     </a:lnT>
                     <a:lnB w="12700" cap="flat" cmpd="sng" algn="ctr">
                       <a:solidFill>
-                        <a:srgbClr val="D5DEE9"/>
+                        <a:srgbClr val="DDDDDD"/>
                       </a:solidFill>
                       <a:prstDash val="solid"/>
                       <a:round/>
@@ -4351,7 +4351,7 @@
                       <a:tailEnd type="none" w="med" len="med"/>
                     </a:lnB>
                     <a:solidFill>
-                      <a:srgbClr val="EEF3F9"/>
+                      <a:srgbClr val="F2F2F2"/>
                     </a:solidFill>
                   </a:tcPr>
                 </a:tc>
@@ -4368,7 +4368,7 @@
                       <a:r>
                         <a:rPr lang="en-US" sz="1500" b="1" dirty="0">
                           <a:solidFill>
-                            <a:srgbClr val="378ADD"/>
+                            <a:srgbClr val="7B7B7B"/>
                           </a:solidFill>
                           <a:latin typeface="Calibri" pitchFamily="34" charset="0"/>
                           <a:ea typeface="Calibri" pitchFamily="34" charset="-122"/>
@@ -4386,7 +4386,7 @@
                   <a:tcPr marL="128016" marR="128016" marT="54864" marB="54864" anchor="ctr">
                     <a:lnL w="12700" cap="flat" cmpd="sng" algn="ctr">
                       <a:solidFill>
-                        <a:srgbClr val="D5DEE9"/>
+                        <a:srgbClr val="DDDDDD"/>
                       </a:solidFill>
                       <a:prstDash val="solid"/>
                       <a:round/>
@@ -4395,7 +4395,7 @@
                     </a:lnL>
                     <a:lnR w="12700" cap="flat" cmpd="sng" algn="ctr">
                       <a:solidFill>
-                        <a:srgbClr val="D5DEE9"/>
+                        <a:srgbClr val="DDDDDD"/>
                       </a:solidFill>
                       <a:prstDash val="solid"/>
                       <a:round/>
@@ -4404,7 +4404,7 @@
                     </a:lnR>
                     <a:lnT w="12700" cap="flat" cmpd="sng" algn="ctr">
                       <a:solidFill>
-                        <a:srgbClr val="D5DEE9"/>
+                        <a:srgbClr val="DDDDDD"/>
                       </a:solidFill>
                       <a:prstDash val="solid"/>
                       <a:round/>
@@ -4413,7 +4413,7 @@
                     </a:lnT>
                     <a:lnB w="12700" cap="flat" cmpd="sng" algn="ctr">
                       <a:solidFill>
-                        <a:srgbClr val="D5DEE9"/>
+                        <a:srgbClr val="DDDDDD"/>
                       </a:solidFill>
                       <a:prstDash val="solid"/>
                       <a:round/>
@@ -4436,7 +4436,7 @@
                       <a:r>
                         <a:rPr lang="en-US" sz="1500" dirty="0">
                           <a:solidFill>
-                            <a:srgbClr val="11182B"/>
+                            <a:srgbClr val="181818"/>
                           </a:solidFill>
                           <a:latin typeface="Calibri" pitchFamily="34" charset="0"/>
                           <a:ea typeface="Calibri" pitchFamily="34" charset="-122"/>
@@ -4454,7 +4454,7 @@
                   <a:tcPr marL="128016" marR="128016" marT="54864" marB="54864" anchor="ctr">
                     <a:lnL w="12700" cap="flat" cmpd="sng" algn="ctr">
                       <a:solidFill>
-                        <a:srgbClr val="D5DEE9"/>
+                        <a:srgbClr val="DDDDDD"/>
                       </a:solidFill>
                       <a:prstDash val="solid"/>
                       <a:round/>
@@ -4463,7 +4463,7 @@
                     </a:lnL>
                     <a:lnR w="12700" cap="flat" cmpd="sng" algn="ctr">
                       <a:solidFill>
-                        <a:srgbClr val="D5DEE9"/>
+                        <a:srgbClr val="DDDDDD"/>
                       </a:solidFill>
                       <a:prstDash val="solid"/>
                       <a:round/>
@@ -4472,7 +4472,7 @@
                     </a:lnR>
                     <a:lnT w="12700" cap="flat" cmpd="sng" algn="ctr">
                       <a:solidFill>
-                        <a:srgbClr val="D5DEE9"/>
+                        <a:srgbClr val="DDDDDD"/>
                       </a:solidFill>
                       <a:prstDash val="solid"/>
                       <a:round/>
@@ -4481,7 +4481,7 @@
                     </a:lnT>
                     <a:lnB w="12700" cap="flat" cmpd="sng" algn="ctr">
                       <a:solidFill>
-                        <a:srgbClr val="D5DEE9"/>
+                        <a:srgbClr val="DDDDDD"/>
                       </a:solidFill>
                       <a:prstDash val="solid"/>
                       <a:round/>
@@ -4504,7 +4504,7 @@
                       <a:r>
                         <a:rPr lang="en-US" sz="1500" dirty="0">
                           <a:solidFill>
-                            <a:srgbClr val="11182B"/>
+                            <a:srgbClr val="181818"/>
                           </a:solidFill>
                           <a:latin typeface="Calibri" pitchFamily="34" charset="0"/>
                           <a:ea typeface="Calibri" pitchFamily="34" charset="-122"/>
@@ -4522,7 +4522,7 @@
                   <a:tcPr marL="128016" marR="128016" marT="54864" marB="54864" anchor="ctr">
                     <a:lnL w="12700" cap="flat" cmpd="sng" algn="ctr">
                       <a:solidFill>
-                        <a:srgbClr val="D5DEE9"/>
+                        <a:srgbClr val="DDDDDD"/>
                       </a:solidFill>
                       <a:prstDash val="solid"/>
                       <a:round/>
@@ -4531,7 +4531,7 @@
                     </a:lnL>
                     <a:lnR w="12700" cap="flat" cmpd="sng" algn="ctr">
                       <a:solidFill>
-                        <a:srgbClr val="D5DEE9"/>
+                        <a:srgbClr val="DDDDDD"/>
                       </a:solidFill>
                       <a:prstDash val="solid"/>
                       <a:round/>
@@ -4540,7 +4540,7 @@
                     </a:lnR>
                     <a:lnT w="12700" cap="flat" cmpd="sng" algn="ctr">
                       <a:solidFill>
-                        <a:srgbClr val="D5DEE9"/>
+                        <a:srgbClr val="DDDDDD"/>
                       </a:solidFill>
                       <a:prstDash val="solid"/>
                       <a:round/>
@@ -4549,7 +4549,7 @@
                     </a:lnT>
                     <a:lnB w="12700" cap="flat" cmpd="sng" algn="ctr">
                       <a:solidFill>
-                        <a:srgbClr val="D5DEE9"/>
+                        <a:srgbClr val="DDDDDD"/>
                       </a:solidFill>
                       <a:prstDash val="solid"/>
                       <a:round/>
@@ -4572,7 +4572,7 @@
                       <a:r>
                         <a:rPr lang="en-US" sz="1500" dirty="0">
                           <a:solidFill>
-                            <a:srgbClr val="11182B"/>
+                            <a:srgbClr val="181818"/>
                           </a:solidFill>
                           <a:latin typeface="Calibri" pitchFamily="34" charset="0"/>
                           <a:ea typeface="Calibri" pitchFamily="34" charset="-122"/>
@@ -4590,7 +4590,7 @@
                   <a:tcPr marL="128016" marR="128016" marT="54864" marB="54864" anchor="ctr">
                     <a:lnL w="12700" cap="flat" cmpd="sng" algn="ctr">
                       <a:solidFill>
-                        <a:srgbClr val="D5DEE9"/>
+                        <a:srgbClr val="DDDDDD"/>
                       </a:solidFill>
                       <a:prstDash val="solid"/>
                       <a:round/>
@@ -4599,7 +4599,7 @@
                     </a:lnL>
                     <a:lnR w="12700" cap="flat" cmpd="sng" algn="ctr">
                       <a:solidFill>
-                        <a:srgbClr val="D5DEE9"/>
+                        <a:srgbClr val="DDDDDD"/>
                       </a:solidFill>
                       <a:prstDash val="solid"/>
                       <a:round/>
@@ -4608,7 +4608,7 @@
                     </a:lnR>
                     <a:lnT w="12700" cap="flat" cmpd="sng" algn="ctr">
                       <a:solidFill>
-                        <a:srgbClr val="D5DEE9"/>
+                        <a:srgbClr val="DDDDDD"/>
                       </a:solidFill>
                       <a:prstDash val="solid"/>
                       <a:round/>
@@ -4617,7 +4617,7 @@
                     </a:lnT>
                     <a:lnB w="12700" cap="flat" cmpd="sng" algn="ctr">
                       <a:solidFill>
-                        <a:srgbClr val="D5DEE9"/>
+                        <a:srgbClr val="DDDDDD"/>
                       </a:solidFill>
                       <a:prstDash val="solid"/>
                       <a:round/>
@@ -4640,7 +4640,7 @@
                       <a:r>
                         <a:rPr lang="en-US" sz="1500" dirty="0">
                           <a:solidFill>
-                            <a:srgbClr val="11182B"/>
+                            <a:srgbClr val="181818"/>
                           </a:solidFill>
                           <a:latin typeface="Calibri" pitchFamily="34" charset="0"/>
                           <a:ea typeface="Calibri" pitchFamily="34" charset="-122"/>
@@ -4658,7 +4658,7 @@
                   <a:tcPr marL="128016" marR="128016" marT="54864" marB="54864" anchor="ctr">
                     <a:lnL w="12700" cap="flat" cmpd="sng" algn="ctr">
                       <a:solidFill>
-                        <a:srgbClr val="D5DEE9"/>
+                        <a:srgbClr val="DDDDDD"/>
                       </a:solidFill>
                       <a:prstDash val="solid"/>
                       <a:round/>
@@ -4667,7 +4667,7 @@
                     </a:lnL>
                     <a:lnR w="12700" cap="flat" cmpd="sng" algn="ctr">
                       <a:solidFill>
-                        <a:srgbClr val="D5DEE9"/>
+                        <a:srgbClr val="DDDDDD"/>
                       </a:solidFill>
                       <a:prstDash val="solid"/>
                       <a:round/>
@@ -4676,7 +4676,7 @@
                     </a:lnR>
                     <a:lnT w="12700" cap="flat" cmpd="sng" algn="ctr">
                       <a:solidFill>
-                        <a:srgbClr val="D5DEE9"/>
+                        <a:srgbClr val="DDDDDD"/>
                       </a:solidFill>
                       <a:prstDash val="solid"/>
                       <a:round/>
@@ -4685,7 +4685,7 @@
                     </a:lnT>
                     <a:lnB w="12700" cap="flat" cmpd="sng" algn="ctr">
                       <a:solidFill>
-                        <a:srgbClr val="D5DEE9"/>
+                        <a:srgbClr val="DDDDDD"/>
                       </a:solidFill>
                       <a:prstDash val="solid"/>
                       <a:round/>
@@ -4710,7 +4710,7 @@
                       <a:r>
                         <a:rPr lang="en-US" sz="1500" b="1" dirty="0">
                           <a:solidFill>
-                            <a:srgbClr val="378ADD"/>
+                            <a:srgbClr val="7B7B7B"/>
                           </a:solidFill>
                           <a:latin typeface="Calibri" pitchFamily="34" charset="0"/>
                           <a:ea typeface="Calibri" pitchFamily="34" charset="-122"/>
@@ -4728,7 +4728,7 @@
                   <a:tcPr marL="128016" marR="128016" marT="54864" marB="54864" anchor="ctr">
                     <a:lnL w="12700" cap="flat" cmpd="sng" algn="ctr">
                       <a:solidFill>
-                        <a:srgbClr val="D5DEE9"/>
+                        <a:srgbClr val="DDDDDD"/>
                       </a:solidFill>
                       <a:prstDash val="solid"/>
                       <a:round/>
@@ -4737,7 +4737,7 @@
                     </a:lnL>
                     <a:lnR w="12700" cap="flat" cmpd="sng" algn="ctr">
                       <a:solidFill>
-                        <a:srgbClr val="D5DEE9"/>
+                        <a:srgbClr val="DDDDDD"/>
                       </a:solidFill>
                       <a:prstDash val="solid"/>
                       <a:round/>
@@ -4746,7 +4746,7 @@
                     </a:lnR>
                     <a:lnT w="12700" cap="flat" cmpd="sng" algn="ctr">
                       <a:solidFill>
-                        <a:srgbClr val="D5DEE9"/>
+                        <a:srgbClr val="DDDDDD"/>
                       </a:solidFill>
                       <a:prstDash val="solid"/>
                       <a:round/>
@@ -4755,7 +4755,7 @@
                     </a:lnT>
                     <a:lnB w="12700" cap="flat" cmpd="sng" algn="ctr">
                       <a:solidFill>
-                        <a:srgbClr val="D5DEE9"/>
+                        <a:srgbClr val="DDDDDD"/>
                       </a:solidFill>
                       <a:prstDash val="solid"/>
                       <a:round/>
@@ -4763,7 +4763,7 @@
                       <a:tailEnd type="none" w="med" len="med"/>
                     </a:lnB>
                     <a:solidFill>
-                      <a:srgbClr val="EEF3F9"/>
+                      <a:srgbClr val="F2F2F2"/>
                     </a:solidFill>
                   </a:tcPr>
                 </a:tc>
@@ -4778,7 +4778,7 @@
                       <a:r>
                         <a:rPr lang="en-US" sz="1500" dirty="0">
                           <a:solidFill>
-                            <a:srgbClr val="11182B"/>
+                            <a:srgbClr val="181818"/>
                           </a:solidFill>
                           <a:latin typeface="Calibri" pitchFamily="34" charset="0"/>
                           <a:ea typeface="Calibri" pitchFamily="34" charset="-122"/>
@@ -4796,7 +4796,7 @@
                   <a:tcPr marL="128016" marR="128016" marT="54864" marB="54864" anchor="ctr">
                     <a:lnL w="12700" cap="flat" cmpd="sng" algn="ctr">
                       <a:solidFill>
-                        <a:srgbClr val="D5DEE9"/>
+                        <a:srgbClr val="DDDDDD"/>
                       </a:solidFill>
                       <a:prstDash val="solid"/>
                       <a:round/>
@@ -4805,7 +4805,7 @@
                     </a:lnL>
                     <a:lnR w="12700" cap="flat" cmpd="sng" algn="ctr">
                       <a:solidFill>
-                        <a:srgbClr val="D5DEE9"/>
+                        <a:srgbClr val="DDDDDD"/>
                       </a:solidFill>
                       <a:prstDash val="solid"/>
                       <a:round/>
@@ -4814,7 +4814,7 @@
                     </a:lnR>
                     <a:lnT w="12700" cap="flat" cmpd="sng" algn="ctr">
                       <a:solidFill>
-                        <a:srgbClr val="D5DEE9"/>
+                        <a:srgbClr val="DDDDDD"/>
                       </a:solidFill>
                       <a:prstDash val="solid"/>
                       <a:round/>
@@ -4823,7 +4823,7 @@
                     </a:lnT>
                     <a:lnB w="12700" cap="flat" cmpd="sng" algn="ctr">
                       <a:solidFill>
-                        <a:srgbClr val="D5DEE9"/>
+                        <a:srgbClr val="DDDDDD"/>
                       </a:solidFill>
                       <a:prstDash val="solid"/>
                       <a:round/>
@@ -4831,7 +4831,7 @@
                       <a:tailEnd type="none" w="med" len="med"/>
                     </a:lnB>
                     <a:solidFill>
-                      <a:srgbClr val="EEF3F9"/>
+                      <a:srgbClr val="F2F2F2"/>
                     </a:solidFill>
                   </a:tcPr>
                 </a:tc>
@@ -4846,7 +4846,7 @@
                       <a:r>
                         <a:rPr lang="en-US" sz="1500" dirty="0">
                           <a:solidFill>
-                            <a:srgbClr val="11182B"/>
+                            <a:srgbClr val="181818"/>
                           </a:solidFill>
                           <a:latin typeface="Calibri" pitchFamily="34" charset="0"/>
                           <a:ea typeface="Calibri" pitchFamily="34" charset="-122"/>
@@ -4864,7 +4864,7 @@
                   <a:tcPr marL="128016" marR="128016" marT="54864" marB="54864" anchor="ctr">
                     <a:lnL w="12700" cap="flat" cmpd="sng" algn="ctr">
                       <a:solidFill>
-                        <a:srgbClr val="D5DEE9"/>
+                        <a:srgbClr val="DDDDDD"/>
                       </a:solidFill>
                       <a:prstDash val="solid"/>
                       <a:round/>
@@ -4873,7 +4873,7 @@
                     </a:lnL>
                     <a:lnR w="12700" cap="flat" cmpd="sng" algn="ctr">
                       <a:solidFill>
-                        <a:srgbClr val="D5DEE9"/>
+                        <a:srgbClr val="DDDDDD"/>
                       </a:solidFill>
                       <a:prstDash val="solid"/>
                       <a:round/>
@@ -4882,7 +4882,7 @@
                     </a:lnR>
                     <a:lnT w="12700" cap="flat" cmpd="sng" algn="ctr">
                       <a:solidFill>
-                        <a:srgbClr val="D5DEE9"/>
+                        <a:srgbClr val="DDDDDD"/>
                       </a:solidFill>
                       <a:prstDash val="solid"/>
                       <a:round/>
@@ -4891,7 +4891,7 @@
                     </a:lnT>
                     <a:lnB w="12700" cap="flat" cmpd="sng" algn="ctr">
                       <a:solidFill>
-                        <a:srgbClr val="D5DEE9"/>
+                        <a:srgbClr val="DDDDDD"/>
                       </a:solidFill>
                       <a:prstDash val="solid"/>
                       <a:round/>
@@ -4899,7 +4899,7 @@
                       <a:tailEnd type="none" w="med" len="med"/>
                     </a:lnB>
                     <a:solidFill>
-                      <a:srgbClr val="EEF3F9"/>
+                      <a:srgbClr val="F2F2F2"/>
                     </a:solidFill>
                   </a:tcPr>
                 </a:tc>
@@ -4914,7 +4914,7 @@
                       <a:r>
                         <a:rPr lang="en-US" sz="1500" dirty="0">
                           <a:solidFill>
-                            <a:srgbClr val="11182B"/>
+                            <a:srgbClr val="181818"/>
                           </a:solidFill>
                           <a:latin typeface="Calibri" pitchFamily="34" charset="0"/>
                           <a:ea typeface="Calibri" pitchFamily="34" charset="-122"/>
@@ -4932,7 +4932,7 @@
                   <a:tcPr marL="128016" marR="128016" marT="54864" marB="54864" anchor="ctr">
                     <a:lnL w="12700" cap="flat" cmpd="sng" algn="ctr">
                       <a:solidFill>
-                        <a:srgbClr val="D5DEE9"/>
+                        <a:srgbClr val="DDDDDD"/>
                       </a:solidFill>
                       <a:prstDash val="solid"/>
                       <a:round/>
@@ -4941,7 +4941,7 @@
                     </a:lnL>
                     <a:lnR w="12700" cap="flat" cmpd="sng" algn="ctr">
                       <a:solidFill>
-                        <a:srgbClr val="D5DEE9"/>
+                        <a:srgbClr val="DDDDDD"/>
                       </a:solidFill>
                       <a:prstDash val="solid"/>
                       <a:round/>
@@ -4950,7 +4950,7 @@
                     </a:lnR>
                     <a:lnT w="12700" cap="flat" cmpd="sng" algn="ctr">
                       <a:solidFill>
-                        <a:srgbClr val="D5DEE9"/>
+                        <a:srgbClr val="DDDDDD"/>
                       </a:solidFill>
                       <a:prstDash val="solid"/>
                       <a:round/>
@@ -4959,7 +4959,7 @@
                     </a:lnT>
                     <a:lnB w="12700" cap="flat" cmpd="sng" algn="ctr">
                       <a:solidFill>
-                        <a:srgbClr val="D5DEE9"/>
+                        <a:srgbClr val="DDDDDD"/>
                       </a:solidFill>
                       <a:prstDash val="solid"/>
                       <a:round/>
@@ -4967,7 +4967,7 @@
                       <a:tailEnd type="none" w="med" len="med"/>
                     </a:lnB>
                     <a:solidFill>
-                      <a:srgbClr val="EEF3F9"/>
+                      <a:srgbClr val="F2F2F2"/>
                     </a:solidFill>
                   </a:tcPr>
                 </a:tc>
@@ -4982,7 +4982,7 @@
                       <a:r>
                         <a:rPr lang="en-US" sz="1500" dirty="0">
                           <a:solidFill>
-                            <a:srgbClr val="11182B"/>
+                            <a:srgbClr val="181818"/>
                           </a:solidFill>
                           <a:latin typeface="Calibri" pitchFamily="34" charset="0"/>
                           <a:ea typeface="Calibri" pitchFamily="34" charset="-122"/>
@@ -5000,7 +5000,7 @@
                   <a:tcPr marL="128016" marR="128016" marT="54864" marB="54864" anchor="ctr">
                     <a:lnL w="12700" cap="flat" cmpd="sng" algn="ctr">
                       <a:solidFill>
-                        <a:srgbClr val="D5DEE9"/>
+                        <a:srgbClr val="DDDDDD"/>
                       </a:solidFill>
                       <a:prstDash val="solid"/>
                       <a:round/>
@@ -5009,7 +5009,7 @@
                     </a:lnL>
                     <a:lnR w="12700" cap="flat" cmpd="sng" algn="ctr">
                       <a:solidFill>
-                        <a:srgbClr val="D5DEE9"/>
+                        <a:srgbClr val="DDDDDD"/>
                       </a:solidFill>
                       <a:prstDash val="solid"/>
                       <a:round/>
@@ -5018,7 +5018,7 @@
                     </a:lnR>
                     <a:lnT w="12700" cap="flat" cmpd="sng" algn="ctr">
                       <a:solidFill>
-                        <a:srgbClr val="D5DEE9"/>
+                        <a:srgbClr val="DDDDDD"/>
                       </a:solidFill>
                       <a:prstDash val="solid"/>
                       <a:round/>
@@ -5027,7 +5027,7 @@
                     </a:lnT>
                     <a:lnB w="12700" cap="flat" cmpd="sng" algn="ctr">
                       <a:solidFill>
-                        <a:srgbClr val="D5DEE9"/>
+                        <a:srgbClr val="DDDDDD"/>
                       </a:solidFill>
                       <a:prstDash val="solid"/>
                       <a:round/>
@@ -5035,7 +5035,7 @@
                       <a:tailEnd type="none" w="med" len="med"/>
                     </a:lnB>
                     <a:solidFill>
-                      <a:srgbClr val="EEF3F9"/>
+                      <a:srgbClr val="F2F2F2"/>
                     </a:solidFill>
                   </a:tcPr>
                 </a:tc>
@@ -5052,7 +5052,7 @@
                       <a:r>
                         <a:rPr lang="en-US" sz="1500" b="1" dirty="0">
                           <a:solidFill>
-                            <a:srgbClr val="378ADD"/>
+                            <a:srgbClr val="7B7B7B"/>
                           </a:solidFill>
                           <a:latin typeface="Calibri" pitchFamily="34" charset="0"/>
                           <a:ea typeface="Calibri" pitchFamily="34" charset="-122"/>
@@ -5070,7 +5070,7 @@
                   <a:tcPr marL="128016" marR="128016" marT="54864" marB="54864" anchor="ctr">
                     <a:lnL w="12700" cap="flat" cmpd="sng" algn="ctr">
                       <a:solidFill>
-                        <a:srgbClr val="D5DEE9"/>
+                        <a:srgbClr val="DDDDDD"/>
                       </a:solidFill>
                       <a:prstDash val="solid"/>
                       <a:round/>
@@ -5079,7 +5079,7 @@
                     </a:lnL>
                     <a:lnR w="12700" cap="flat" cmpd="sng" algn="ctr">
                       <a:solidFill>
-                        <a:srgbClr val="D5DEE9"/>
+                        <a:srgbClr val="DDDDDD"/>
                       </a:solidFill>
                       <a:prstDash val="solid"/>
                       <a:round/>
@@ -5088,7 +5088,7 @@
                     </a:lnR>
                     <a:lnT w="12700" cap="flat" cmpd="sng" algn="ctr">
                       <a:solidFill>
-                        <a:srgbClr val="D5DEE9"/>
+                        <a:srgbClr val="DDDDDD"/>
                       </a:solidFill>
                       <a:prstDash val="solid"/>
                       <a:round/>
@@ -5097,7 +5097,7 @@
                     </a:lnT>
                     <a:lnB w="12700" cap="flat" cmpd="sng" algn="ctr">
                       <a:solidFill>
-                        <a:srgbClr val="D5DEE9"/>
+                        <a:srgbClr val="DDDDDD"/>
                       </a:solidFill>
                       <a:prstDash val="solid"/>
                       <a:round/>
@@ -5120,7 +5120,7 @@
                       <a:r>
                         <a:rPr lang="en-US" sz="1500" dirty="0">
                           <a:solidFill>
-                            <a:srgbClr val="11182B"/>
+                            <a:srgbClr val="181818"/>
                           </a:solidFill>
                           <a:latin typeface="Calibri" pitchFamily="34" charset="0"/>
                           <a:ea typeface="Calibri" pitchFamily="34" charset="-122"/>
@@ -5138,7 +5138,7 @@
                   <a:tcPr marL="128016" marR="128016" marT="54864" marB="54864" anchor="ctr">
                     <a:lnL w="12700" cap="flat" cmpd="sng" algn="ctr">
                       <a:solidFill>
-                        <a:srgbClr val="D5DEE9"/>
+                        <a:srgbClr val="DDDDDD"/>
                       </a:solidFill>
                       <a:prstDash val="solid"/>
                       <a:round/>
@@ -5147,7 +5147,7 @@
                     </a:lnL>
                     <a:lnR w="12700" cap="flat" cmpd="sng" algn="ctr">
                       <a:solidFill>
-                        <a:srgbClr val="D5DEE9"/>
+                        <a:srgbClr val="DDDDDD"/>
                       </a:solidFill>
                       <a:prstDash val="solid"/>
                       <a:round/>
@@ -5156,7 +5156,7 @@
                     </a:lnR>
                     <a:lnT w="12700" cap="flat" cmpd="sng" algn="ctr">
                       <a:solidFill>
-                        <a:srgbClr val="D5DEE9"/>
+                        <a:srgbClr val="DDDDDD"/>
                       </a:solidFill>
                       <a:prstDash val="solid"/>
                       <a:round/>
@@ -5165,7 +5165,7 @@
                     </a:lnT>
                     <a:lnB w="12700" cap="flat" cmpd="sng" algn="ctr">
                       <a:solidFill>
-                        <a:srgbClr val="D5DEE9"/>
+                        <a:srgbClr val="DDDDDD"/>
                       </a:solidFill>
                       <a:prstDash val="solid"/>
                       <a:round/>
@@ -5188,7 +5188,7 @@
                       <a:r>
                         <a:rPr lang="en-US" sz="1500" dirty="0">
                           <a:solidFill>
-                            <a:srgbClr val="11182B"/>
+                            <a:srgbClr val="181818"/>
                           </a:solidFill>
                           <a:latin typeface="Calibri" pitchFamily="34" charset="0"/>
                           <a:ea typeface="Calibri" pitchFamily="34" charset="-122"/>
@@ -5206,7 +5206,7 @@
                   <a:tcPr marL="128016" marR="128016" marT="54864" marB="54864" anchor="ctr">
                     <a:lnL w="12700" cap="flat" cmpd="sng" algn="ctr">
                       <a:solidFill>
-                        <a:srgbClr val="D5DEE9"/>
+                        <a:srgbClr val="DDDDDD"/>
                       </a:solidFill>
                       <a:prstDash val="solid"/>
                       <a:round/>
@@ -5215,7 +5215,7 @@
                     </a:lnL>
                     <a:lnR w="12700" cap="flat" cmpd="sng" algn="ctr">
                       <a:solidFill>
-                        <a:srgbClr val="D5DEE9"/>
+                        <a:srgbClr val="DDDDDD"/>
                       </a:solidFill>
                       <a:prstDash val="solid"/>
                       <a:round/>
@@ -5224,7 +5224,7 @@
                     </a:lnR>
                     <a:lnT w="12700" cap="flat" cmpd="sng" algn="ctr">
                       <a:solidFill>
-                        <a:srgbClr val="D5DEE9"/>
+                        <a:srgbClr val="DDDDDD"/>
                       </a:solidFill>
                       <a:prstDash val="solid"/>
                       <a:round/>
@@ -5233,7 +5233,7 @@
                     </a:lnT>
                     <a:lnB w="12700" cap="flat" cmpd="sng" algn="ctr">
                       <a:solidFill>
-                        <a:srgbClr val="D5DEE9"/>
+                        <a:srgbClr val="DDDDDD"/>
                       </a:solidFill>
                       <a:prstDash val="solid"/>
                       <a:round/>
@@ -5256,7 +5256,7 @@
                       <a:r>
                         <a:rPr lang="en-US" sz="1500" dirty="0">
                           <a:solidFill>
-                            <a:srgbClr val="11182B"/>
+                            <a:srgbClr val="181818"/>
                           </a:solidFill>
                           <a:latin typeface="Calibri" pitchFamily="34" charset="0"/>
                           <a:ea typeface="Calibri" pitchFamily="34" charset="-122"/>
@@ -5274,7 +5274,7 @@
                   <a:tcPr marL="128016" marR="128016" marT="54864" marB="54864" anchor="ctr">
                     <a:lnL w="12700" cap="flat" cmpd="sng" algn="ctr">
                       <a:solidFill>
-                        <a:srgbClr val="D5DEE9"/>
+                        <a:srgbClr val="DDDDDD"/>
                       </a:solidFill>
                       <a:prstDash val="solid"/>
                       <a:round/>
@@ -5283,7 +5283,7 @@
                     </a:lnL>
                     <a:lnR w="12700" cap="flat" cmpd="sng" algn="ctr">
                       <a:solidFill>
-                        <a:srgbClr val="D5DEE9"/>
+                        <a:srgbClr val="DDDDDD"/>
                       </a:solidFill>
                       <a:prstDash val="solid"/>
                       <a:round/>
@@ -5292,7 +5292,7 @@
                     </a:lnR>
                     <a:lnT w="12700" cap="flat" cmpd="sng" algn="ctr">
                       <a:solidFill>
-                        <a:srgbClr val="D5DEE9"/>
+                        <a:srgbClr val="DDDDDD"/>
                       </a:solidFill>
                       <a:prstDash val="solid"/>
                       <a:round/>
@@ -5301,7 +5301,7 @@
                     </a:lnT>
                     <a:lnB w="12700" cap="flat" cmpd="sng" algn="ctr">
                       <a:solidFill>
-                        <a:srgbClr val="D5DEE9"/>
+                        <a:srgbClr val="DDDDDD"/>
                       </a:solidFill>
                       <a:prstDash val="solid"/>
                       <a:round/>
@@ -5324,7 +5324,7 @@
                       <a:r>
                         <a:rPr lang="en-US" sz="1500" dirty="0">
                           <a:solidFill>
-                            <a:srgbClr val="11182B"/>
+                            <a:srgbClr val="181818"/>
                           </a:solidFill>
                           <a:latin typeface="Calibri" pitchFamily="34" charset="0"/>
                           <a:ea typeface="Calibri" pitchFamily="34" charset="-122"/>
@@ -5342,7 +5342,7 @@
                   <a:tcPr marL="128016" marR="128016" marT="54864" marB="54864" anchor="ctr">
                     <a:lnL w="12700" cap="flat" cmpd="sng" algn="ctr">
                       <a:solidFill>
-                        <a:srgbClr val="D5DEE9"/>
+                        <a:srgbClr val="DDDDDD"/>
                       </a:solidFill>
                       <a:prstDash val="solid"/>
                       <a:round/>
@@ -5351,7 +5351,7 @@
                     </a:lnL>
                     <a:lnR w="12700" cap="flat" cmpd="sng" algn="ctr">
                       <a:solidFill>
-                        <a:srgbClr val="D5DEE9"/>
+                        <a:srgbClr val="DDDDDD"/>
                       </a:solidFill>
                       <a:prstDash val="solid"/>
                       <a:round/>
@@ -5360,7 +5360,7 @@
                     </a:lnR>
                     <a:lnT w="12700" cap="flat" cmpd="sng" algn="ctr">
                       <a:solidFill>
-                        <a:srgbClr val="D5DEE9"/>
+                        <a:srgbClr val="DDDDDD"/>
                       </a:solidFill>
                       <a:prstDash val="solid"/>
                       <a:round/>
@@ -5369,7 +5369,7 @@
                     </a:lnT>
                     <a:lnB w="12700" cap="flat" cmpd="sng" algn="ctr">
                       <a:solidFill>
-                        <a:srgbClr val="D5DEE9"/>
+                        <a:srgbClr val="DDDDDD"/>
                       </a:solidFill>
                       <a:prstDash val="solid"/>
                       <a:round/>
@@ -5394,7 +5394,7 @@
                       <a:r>
                         <a:rPr lang="en-US" sz="1500" b="1" dirty="0">
                           <a:solidFill>
-                            <a:srgbClr val="378ADD"/>
+                            <a:srgbClr val="7B7B7B"/>
                           </a:solidFill>
                           <a:latin typeface="Calibri" pitchFamily="34" charset="0"/>
                           <a:ea typeface="Calibri" pitchFamily="34" charset="-122"/>
@@ -5412,7 +5412,7 @@
                   <a:tcPr marL="128016" marR="128016" marT="54864" marB="54864" anchor="ctr">
                     <a:lnL w="12700" cap="flat" cmpd="sng" algn="ctr">
                       <a:solidFill>
-                        <a:srgbClr val="D5DEE9"/>
+                        <a:srgbClr val="DDDDDD"/>
                       </a:solidFill>
                       <a:prstDash val="solid"/>
                       <a:round/>
@@ -5421,7 +5421,7 @@
                     </a:lnL>
                     <a:lnR w="12700" cap="flat" cmpd="sng" algn="ctr">
                       <a:solidFill>
-                        <a:srgbClr val="D5DEE9"/>
+                        <a:srgbClr val="DDDDDD"/>
                       </a:solidFill>
                       <a:prstDash val="solid"/>
                       <a:round/>
@@ -5430,7 +5430,7 @@
                     </a:lnR>
                     <a:lnT w="12700" cap="flat" cmpd="sng" algn="ctr">
                       <a:solidFill>
-                        <a:srgbClr val="D5DEE9"/>
+                        <a:srgbClr val="DDDDDD"/>
                       </a:solidFill>
                       <a:prstDash val="solid"/>
                       <a:round/>
@@ -5439,7 +5439,7 @@
                     </a:lnT>
                     <a:lnB w="12700" cap="flat" cmpd="sng" algn="ctr">
                       <a:solidFill>
-                        <a:srgbClr val="D5DEE9"/>
+                        <a:srgbClr val="DDDDDD"/>
                       </a:solidFill>
                       <a:prstDash val="solid"/>
                       <a:round/>
@@ -5447,7 +5447,7 @@
                       <a:tailEnd type="none" w="med" len="med"/>
                     </a:lnB>
                     <a:solidFill>
-                      <a:srgbClr val="EEF3F9"/>
+                      <a:srgbClr val="F2F2F2"/>
                     </a:solidFill>
                   </a:tcPr>
                 </a:tc>
@@ -5462,7 +5462,7 @@
                       <a:r>
                         <a:rPr lang="en-US" sz="1500" dirty="0">
                           <a:solidFill>
-                            <a:srgbClr val="11182B"/>
+                            <a:srgbClr val="181818"/>
                           </a:solidFill>
                           <a:latin typeface="Calibri" pitchFamily="34" charset="0"/>
                           <a:ea typeface="Calibri" pitchFamily="34" charset="-122"/>
@@ -5480,7 +5480,7 @@
                   <a:tcPr marL="128016" marR="128016" marT="54864" marB="54864" anchor="ctr">
                     <a:lnL w="12700" cap="flat" cmpd="sng" algn="ctr">
                       <a:solidFill>
-                        <a:srgbClr val="D5DEE9"/>
+                        <a:srgbClr val="DDDDDD"/>
                       </a:solidFill>
                       <a:prstDash val="solid"/>
                       <a:round/>
@@ -5489,7 +5489,7 @@
                     </a:lnL>
                     <a:lnR w="12700" cap="flat" cmpd="sng" algn="ctr">
                       <a:solidFill>
-                        <a:srgbClr val="D5DEE9"/>
+                        <a:srgbClr val="DDDDDD"/>
                       </a:solidFill>
                       <a:prstDash val="solid"/>
                       <a:round/>
@@ -5498,7 +5498,7 @@
                     </a:lnR>
                     <a:lnT w="12700" cap="flat" cmpd="sng" algn="ctr">
                       <a:solidFill>
-                        <a:srgbClr val="D5DEE9"/>
+                        <a:srgbClr val="DDDDDD"/>
                       </a:solidFill>
                       <a:prstDash val="solid"/>
                       <a:round/>
@@ -5507,7 +5507,7 @@
                     </a:lnT>
                     <a:lnB w="12700" cap="flat" cmpd="sng" algn="ctr">
                       <a:solidFill>
-                        <a:srgbClr val="D5DEE9"/>
+                        <a:srgbClr val="DDDDDD"/>
                       </a:solidFill>
                       <a:prstDash val="solid"/>
                       <a:round/>
@@ -5515,7 +5515,7 @@
                       <a:tailEnd type="none" w="med" len="med"/>
                     </a:lnB>
                     <a:solidFill>
-                      <a:srgbClr val="EEF3F9"/>
+                      <a:srgbClr val="F2F2F2"/>
                     </a:solidFill>
                   </a:tcPr>
                 </a:tc>
@@ -5530,7 +5530,7 @@
                       <a:r>
                         <a:rPr lang="en-US" sz="1500" dirty="0">
                           <a:solidFill>
-                            <a:srgbClr val="11182B"/>
+                            <a:srgbClr val="181818"/>
                           </a:solidFill>
                           <a:latin typeface="Calibri" pitchFamily="34" charset="0"/>
                           <a:ea typeface="Calibri" pitchFamily="34" charset="-122"/>
@@ -5548,7 +5548,7 @@
                   <a:tcPr marL="128016" marR="128016" marT="54864" marB="54864" anchor="ctr">
                     <a:lnL w="12700" cap="flat" cmpd="sng" algn="ctr">
                       <a:solidFill>
-                        <a:srgbClr val="D5DEE9"/>
+                        <a:srgbClr val="DDDDDD"/>
                       </a:solidFill>
                       <a:prstDash val="solid"/>
                       <a:round/>
@@ -5557,7 +5557,7 @@
                     </a:lnL>
                     <a:lnR w="12700" cap="flat" cmpd="sng" algn="ctr">
                       <a:solidFill>
-                        <a:srgbClr val="D5DEE9"/>
+                        <a:srgbClr val="DDDDDD"/>
                       </a:solidFill>
                       <a:prstDash val="solid"/>
                       <a:round/>
@@ -5566,7 +5566,7 @@
                     </a:lnR>
                     <a:lnT w="12700" cap="flat" cmpd="sng" algn="ctr">
                       <a:solidFill>
-                        <a:srgbClr val="D5DEE9"/>
+                        <a:srgbClr val="DDDDDD"/>
                       </a:solidFill>
                       <a:prstDash val="solid"/>
                       <a:round/>
@@ -5575,7 +5575,7 @@
                     </a:lnT>
                     <a:lnB w="12700" cap="flat" cmpd="sng" algn="ctr">
                       <a:solidFill>
-                        <a:srgbClr val="D5DEE9"/>
+                        <a:srgbClr val="DDDDDD"/>
                       </a:solidFill>
                       <a:prstDash val="solid"/>
                       <a:round/>
@@ -5583,7 +5583,7 @@
                       <a:tailEnd type="none" w="med" len="med"/>
                     </a:lnB>
                     <a:solidFill>
-                      <a:srgbClr val="EEF3F9"/>
+                      <a:srgbClr val="F2F2F2"/>
                     </a:solidFill>
                   </a:tcPr>
                 </a:tc>
@@ -5598,7 +5598,7 @@
                       <a:r>
                         <a:rPr lang="en-US" sz="1500" dirty="0">
                           <a:solidFill>
-                            <a:srgbClr val="11182B"/>
+                            <a:srgbClr val="181818"/>
                           </a:solidFill>
                           <a:latin typeface="Calibri" pitchFamily="34" charset="0"/>
                           <a:ea typeface="Calibri" pitchFamily="34" charset="-122"/>
@@ -5616,7 +5616,7 @@
                   <a:tcPr marL="128016" marR="128016" marT="54864" marB="54864" anchor="ctr">
                     <a:lnL w="12700" cap="flat" cmpd="sng" algn="ctr">
                       <a:solidFill>
-                        <a:srgbClr val="D5DEE9"/>
+                        <a:srgbClr val="DDDDDD"/>
                       </a:solidFill>
                       <a:prstDash val="solid"/>
                       <a:round/>
@@ -5625,7 +5625,7 @@
                     </a:lnL>
                     <a:lnR w="12700" cap="flat" cmpd="sng" algn="ctr">
                       <a:solidFill>
-                        <a:srgbClr val="D5DEE9"/>
+                        <a:srgbClr val="DDDDDD"/>
                       </a:solidFill>
                       <a:prstDash val="solid"/>
                       <a:round/>
@@ -5634,7 +5634,7 @@
                     </a:lnR>
                     <a:lnT w="12700" cap="flat" cmpd="sng" algn="ctr">
                       <a:solidFill>
-                        <a:srgbClr val="D5DEE9"/>
+                        <a:srgbClr val="DDDDDD"/>
                       </a:solidFill>
                       <a:prstDash val="solid"/>
                       <a:round/>
@@ -5643,7 +5643,7 @@
                     </a:lnT>
                     <a:lnB w="12700" cap="flat" cmpd="sng" algn="ctr">
                       <a:solidFill>
-                        <a:srgbClr val="D5DEE9"/>
+                        <a:srgbClr val="DDDDDD"/>
                       </a:solidFill>
                       <a:prstDash val="solid"/>
                       <a:round/>
@@ -5651,7 +5651,7 @@
                       <a:tailEnd type="none" w="med" len="med"/>
                     </a:lnB>
                     <a:solidFill>
-                      <a:srgbClr val="EEF3F9"/>
+                      <a:srgbClr val="F2F2F2"/>
                     </a:solidFill>
                   </a:tcPr>
                 </a:tc>
@@ -5666,7 +5666,7 @@
                       <a:r>
                         <a:rPr lang="en-US" sz="1500" dirty="0">
                           <a:solidFill>
-                            <a:srgbClr val="11182B"/>
+                            <a:srgbClr val="181818"/>
                           </a:solidFill>
                           <a:latin typeface="Calibri" pitchFamily="34" charset="0"/>
                           <a:ea typeface="Calibri" pitchFamily="34" charset="-122"/>
@@ -5684,7 +5684,7 @@
                   <a:tcPr marL="128016" marR="128016" marT="54864" marB="54864" anchor="ctr">
                     <a:lnL w="12700" cap="flat" cmpd="sng" algn="ctr">
                       <a:solidFill>
-                        <a:srgbClr val="D5DEE9"/>
+                        <a:srgbClr val="DDDDDD"/>
                       </a:solidFill>
                       <a:prstDash val="solid"/>
                       <a:round/>
@@ -5693,7 +5693,7 @@
                     </a:lnL>
                     <a:lnR w="12700" cap="flat" cmpd="sng" algn="ctr">
                       <a:solidFill>
-                        <a:srgbClr val="D5DEE9"/>
+                        <a:srgbClr val="DDDDDD"/>
                       </a:solidFill>
                       <a:prstDash val="solid"/>
                       <a:round/>
@@ -5702,7 +5702,7 @@
                     </a:lnR>
                     <a:lnT w="12700" cap="flat" cmpd="sng" algn="ctr">
                       <a:solidFill>
-                        <a:srgbClr val="D5DEE9"/>
+                        <a:srgbClr val="DDDDDD"/>
                       </a:solidFill>
                       <a:prstDash val="solid"/>
                       <a:round/>
@@ -5711,7 +5711,7 @@
                     </a:lnT>
                     <a:lnB w="12700" cap="flat" cmpd="sng" algn="ctr">
                       <a:solidFill>
-                        <a:srgbClr val="D5DEE9"/>
+                        <a:srgbClr val="DDDDDD"/>
                       </a:solidFill>
                       <a:prstDash val="solid"/>
                       <a:round/>
@@ -5719,7 +5719,7 @@
                       <a:tailEnd type="none" w="med" len="med"/>
                     </a:lnB>
                     <a:solidFill>
-                      <a:srgbClr val="EEF3F9"/>
+                      <a:srgbClr val="F2F2F2"/>
                     </a:solidFill>
                   </a:tcPr>
                 </a:tc>
@@ -5755,7 +5755,7 @@
           </a:ln>
           <a:effectLst>
             <a:outerShdw sx="100000" sy="100000" kx="0" ky="0" algn="bl" rotWithShape="0" blurRad="127000" dist="25400" dir="5400000">
-              <a:srgbClr val="11182B">
+              <a:srgbClr val="181818">
                 <a:alpha val="10000"/>
               </a:srgbClr>
             </a:outerShdw>
@@ -5872,7 +5872,7 @@
           </a:ln>
           <a:effectLst>
             <a:outerShdw sx="100000" sy="100000" kx="0" ky="0" algn="bl" rotWithShape="0" blurRad="127000" dist="25400" dir="5400000">
-              <a:srgbClr val="11182B">
+              <a:srgbClr val="181818">
                 <a:alpha val="10000"/>
               </a:srgbClr>
             </a:outerShdw>
@@ -6441,7 +6441,7 @@
           </a:ln>
           <a:effectLst>
             <a:outerShdw sx="100000" sy="100000" kx="0" ky="0" algn="bl" rotWithShape="0" blurRad="127000" dist="25400" dir="5400000">
-              <a:srgbClr val="11182B">
+              <a:srgbClr val="181818">
                 <a:alpha val="10000"/>
               </a:srgbClr>
             </a:outerShdw>
@@ -6685,7 +6685,7 @@
           </a:ln>
           <a:effectLst>
             <a:outerShdw sx="100000" sy="100000" kx="0" ky="0" algn="bl" rotWithShape="0" blurRad="127000" dist="25400" dir="5400000">
-              <a:srgbClr val="11182B">
+              <a:srgbClr val="181818">
                 <a:alpha val="10000"/>
               </a:srgbClr>
             </a:outerShdw>
@@ -6811,7 +6811,7 @@
           </a:ln>
           <a:effectLst>
             <a:outerShdw sx="100000" sy="100000" kx="0" ky="0" algn="bl" rotWithShape="0" blurRad="127000" dist="25400" dir="5400000">
-              <a:srgbClr val="11182B">
+              <a:srgbClr val="181818">
                 <a:alpha val="10000"/>
               </a:srgbClr>
             </a:outerShdw>
@@ -6937,7 +6937,7 @@
           </a:ln>
           <a:effectLst>
             <a:outerShdw sx="100000" sy="100000" kx="0" ky="0" algn="bl" rotWithShape="0" blurRad="127000" dist="25400" dir="5400000">
-              <a:srgbClr val="11182B">
+              <a:srgbClr val="181818">
                 <a:alpha val="10000"/>
               </a:srgbClr>
             </a:outerShdw>
@@ -7063,7 +7063,7 @@
           </a:ln>
           <a:effectLst>
             <a:outerShdw sx="100000" sy="100000" kx="0" ky="0" algn="bl" rotWithShape="0" blurRad="127000" dist="25400" dir="5400000">
-              <a:srgbClr val="11182B">
+              <a:srgbClr val="181818">
                 <a:alpha val="10000"/>
               </a:srgbClr>
             </a:outerShdw>
@@ -8493,7 +8493,7 @@
           </a:ln>
           <a:effectLst>
             <a:outerShdw sx="100000" sy="100000" kx="0" ky="0" algn="bl" rotWithShape="0" blurRad="127000" dist="25400" dir="5400000">
-              <a:srgbClr val="11182B">
+              <a:srgbClr val="181818">
                 <a:alpha val="10000"/>
               </a:srgbClr>
             </a:outerShdw>
@@ -9459,7 +9459,7 @@
           </a:ln>
           <a:effectLst>
             <a:outerShdw sx="100000" sy="100000" kx="0" ky="0" algn="bl" rotWithShape="0" blurRad="127000" dist="25400" dir="5400000">
-              <a:srgbClr val="11182B">
+              <a:srgbClr val="181818">
                 <a:alpha val="10000"/>
               </a:srgbClr>
             </a:outerShdw>
@@ -9593,7 +9593,7 @@
           </a:ln>
           <a:effectLst>
             <a:outerShdw sx="100000" sy="100000" kx="0" ky="0" algn="bl" rotWithShape="0" blurRad="127000" dist="25400" dir="5400000">
-              <a:srgbClr val="11182B">
+              <a:srgbClr val="181818">
                 <a:alpha val="10000"/>
               </a:srgbClr>
             </a:outerShdw>
@@ -9727,7 +9727,7 @@
           </a:ln>
           <a:effectLst>
             <a:outerShdw sx="100000" sy="100000" kx="0" ky="0" algn="bl" rotWithShape="0" blurRad="127000" dist="25400" dir="5400000">
-              <a:srgbClr val="11182B">
+              <a:srgbClr val="181818">
                 <a:alpha val="10000"/>
               </a:srgbClr>
             </a:outerShdw>
@@ -9851,7 +9851,7 @@
           <a:noFill/>
           <a:ln w="25400">
             <a:solidFill>
-              <a:srgbClr val="6E7C94"/>
+              <a:srgbClr val="7B7B7B"/>
             </a:solidFill>
             <a:prstDash val="solid"/>
             <a:tailEnd type="triangle"/>
@@ -9875,7 +9875,7 @@
           <a:noFill/>
           <a:ln w="25400">
             <a:solidFill>
-              <a:srgbClr val="6E7C94"/>
+              <a:srgbClr val="7B7B7B"/>
             </a:solidFill>
             <a:prstDash val="solid"/>
             <a:tailEnd type="triangle"/>
@@ -10452,7 +10452,7 @@
           </a:ln>
           <a:effectLst>
             <a:outerShdw sx="100000" sy="100000" kx="0" ky="0" algn="bl" rotWithShape="0" blurRad="127000" dist="25400" dir="5400000">
-              <a:srgbClr val="11182B">
+              <a:srgbClr val="181818">
                 <a:alpha val="10000"/>
               </a:srgbClr>
             </a:outerShdw>
@@ -10569,7 +10569,7 @@
           </a:ln>
           <a:effectLst>
             <a:outerShdw sx="100000" sy="100000" kx="0" ky="0" algn="bl" rotWithShape="0" blurRad="127000" dist="25400" dir="5400000">
-              <a:srgbClr val="11182B">
+              <a:srgbClr val="181818">
                 <a:alpha val="10000"/>
               </a:srgbClr>
             </a:outerShdw>
@@ -10686,7 +10686,7 @@
           </a:ln>
           <a:effectLst>
             <a:outerShdw sx="100000" sy="100000" kx="0" ky="0" algn="bl" rotWithShape="0" blurRad="127000" dist="25400" dir="5400000">
-              <a:srgbClr val="11182B">
+              <a:srgbClr val="181818">
                 <a:alpha val="10000"/>
               </a:srgbClr>
             </a:outerShdw>
@@ -10803,7 +10803,7 @@
           </a:ln>
           <a:effectLst>
             <a:outerShdw sx="100000" sy="100000" kx="0" ky="0" algn="bl" rotWithShape="0" blurRad="127000" dist="25400" dir="5400000">
-              <a:srgbClr val="11182B">
+              <a:srgbClr val="181818">
                 <a:alpha val="10000"/>
               </a:srgbClr>
             </a:outerShdw>
@@ -11028,7 +11028,7 @@
           </a:ln>
           <a:effectLst>
             <a:outerShdw sx="100000" sy="100000" kx="0" ky="0" algn="bl" rotWithShape="0" blurRad="127000" dist="25400" dir="5400000">
-              <a:srgbClr val="11182B">
+              <a:srgbClr val="181818">
                 <a:alpha val="10000"/>
               </a:srgbClr>
             </a:outerShdw>
@@ -11154,7 +11154,7 @@
           </a:ln>
           <a:effectLst>
             <a:outerShdw sx="100000" sy="100000" kx="0" ky="0" algn="bl" rotWithShape="0" blurRad="127000" dist="25400" dir="5400000">
-              <a:srgbClr val="11182B">
+              <a:srgbClr val="181818">
                 <a:alpha val="10000"/>
               </a:srgbClr>
             </a:outerShdw>
@@ -11280,7 +11280,7 @@
           </a:ln>
           <a:effectLst>
             <a:outerShdw sx="100000" sy="100000" kx="0" ky="0" algn="bl" rotWithShape="0" blurRad="127000" dist="25400" dir="5400000">
-              <a:srgbClr val="11182B">
+              <a:srgbClr val="181818">
                 <a:alpha val="10000"/>
               </a:srgbClr>
             </a:outerShdw>
@@ -13371,7 +13371,7 @@
           </a:ln>
           <a:effectLst>
             <a:outerShdw sx="100000" sy="100000" kx="0" ky="0" algn="bl" rotWithShape="0" blurRad="127000" dist="25400" dir="5400000">
-              <a:srgbClr val="11182B">
+              <a:srgbClr val="181818">
                 <a:alpha val="10000"/>
               </a:srgbClr>
             </a:outerShdw>
@@ -13477,7 +13477,7 @@
           </a:ln>
           <a:effectLst>
             <a:outerShdw sx="100000" sy="100000" kx="0" ky="0" algn="bl" rotWithShape="0" blurRad="127000" dist="25400" dir="5400000">
-              <a:srgbClr val="11182B">
+              <a:srgbClr val="181818">
                 <a:alpha val="10000"/>
               </a:srgbClr>
             </a:outerShdw>
@@ -13691,7 +13691,7 @@
           </a:ln>
           <a:effectLst>
             <a:outerShdw sx="100000" sy="100000" kx="0" ky="0" algn="bl" rotWithShape="0" blurRad="127000" dist="25400" dir="5400000">
-              <a:srgbClr val="11182B">
+              <a:srgbClr val="181818">
                 <a:alpha val="10000"/>
               </a:srgbClr>
             </a:outerShdw>
@@ -13825,7 +13825,7 @@
           </a:ln>
           <a:effectLst>
             <a:outerShdw sx="100000" sy="100000" kx="0" ky="0" algn="bl" rotWithShape="0" blurRad="127000" dist="25400" dir="5400000">
-              <a:srgbClr val="11182B">
+              <a:srgbClr val="181818">
                 <a:alpha val="10000"/>
               </a:srgbClr>
             </a:outerShdw>
@@ -13959,7 +13959,7 @@
           </a:ln>
           <a:effectLst>
             <a:outerShdw sx="100000" sy="100000" kx="0" ky="0" algn="bl" rotWithShape="0" blurRad="127000" dist="25400" dir="5400000">
-              <a:srgbClr val="11182B">
+              <a:srgbClr val="181818">
                 <a:alpha val="10000"/>
               </a:srgbClr>
             </a:outerShdw>
@@ -14093,7 +14093,7 @@
           </a:ln>
           <a:effectLst>
             <a:outerShdw sx="100000" sy="100000" kx="0" ky="0" algn="bl" rotWithShape="0" blurRad="127000" dist="25400" dir="5400000">
-              <a:srgbClr val="11182B">
+              <a:srgbClr val="181818">
                 <a:alpha val="10000"/>
               </a:srgbClr>
             </a:outerShdw>
@@ -14446,7 +14446,7 @@
                   <a:schemeClr val="accent3"/>
                 </a:solidFill>
               </a:rPr>
-              <a:t>Blue is the high note on the top row. Orange is the low note on the bottom row.</a:t>
+              <a:t>Dark blocks are the high note on the top row. Light blocks are the low note on the bottom row.</a:t>
             </a:r>
             <a:endParaRPr lang="en-US" sz="1600" dirty="0"/>
           </a:p>
@@ -14570,40 +14570,40 @@
   <a:themeElements>
     <a:clrScheme name="Beat Navy">
       <a:dk1>
-        <a:srgbClr val="11182B"/>
+        <a:srgbClr val="181818"/>
       </a:dk1>
       <a:lt1>
         <a:srgbClr val="FFFFFF"/>
       </a:lt1>
       <a:dk2>
-        <a:srgbClr val="16233F"/>
+        <a:srgbClr val="222222"/>
       </a:dk2>
       <a:lt2>
-        <a:srgbClr val="EEF3F9"/>
+        <a:srgbClr val="F2F2F2"/>
       </a:lt2>
       <a:accent1>
-        <a:srgbClr val="378ADD"/>
+        <a:srgbClr val="7B7B7B"/>
       </a:accent1>
       <a:accent2>
-        <a:srgbClr val="EF9F27"/>
+        <a:srgbClr val="666666"/>
       </a:accent2>
       <a:accent3>
-        <a:srgbClr val="6E7C94"/>
+        <a:srgbClr val="7B7B7B"/>
       </a:accent3>
       <a:accent4>
-        <a:srgbClr val="2C4675"/>
+        <a:srgbClr val="444444"/>
       </a:accent4>
       <a:accent5>
-        <a:srgbClr val="C7D9EE"/>
+        <a:srgbClr val="D6D6D6"/>
       </a:accent5>
       <a:accent6>
-        <a:srgbClr val="B0411F"/>
+        <a:srgbClr val="5E5E5E"/>
       </a:accent6>
       <a:hlink>
-        <a:srgbClr val="378ADD"/>
+        <a:srgbClr val="7B7B7B"/>
       </a:hlink>
       <a:folHlink>
-        <a:srgbClr val="6E7C94"/>
+        <a:srgbClr val="7B7B7B"/>
       </a:folHlink>
     </a:clrScheme>
     <a:fontScheme name="Beat Navy">

--- a/Presentation.pptx
+++ b/Presentation.pptx
@@ -4,20 +4,22 @@
   <p:sldMasterIdLst>
     <p:sldMasterId id="2147483648" r:id="rId1"/>
   </p:sldMasterIdLst>
+  <p:notesMasterIdLst>
+    <p:notesMasterId r:id="rId14"/>
+  </p:notesMasterIdLst>
   <p:sldIdLst>
-    <p:sldId id="256" r:id="rId7"/>
-    <p:sldId id="257" r:id="rId9"/>
-    <p:sldId id="258" r:id="rId10"/>
-    <p:sldId id="259" r:id="rId11"/>
-    <p:sldId id="260" r:id="rId12"/>
-    <p:sldId id="261" r:id="rId13"/>
-    <p:sldId id="262" r:id="rId14"/>
-    <p:sldId id="263" r:id="rId15"/>
-    <p:sldId id="264" r:id="rId16"/>
-    <p:sldId id="265" r:id="rId17"/>
-    <p:sldId id="266" r:id="rId18"/>
-    <p:sldId id="267" r:id="rId19"/>
-    <p:sldId id="268" r:id="rId20"/>
+    <p:sldId id="256" r:id="rId2"/>
+    <p:sldId id="257" r:id="rId3"/>
+    <p:sldId id="258" r:id="rId4"/>
+    <p:sldId id="259" r:id="rId5"/>
+    <p:sldId id="260" r:id="rId6"/>
+    <p:sldId id="261" r:id="rId7"/>
+    <p:sldId id="263" r:id="rId8"/>
+    <p:sldId id="264" r:id="rId9"/>
+    <p:sldId id="265" r:id="rId10"/>
+    <p:sldId id="266" r:id="rId11"/>
+    <p:sldId id="267" r:id="rId12"/>
+    <p:sldId id="268" r:id="rId13"/>
   </p:sldIdLst>
   <p:sldSz cx="9144000" cy="6858000" type="screen4x3"/>
   <p:notesSz cx="6858000" cy="9144000"/>
@@ -116,11 +118,27 @@
       </a:defRPr>
     </a:lvl9pPr>
   </p:defaultTextStyle>
+  <p:extLst>
+    <p:ext uri="{EFAFB233-063F-42B5-8137-9DF3F51BA10A}">
+      <p15:sldGuideLst xmlns:p15="http://schemas.microsoft.com/office/powerpoint/2012/main">
+        <p15:guide id="1" orient="horz" pos="2160">
+          <p15:clr>
+            <a:srgbClr val="A4A3A4"/>
+          </p15:clr>
+        </p15:guide>
+        <p15:guide id="2" pos="2880">
+          <p15:clr>
+            <a:srgbClr val="A4A3A4"/>
+          </p15:clr>
+        </p15:guide>
+      </p15:sldGuideLst>
+    </p:ext>
+  </p:extLst>
 </p:presentation>
 </file>
 
 <file path=ppt/notesMasters/notesMaster1.xml><?xml version="1.0" encoding="utf-8"?>
-<p:notesMaster xmlns:a="http://schemas.openxmlformats.org/drawingml/2006/main" xmlns:p="http://schemas.openxmlformats.org/presentationml/2006/main" xmlns:r="http://schemas.openxmlformats.org/officeDocument/2006/relationships">
+<p:notesMaster xmlns:a="http://schemas.openxmlformats.org/drawingml/2006/main" xmlns:r="http://schemas.openxmlformats.org/officeDocument/2006/relationships" xmlns:p="http://schemas.openxmlformats.org/presentationml/2006/main">
   <p:cSld>
     <p:bg>
       <p:bgRef idx="1001">
@@ -141,241 +159,16 @@
           <a:chExt cx="0" cy="0"/>
         </a:xfrm>
       </p:grpSpPr>
-      <p:sp>
-        <p:nvSpPr>
-          <p:cNvPr id="2" name="Header Placeholder 1"/>
-          <p:cNvSpPr>
-            <a:spLocks noGrp="1"/>
-          </p:cNvSpPr>
-          <p:nvPr>
-            <p:ph type="hdr" sz="quarter"/>
-          </p:nvPr>
-        </p:nvSpPr>
-        <p:spPr>
-          <a:xfrm>
-            <a:off x="0" y="0"/>
-            <a:ext cx="2971800" cy="457200"/>
-          </a:xfrm>
-          <a:prstGeom prst="rect">
-            <a:avLst/>
-          </a:prstGeom>
-        </p:spPr>
-        <p:txBody>
-          <a:bodyPr vert="horz" lIns="91440" tIns="45720" rIns="91440" bIns="45720" rtlCol="0"/>
-          <a:lstStyle>
-            <a:lvl1pPr algn="l">
-              <a:defRPr sz="1200"/>
-            </a:lvl1pPr>
-          </a:lstStyle>
-          <a:p>
-            <a:endParaRPr lang="en-US"/>
-          </a:p>
-        </p:txBody>
-      </p:sp>
-      <p:sp>
-        <p:nvSpPr>
-          <p:cNvPr id="3" name="Date Placeholder 2"/>
-          <p:cNvSpPr>
-            <a:spLocks noGrp="1"/>
-          </p:cNvSpPr>
-          <p:nvPr>
-            <p:ph type="dt" idx="1"/>
-          </p:nvPr>
-        </p:nvSpPr>
-        <p:spPr>
-          <a:xfrm>
-            <a:off x="3884613" y="0"/>
-            <a:ext cx="2971800" cy="457200"/>
-          </a:xfrm>
-          <a:prstGeom prst="rect">
-            <a:avLst/>
-          </a:prstGeom>
-        </p:spPr>
-        <p:txBody>
-          <a:bodyPr vert="horz" lIns="91440" tIns="45720" rIns="91440" bIns="45720" rtlCol="0"/>
-          <a:lstStyle>
-            <a:lvl1pPr algn="r">
-              <a:defRPr sz="1200"/>
-            </a:lvl1pPr>
-          </a:lstStyle>
-          <a:p>
-            <a:fld id="{0F89C1C7-3DCD-1040-A9CF-14679D8B5DDD}" type="datetimeFigureOut">
-              <a:rPr lang="en-US" smtClean="0"/>
-              <a:t>10/17/16</a:t>
-            </a:fld>
-            <a:endParaRPr lang="en-US"/>
-          </a:p>
-        </p:txBody>
-      </p:sp>
-      <p:sp>
-        <p:nvSpPr>
-          <p:cNvPr id="4" name="Slide Image Placeholder 3"/>
-          <p:cNvSpPr>
-            <a:spLocks noGrp="1" noRot="1" noChangeAspect="1"/>
-          </p:cNvSpPr>
-          <p:nvPr>
-            <p:ph type="sldImg" idx="2"/>
-          </p:nvPr>
-        </p:nvSpPr>
-        <p:spPr>
-          <a:xfrm>
-            <a:off x="1143000" y="685800"/>
-            <a:ext cx="4572000" cy="3429000"/>
-          </a:xfrm>
-          <a:prstGeom prst="rect">
-            <a:avLst/>
-          </a:prstGeom>
-          <a:noFill/>
-          <a:ln w="12700">
-            <a:solidFill>
-              <a:prstClr val="black"/>
-            </a:solidFill>
-          </a:ln>
-        </p:spPr>
-        <p:txBody>
-          <a:bodyPr vert="horz" lIns="91440" tIns="45720" rIns="91440" bIns="45720" rtlCol="0" anchor="ctr"/>
-          <a:lstStyle/>
-          <a:p>
-            <a:endParaRPr lang="en-US"/>
-          </a:p>
-        </p:txBody>
-      </p:sp>
-      <p:sp>
-        <p:nvSpPr>
-          <p:cNvPr id="5" name="Notes Placeholder 4"/>
-          <p:cNvSpPr>
-            <a:spLocks noGrp="1"/>
-          </p:cNvSpPr>
-          <p:nvPr>
-            <p:ph type="body" sz="quarter" idx="3"/>
-          </p:nvPr>
-        </p:nvSpPr>
-        <p:spPr>
-          <a:xfrm>
-            <a:off x="685800" y="4343400"/>
-            <a:ext cx="5486400" cy="4114800"/>
-          </a:xfrm>
-          <a:prstGeom prst="rect">
-            <a:avLst/>
-          </a:prstGeom>
-        </p:spPr>
-        <p:txBody>
-          <a:bodyPr vert="horz" lIns="91440" tIns="45720" rIns="91440" bIns="45720" rtlCol="0"/>
-          <a:lstStyle/>
-          <a:p>
-            <a:pPr lvl="0"/>
-            <a:r>
-              <a:rPr lang="en-US" smtClean="0"/>
-              <a:t>Click to edit Master text styles</a:t>
-            </a:r>
-          </a:p>
-          <a:p>
-            <a:pPr lvl="1"/>
-            <a:r>
-              <a:rPr lang="en-US" smtClean="0"/>
-              <a:t>Second level</a:t>
-            </a:r>
-          </a:p>
-          <a:p>
-            <a:pPr lvl="2"/>
-            <a:r>
-              <a:rPr lang="en-US" smtClean="0"/>
-              <a:t>Third level</a:t>
-            </a:r>
-          </a:p>
-          <a:p>
-            <a:pPr lvl="3"/>
-            <a:r>
-              <a:rPr lang="en-US" smtClean="0"/>
-              <a:t>Fourth level</a:t>
-            </a:r>
-          </a:p>
-          <a:p>
-            <a:pPr lvl="4"/>
-            <a:r>
-              <a:rPr lang="en-US" smtClean="0"/>
-              <a:t>Fifth level</a:t>
-            </a:r>
-            <a:endParaRPr lang="en-US"/>
-          </a:p>
-        </p:txBody>
-      </p:sp>
-      <p:sp>
-        <p:nvSpPr>
-          <p:cNvPr id="6" name="Footer Placeholder 5"/>
-          <p:cNvSpPr>
-            <a:spLocks noGrp="1"/>
-          </p:cNvSpPr>
-          <p:nvPr>
-            <p:ph type="ftr" sz="quarter" idx="4"/>
-          </p:nvPr>
-        </p:nvSpPr>
-        <p:spPr>
-          <a:xfrm>
-            <a:off x="0" y="8685213"/>
-            <a:ext cx="2971800" cy="457200"/>
-          </a:xfrm>
-          <a:prstGeom prst="rect">
-            <a:avLst/>
-          </a:prstGeom>
-        </p:spPr>
-        <p:txBody>
-          <a:bodyPr vert="horz" lIns="91440" tIns="45720" rIns="91440" bIns="45720" rtlCol="0" anchor="b"/>
-          <a:lstStyle>
-            <a:lvl1pPr algn="l">
-              <a:defRPr sz="1200"/>
-            </a:lvl1pPr>
-          </a:lstStyle>
-          <a:p>
-            <a:endParaRPr lang="en-US"/>
-          </a:p>
-        </p:txBody>
-      </p:sp>
-      <p:sp>
-        <p:nvSpPr>
-          <p:cNvPr id="7" name="Slide Number Placeholder 6"/>
-          <p:cNvSpPr>
-            <a:spLocks noGrp="1"/>
-          </p:cNvSpPr>
-          <p:nvPr>
-            <p:ph type="sldNum" sz="quarter" idx="5"/>
-          </p:nvPr>
-        </p:nvSpPr>
-        <p:spPr>
-          <a:xfrm>
-            <a:off x="3884613" y="8685213"/>
-            <a:ext cx="2971800" cy="457200"/>
-          </a:xfrm>
-          <a:prstGeom prst="rect">
-            <a:avLst/>
-          </a:prstGeom>
-        </p:spPr>
-        <p:txBody>
-          <a:bodyPr vert="horz" lIns="91440" tIns="45720" rIns="91440" bIns="45720" rtlCol="0" anchor="b"/>
-          <a:lstStyle>
-            <a:lvl1pPr algn="r">
-              <a:defRPr sz="1200"/>
-            </a:lvl1pPr>
-          </a:lstStyle>
-          <a:p>
-            <a:fld id="{BB5E49A5-4136-284D-997B-48E1D791AD67}" type="slidenum">
-              <a:rPr lang="en-US" smtClean="0"/>
-              <a:t>‹#›</a:t>
-            </a:fld>
-            <a:endParaRPr lang="en-US"/>
-          </a:p>
-        </p:txBody>
-      </p:sp>
     </p:spTree>
     <p:extLst>
       <p:ext uri="{BB962C8B-B14F-4D97-AF65-F5344CB8AC3E}">
-        <p14:creationId xmlns:p14="http://schemas.microsoft.com/office/powerpoint/2010/main" val="2623252185"/>
+        <p14:creationId xmlns:p14="http://schemas.microsoft.com/office/powerpoint/2010/main" val="3605804033"/>
       </p:ext>
     </p:extLst>
   </p:cSld>
   <p:clrMap bg1="lt1" tx1="dk1" bg2="lt2" tx2="dk2" accent1="accent1" accent2="accent2" accent3="accent3" accent4="accent4" accent5="accent5" accent6="accent6" hlink="hlink" folHlink="folHlink"/>
   <p:notesStyle>
-    <a:lvl1pPr marL="0" algn="l" defTabSz="457200" rtl="0" eaLnBrk="1" latinLnBrk="0" hangingPunct="1">
+    <a:lvl1pPr marL="0" algn="l" defTabSz="914400" rtl="0" eaLnBrk="1" latinLnBrk="0" hangingPunct="1">
       <a:defRPr sz="1200" kern="1200">
         <a:solidFill>
           <a:schemeClr val="tx1"/>
@@ -385,7 +178,7 @@
         <a:cs typeface="+mn-cs"/>
       </a:defRPr>
     </a:lvl1pPr>
-    <a:lvl2pPr marL="457200" algn="l" defTabSz="457200" rtl="0" eaLnBrk="1" latinLnBrk="0" hangingPunct="1">
+    <a:lvl2pPr marL="457200" algn="l" defTabSz="914400" rtl="0" eaLnBrk="1" latinLnBrk="0" hangingPunct="1">
       <a:defRPr sz="1200" kern="1200">
         <a:solidFill>
           <a:schemeClr val="tx1"/>
@@ -395,7 +188,7 @@
         <a:cs typeface="+mn-cs"/>
       </a:defRPr>
     </a:lvl2pPr>
-    <a:lvl3pPr marL="914400" algn="l" defTabSz="457200" rtl="0" eaLnBrk="1" latinLnBrk="0" hangingPunct="1">
+    <a:lvl3pPr marL="914400" algn="l" defTabSz="914400" rtl="0" eaLnBrk="1" latinLnBrk="0" hangingPunct="1">
       <a:defRPr sz="1200" kern="1200">
         <a:solidFill>
           <a:schemeClr val="tx1"/>
@@ -405,7 +198,7 @@
         <a:cs typeface="+mn-cs"/>
       </a:defRPr>
     </a:lvl3pPr>
-    <a:lvl4pPr marL="1371600" algn="l" defTabSz="457200" rtl="0" eaLnBrk="1" latinLnBrk="0" hangingPunct="1">
+    <a:lvl4pPr marL="1371600" algn="l" defTabSz="914400" rtl="0" eaLnBrk="1" latinLnBrk="0" hangingPunct="1">
       <a:defRPr sz="1200" kern="1200">
         <a:solidFill>
           <a:schemeClr val="tx1"/>
@@ -415,7 +208,7 @@
         <a:cs typeface="+mn-cs"/>
       </a:defRPr>
     </a:lvl4pPr>
-    <a:lvl5pPr marL="1828800" algn="l" defTabSz="457200" rtl="0" eaLnBrk="1" latinLnBrk="0" hangingPunct="1">
+    <a:lvl5pPr marL="1828800" algn="l" defTabSz="914400" rtl="0" eaLnBrk="1" latinLnBrk="0" hangingPunct="1">
       <a:defRPr sz="1200" kern="1200">
         <a:solidFill>
           <a:schemeClr val="tx1"/>
@@ -425,7 +218,7 @@
         <a:cs typeface="+mn-cs"/>
       </a:defRPr>
     </a:lvl5pPr>
-    <a:lvl6pPr marL="2286000" algn="l" defTabSz="457200" rtl="0" eaLnBrk="1" latinLnBrk="0" hangingPunct="1">
+    <a:lvl6pPr marL="2286000" algn="l" defTabSz="914400" rtl="0" eaLnBrk="1" latinLnBrk="0" hangingPunct="1">
       <a:defRPr sz="1200" kern="1200">
         <a:solidFill>
           <a:schemeClr val="tx1"/>
@@ -435,7 +228,7 @@
         <a:cs typeface="+mn-cs"/>
       </a:defRPr>
     </a:lvl6pPr>
-    <a:lvl7pPr marL="2743200" algn="l" defTabSz="457200" rtl="0" eaLnBrk="1" latinLnBrk="0" hangingPunct="1">
+    <a:lvl7pPr marL="2743200" algn="l" defTabSz="914400" rtl="0" eaLnBrk="1" latinLnBrk="0" hangingPunct="1">
       <a:defRPr sz="1200" kern="1200">
         <a:solidFill>
           <a:schemeClr val="tx1"/>
@@ -445,7 +238,7 @@
         <a:cs typeface="+mn-cs"/>
       </a:defRPr>
     </a:lvl7pPr>
-    <a:lvl8pPr marL="3200400" algn="l" defTabSz="457200" rtl="0" eaLnBrk="1" latinLnBrk="0" hangingPunct="1">
+    <a:lvl8pPr marL="3200400" algn="l" defTabSz="914400" rtl="0" eaLnBrk="1" latinLnBrk="0" hangingPunct="1">
       <a:defRPr sz="1200" kern="1200">
         <a:solidFill>
           <a:schemeClr val="tx1"/>
@@ -455,7 +248,7 @@
         <a:cs typeface="+mn-cs"/>
       </a:defRPr>
     </a:lvl8pPr>
-    <a:lvl9pPr marL="3657600" algn="l" defTabSz="457200" rtl="0" eaLnBrk="1" latinLnBrk="0" hangingPunct="1">
+    <a:lvl9pPr marL="3657600" algn="l" defTabSz="914400" rtl="0" eaLnBrk="1" latinLnBrk="0" hangingPunct="1">
       <a:defRPr sz="1200" kern="1200">
         <a:solidFill>
           <a:schemeClr val="tx1"/>
@@ -467,916 +260,6 @@
     </a:lvl9pPr>
   </p:notesStyle>
 </p:notesMaster>
-</file>
-
-<file path=ppt/notesSlides/notesSlide1.xml><?xml version="1.0" encoding="utf-8"?>
-<p:notes xmlns:a="http://schemas.openxmlformats.org/drawingml/2006/main" xmlns:p="http://schemas.openxmlformats.org/presentationml/2006/main" xmlns:r="http://schemas.openxmlformats.org/officeDocument/2006/relationships">
-  <p:cSld>
-    <p:spTree>
-      <p:nvGrpSpPr>
-        <p:cNvPr id="1" name=""/>
-        <p:cNvGrpSpPr/>
-        <p:nvPr/>
-      </p:nvGrpSpPr>
-      <p:grpSpPr>
-        <a:xfrm>
-          <a:off x="0" y="0"/>
-          <a:ext cx="0" cy="0"/>
-          <a:chOff x="0" y="0"/>
-          <a:chExt cx="0" cy="0"/>
-        </a:xfrm>
-      </p:grpSpPr>
-      <p:sp>
-        <p:nvSpPr>
-          <p:cNvPr id="2" name="Slide Image Placeholder 1"/>
-          <p:cNvSpPr>
-            <a:spLocks noGrp="1"/>
-          </p:cNvSpPr>
-          <p:nvPr>
-            <p:ph type="sldImg" idx="2"/>
-          </p:nvPr>
-        </p:nvSpPr>
-        <p:spPr/>
-      </p:sp>
-      <p:sp>
-        <p:nvSpPr>
-          <p:cNvPr id="3" name="Notes Placeholder 2"/>
-          <p:cNvSpPr>
-            <a:spLocks noGrp="1"/>
-          </p:cNvSpPr>
-          <p:nvPr>
-            <p:ph type="body" idx="3" sz="quarter"/>
-          </p:nvPr>
-        </p:nvSpPr>
-        <p:spPr/>
-        <p:txBody>
-          <a:bodyPr/>
-          <a:lstStyle/>
-          <a:p>
-            <a:r>
-              <a:t>A procedural music generator written in Java.</a:t>
-            </a:r>
-          </a:p>
-        </p:txBody>
-      </p:sp>
-      <p:sp>
-        <p:nvSpPr>
-          <p:cNvPr id="4" name="Slide Number Placeholder 3"/>
-          <p:cNvSpPr>
-            <a:spLocks noGrp="1"/>
-          </p:cNvSpPr>
-          <p:nvPr>
-            <p:ph type="sldNum" idx="5" sz="quarter"/>
-          </p:nvPr>
-        </p:nvSpPr>
-        <p:spPr/>
-      </p:sp>
-    </p:spTree>
-  </p:cSld>
-  <p:clrMapOvr>
-    <a:masterClrMapping/>
-  </p:clrMapOvr>
-</p:notes>
-</file>
-
-<file path=ppt/notesSlides/notesSlide10.xml><?xml version="1.0" encoding="utf-8"?>
-<p:notes xmlns:a="http://schemas.openxmlformats.org/drawingml/2006/main" xmlns:p="http://schemas.openxmlformats.org/presentationml/2006/main" xmlns:r="http://schemas.openxmlformats.org/officeDocument/2006/relationships">
-  <p:cSld>
-    <p:spTree>
-      <p:nvGrpSpPr>
-        <p:cNvPr id="1" name=""/>
-        <p:cNvGrpSpPr/>
-        <p:nvPr/>
-      </p:nvGrpSpPr>
-      <p:grpSpPr>
-        <a:xfrm>
-          <a:off x="0" y="0"/>
-          <a:ext cx="0" cy="0"/>
-          <a:chOff x="0" y="0"/>
-          <a:chExt cx="0" cy="0"/>
-        </a:xfrm>
-      </p:grpSpPr>
-      <p:sp>
-        <p:nvSpPr>
-          <p:cNvPr id="2" name="Slide Image Placeholder 1"/>
-          <p:cNvSpPr>
-            <a:spLocks noGrp="1"/>
-          </p:cNvSpPr>
-          <p:nvPr>
-            <p:ph type="sldImg" idx="2"/>
-          </p:nvPr>
-        </p:nvSpPr>
-        <p:spPr/>
-      </p:sp>
-      <p:sp>
-        <p:nvSpPr>
-          <p:cNvPr id="3" name="Notes Placeholder 2"/>
-          <p:cNvSpPr>
-            <a:spLocks noGrp="1"/>
-          </p:cNvSpPr>
-          <p:nvPr>
-            <p:ph type="body" idx="3" sz="quarter"/>
-          </p:nvPr>
-        </p:nvSpPr>
-        <p:spPr/>
-        <p:txBody>
-          <a:bodyPr/>
-          <a:lstStyle/>
-          <a:p>
-            <a:r>
-              <a:t>Play level 1 and level 5 here. The contrast is the demo. Level 5 is 2.5 times busier.</a:t>
-            </a:r>
-          </a:p>
-        </p:txBody>
-      </p:sp>
-      <p:sp>
-        <p:nvSpPr>
-          <p:cNvPr id="4" name="Slide Number Placeholder 3"/>
-          <p:cNvSpPr>
-            <a:spLocks noGrp="1"/>
-          </p:cNvSpPr>
-          <p:nvPr>
-            <p:ph type="sldNum" idx="5" sz="quarter"/>
-          </p:nvPr>
-        </p:nvSpPr>
-        <p:spPr/>
-      </p:sp>
-    </p:spTree>
-  </p:cSld>
-  <p:clrMapOvr>
-    <a:masterClrMapping/>
-  </p:clrMapOvr>
-</p:notes>
-</file>
-
-<file path=ppt/notesSlides/notesSlide11.xml><?xml version="1.0" encoding="utf-8"?>
-<p:notes xmlns:a="http://schemas.openxmlformats.org/drawingml/2006/main" xmlns:p="http://schemas.openxmlformats.org/presentationml/2006/main" xmlns:r="http://schemas.openxmlformats.org/officeDocument/2006/relationships">
-  <p:cSld>
-    <p:spTree>
-      <p:nvGrpSpPr>
-        <p:cNvPr id="1" name=""/>
-        <p:cNvGrpSpPr/>
-        <p:nvPr/>
-      </p:nvGrpSpPr>
-      <p:grpSpPr>
-        <a:xfrm>
-          <a:off x="0" y="0"/>
-          <a:ext cx="0" cy="0"/>
-          <a:chOff x="0" y="0"/>
-          <a:chExt cx="0" cy="0"/>
-        </a:xfrm>
-      </p:grpSpPr>
-      <p:sp>
-        <p:nvSpPr>
-          <p:cNvPr id="2" name="Slide Image Placeholder 1"/>
-          <p:cNvSpPr>
-            <a:spLocks noGrp="1"/>
-          </p:cNvSpPr>
-          <p:nvPr>
-            <p:ph type="sldImg" idx="2"/>
-          </p:nvPr>
-        </p:nvSpPr>
-        <p:spPr/>
-      </p:sp>
-      <p:sp>
-        <p:nvSpPr>
-          <p:cNvPr id="3" name="Notes Placeholder 2"/>
-          <p:cNvSpPr>
-            <a:spLocks noGrp="1"/>
-          </p:cNvSpPr>
-          <p:nvPr>
-            <p:ph type="body" idx="3" sz="quarter"/>
-          </p:nvPr>
-        </p:nvSpPr>
-        <p:spPr/>
-        <p:txBody>
-          <a:bodyPr/>
-          <a:lstStyle/>
-          <a:p>
-            <a:r>
-              <a:t>Be upfront. Saying it yourself beats being told it.</a:t>
-            </a:r>
-          </a:p>
-        </p:txBody>
-      </p:sp>
-      <p:sp>
-        <p:nvSpPr>
-          <p:cNvPr id="4" name="Slide Number Placeholder 3"/>
-          <p:cNvSpPr>
-            <a:spLocks noGrp="1"/>
-          </p:cNvSpPr>
-          <p:nvPr>
-            <p:ph type="sldNum" idx="5" sz="quarter"/>
-          </p:nvPr>
-        </p:nvSpPr>
-        <p:spPr/>
-      </p:sp>
-    </p:spTree>
-  </p:cSld>
-  <p:clrMapOvr>
-    <a:masterClrMapping/>
-  </p:clrMapOvr>
-</p:notes>
-</file>
-
-<file path=ppt/notesSlides/notesSlide12.xml><?xml version="1.0" encoding="utf-8"?>
-<p:notes xmlns:a="http://schemas.openxmlformats.org/drawingml/2006/main" xmlns:p="http://schemas.openxmlformats.org/presentationml/2006/main" xmlns:r="http://schemas.openxmlformats.org/officeDocument/2006/relationships">
-  <p:cSld>
-    <p:spTree>
-      <p:nvGrpSpPr>
-        <p:cNvPr id="1" name=""/>
-        <p:cNvGrpSpPr/>
-        <p:nvPr/>
-      </p:nvGrpSpPr>
-      <p:grpSpPr>
-        <a:xfrm>
-          <a:off x="0" y="0"/>
-          <a:ext cx="0" cy="0"/>
-          <a:chOff x="0" y="0"/>
-          <a:chExt cx="0" cy="0"/>
-        </a:xfrm>
-      </p:grpSpPr>
-      <p:sp>
-        <p:nvSpPr>
-          <p:cNvPr id="2" name="Slide Image Placeholder 1"/>
-          <p:cNvSpPr>
-            <a:spLocks noGrp="1"/>
-          </p:cNvSpPr>
-          <p:nvPr>
-            <p:ph type="sldImg" idx="2"/>
-          </p:nvPr>
-        </p:nvSpPr>
-        <p:spPr/>
-      </p:sp>
-      <p:sp>
-        <p:nvSpPr>
-          <p:cNvPr id="3" name="Notes Placeholder 2"/>
-          <p:cNvSpPr>
-            <a:spLocks noGrp="1"/>
-          </p:cNvSpPr>
-          <p:nvPr>
-            <p:ph type="body" idx="3" sz="quarter"/>
-          </p:nvPr>
-        </p:nvSpPr>
-        <p:spPr/>
-        <p:txBody>
-          <a:bodyPr/>
-          <a:lstStyle/>
-          <a:p>
-            <a:r>
-              <a:t>The Left 4 Dead point connects back to the course.</a:t>
-            </a:r>
-          </a:p>
-        </p:txBody>
-      </p:sp>
-      <p:sp>
-        <p:nvSpPr>
-          <p:cNvPr id="4" name="Slide Number Placeholder 3"/>
-          <p:cNvSpPr>
-            <a:spLocks noGrp="1"/>
-          </p:cNvSpPr>
-          <p:nvPr>
-            <p:ph type="sldNum" idx="5" sz="quarter"/>
-          </p:nvPr>
-        </p:nvSpPr>
-        <p:spPr/>
-      </p:sp>
-    </p:spTree>
-  </p:cSld>
-  <p:clrMapOvr>
-    <a:masterClrMapping/>
-  </p:clrMapOvr>
-</p:notes>
-</file>
-
-<file path=ppt/notesSlides/notesSlide13.xml><?xml version="1.0" encoding="utf-8"?>
-<p:notes xmlns:a="http://schemas.openxmlformats.org/drawingml/2006/main" xmlns:p="http://schemas.openxmlformats.org/presentationml/2006/main" xmlns:r="http://schemas.openxmlformats.org/officeDocument/2006/relationships">
-  <p:cSld>
-    <p:spTree>
-      <p:nvGrpSpPr>
-        <p:cNvPr id="1" name=""/>
-        <p:cNvGrpSpPr/>
-        <p:nvPr/>
-      </p:nvGrpSpPr>
-      <p:grpSpPr>
-        <a:xfrm>
-          <a:off x="0" y="0"/>
-          <a:ext cx="0" cy="0"/>
-          <a:chOff x="0" y="0"/>
-          <a:chExt cx="0" cy="0"/>
-        </a:xfrm>
-      </p:grpSpPr>
-      <p:sp>
-        <p:nvSpPr>
-          <p:cNvPr id="2" name="Slide Image Placeholder 1"/>
-          <p:cNvSpPr>
-            <a:spLocks noGrp="1"/>
-          </p:cNvSpPr>
-          <p:nvPr>
-            <p:ph type="sldImg" idx="2"/>
-          </p:nvPr>
-        </p:nvSpPr>
-        <p:spPr/>
-      </p:sp>
-      <p:sp>
-        <p:nvSpPr>
-          <p:cNvPr id="3" name="Notes Placeholder 2"/>
-          <p:cNvSpPr>
-            <a:spLocks noGrp="1"/>
-          </p:cNvSpPr>
-          <p:nvPr>
-            <p:ph type="body" idx="3" sz="quarter"/>
-          </p:nvPr>
-        </p:nvSpPr>
-        <p:spPr/>
-        <p:txBody>
-          <a:bodyPr/>
-          <a:lstStyle/>
-          <a:p>
-            <a:r>
-              <a:t>Have level 1 and level 5 ready to play.</a:t>
-            </a:r>
-          </a:p>
-        </p:txBody>
-      </p:sp>
-      <p:sp>
-        <p:nvSpPr>
-          <p:cNvPr id="4" name="Slide Number Placeholder 3"/>
-          <p:cNvSpPr>
-            <a:spLocks noGrp="1"/>
-          </p:cNvSpPr>
-          <p:nvPr>
-            <p:ph type="sldNum" idx="5" sz="quarter"/>
-          </p:nvPr>
-        </p:nvSpPr>
-        <p:spPr/>
-      </p:sp>
-    </p:spTree>
-  </p:cSld>
-  <p:clrMapOvr>
-    <a:masterClrMapping/>
-  </p:clrMapOvr>
-</p:notes>
-</file>
-
-<file path=ppt/notesSlides/notesSlide2.xml><?xml version="1.0" encoding="utf-8"?>
-<p:notes xmlns:a="http://schemas.openxmlformats.org/drawingml/2006/main" xmlns:p="http://schemas.openxmlformats.org/presentationml/2006/main" xmlns:r="http://schemas.openxmlformats.org/officeDocument/2006/relationships">
-  <p:cSld>
-    <p:spTree>
-      <p:nvGrpSpPr>
-        <p:cNvPr id="1" name=""/>
-        <p:cNvGrpSpPr/>
-        <p:nvPr/>
-      </p:nvGrpSpPr>
-      <p:grpSpPr>
-        <a:xfrm>
-          <a:off x="0" y="0"/>
-          <a:ext cx="0" cy="0"/>
-          <a:chOff x="0" y="0"/>
-          <a:chExt cx="0" cy="0"/>
-        </a:xfrm>
-      </p:grpSpPr>
-      <p:sp>
-        <p:nvSpPr>
-          <p:cNvPr id="2" name="Slide Image Placeholder 1"/>
-          <p:cNvSpPr>
-            <a:spLocks noGrp="1"/>
-          </p:cNvSpPr>
-          <p:nvPr>
-            <p:ph type="sldImg" idx="2"/>
-          </p:nvPr>
-        </p:nvSpPr>
-        <p:spPr/>
-      </p:sp>
-      <p:sp>
-        <p:nvSpPr>
-          <p:cNvPr id="3" name="Notes Placeholder 2"/>
-          <p:cNvSpPr>
-            <a:spLocks noGrp="1"/>
-          </p:cNvSpPr>
-          <p:nvPr>
-            <p:ph type="body" idx="3" sz="quarter"/>
-          </p:nvPr>
-        </p:nvSpPr>
-        <p:spPr/>
-        <p:txBody>
-          <a:bodyPr/>
-          <a:lstStyle/>
-          <a:p>
-            <a:r>
-              <a:t>A normal soundtrack is recorded once and never changes.</a:t>
-            </a:r>
-          </a:p>
-        </p:txBody>
-      </p:sp>
-      <p:sp>
-        <p:nvSpPr>
-          <p:cNvPr id="4" name="Slide Number Placeholder 3"/>
-          <p:cNvSpPr>
-            <a:spLocks noGrp="1"/>
-          </p:cNvSpPr>
-          <p:nvPr>
-            <p:ph type="sldNum" idx="5" sz="quarter"/>
-          </p:nvPr>
-        </p:nvSpPr>
-        <p:spPr/>
-      </p:sp>
-    </p:spTree>
-  </p:cSld>
-  <p:clrMapOvr>
-    <a:masterClrMapping/>
-  </p:clrMapOvr>
-</p:notes>
-</file>
-
-<file path=ppt/notesSlides/notesSlide3.xml><?xml version="1.0" encoding="utf-8"?>
-<p:notes xmlns:a="http://schemas.openxmlformats.org/drawingml/2006/main" xmlns:p="http://schemas.openxmlformats.org/presentationml/2006/main" xmlns:r="http://schemas.openxmlformats.org/officeDocument/2006/relationships">
-  <p:cSld>
-    <p:spTree>
-      <p:nvGrpSpPr>
-        <p:cNvPr id="1" name=""/>
-        <p:cNvGrpSpPr/>
-        <p:nvPr/>
-      </p:nvGrpSpPr>
-      <p:grpSpPr>
-        <a:xfrm>
-          <a:off x="0" y="0"/>
-          <a:ext cx="0" cy="0"/>
-          <a:chOff x="0" y="0"/>
-          <a:chExt cx="0" cy="0"/>
-        </a:xfrm>
-      </p:grpSpPr>
-      <p:sp>
-        <p:nvSpPr>
-          <p:cNvPr id="2" name="Slide Image Placeholder 1"/>
-          <p:cNvSpPr>
-            <a:spLocks noGrp="1"/>
-          </p:cNvSpPr>
-          <p:nvPr>
-            <p:ph type="sldImg" idx="2"/>
-          </p:nvPr>
-        </p:nvSpPr>
-        <p:spPr/>
-      </p:sp>
-      <p:sp>
-        <p:nvSpPr>
-          <p:cNvPr id="3" name="Notes Placeholder 2"/>
-          <p:cNvSpPr>
-            <a:spLocks noGrp="1"/>
-          </p:cNvSpPr>
-          <p:nvPr>
-            <p:ph type="body" idx="3" sz="quarter"/>
-          </p:nvPr>
-        </p:nvSpPr>
-        <p:spPr/>
-        <p:txBody>
-          <a:bodyPr/>
-          <a:lstStyle/>
-          <a:p>
-            <a:r>
-              <a:t>Keep it short. Level number in, music out.</a:t>
-            </a:r>
-          </a:p>
-        </p:txBody>
-      </p:sp>
-      <p:sp>
-        <p:nvSpPr>
-          <p:cNvPr id="4" name="Slide Number Placeholder 3"/>
-          <p:cNvSpPr>
-            <a:spLocks noGrp="1"/>
-          </p:cNvSpPr>
-          <p:nvPr>
-            <p:ph type="sldNum" idx="5" sz="quarter"/>
-          </p:nvPr>
-        </p:nvSpPr>
-        <p:spPr/>
-      </p:sp>
-    </p:spTree>
-  </p:cSld>
-  <p:clrMapOvr>
-    <a:masterClrMapping/>
-  </p:clrMapOvr>
-</p:notes>
-</file>
-
-<file path=ppt/notesSlides/notesSlide4.xml><?xml version="1.0" encoding="utf-8"?>
-<p:notes xmlns:a="http://schemas.openxmlformats.org/drawingml/2006/main" xmlns:p="http://schemas.openxmlformats.org/presentationml/2006/main" xmlns:r="http://schemas.openxmlformats.org/officeDocument/2006/relationships">
-  <p:cSld>
-    <p:spTree>
-      <p:nvGrpSpPr>
-        <p:cNvPr id="1" name=""/>
-        <p:cNvGrpSpPr/>
-        <p:nvPr/>
-      </p:nvGrpSpPr>
-      <p:grpSpPr>
-        <a:xfrm>
-          <a:off x="0" y="0"/>
-          <a:ext cx="0" cy="0"/>
-          <a:chOff x="0" y="0"/>
-          <a:chExt cx="0" cy="0"/>
-        </a:xfrm>
-      </p:grpSpPr>
-      <p:sp>
-        <p:nvSpPr>
-          <p:cNvPr id="2" name="Slide Image Placeholder 1"/>
-          <p:cNvSpPr>
-            <a:spLocks noGrp="1"/>
-          </p:cNvSpPr>
-          <p:nvPr>
-            <p:ph type="sldImg" idx="2"/>
-          </p:nvPr>
-        </p:nvSpPr>
-        <p:spPr/>
-      </p:sp>
-      <p:sp>
-        <p:nvSpPr>
-          <p:cNvPr id="3" name="Notes Placeholder 2"/>
-          <p:cNvSpPr>
-            <a:spLocks noGrp="1"/>
-          </p:cNvSpPr>
-          <p:nvPr>
-            <p:ph type="body" idx="3" sz="quarter"/>
-          </p:nvPr>
-        </p:nvSpPr>
-        <p:spPr/>
-        <p:txBody>
-          <a:bodyPr/>
-          <a:lstStyle/>
-          <a:p>
-            <a:r>
-              <a:t>MIDI numbers every piano key. 60 is middle C and 72 is the C above it. They are 12 apart, so they are the same note name and always sound right together. The program only uses these two.</a:t>
-            </a:r>
-          </a:p>
-        </p:txBody>
-      </p:sp>
-      <p:sp>
-        <p:nvSpPr>
-          <p:cNvPr id="4" name="Slide Number Placeholder 3"/>
-          <p:cNvSpPr>
-            <a:spLocks noGrp="1"/>
-          </p:cNvSpPr>
-          <p:nvPr>
-            <p:ph type="sldNum" idx="5" sz="quarter"/>
-          </p:nvPr>
-        </p:nvSpPr>
-        <p:spPr/>
-      </p:sp>
-    </p:spTree>
-  </p:cSld>
-  <p:clrMapOvr>
-    <a:masterClrMapping/>
-  </p:clrMapOvr>
-</p:notes>
-</file>
-
-<file path=ppt/notesSlides/notesSlide5.xml><?xml version="1.0" encoding="utf-8"?>
-<p:notes xmlns:a="http://schemas.openxmlformats.org/drawingml/2006/main" xmlns:p="http://schemas.openxmlformats.org/presentationml/2006/main" xmlns:r="http://schemas.openxmlformats.org/officeDocument/2006/relationships">
-  <p:cSld>
-    <p:spTree>
-      <p:nvGrpSpPr>
-        <p:cNvPr id="1" name=""/>
-        <p:cNvGrpSpPr/>
-        <p:nvPr/>
-      </p:nvGrpSpPr>
-      <p:grpSpPr>
-        <a:xfrm>
-          <a:off x="0" y="0"/>
-          <a:ext cx="0" cy="0"/>
-          <a:chOff x="0" y="0"/>
-          <a:chExt cx="0" cy="0"/>
-        </a:xfrm>
-      </p:grpSpPr>
-      <p:sp>
-        <p:nvSpPr>
-          <p:cNvPr id="2" name="Slide Image Placeholder 1"/>
-          <p:cNvSpPr>
-            <a:spLocks noGrp="1"/>
-          </p:cNvSpPr>
-          <p:nvPr>
-            <p:ph type="sldImg" idx="2"/>
-          </p:nvPr>
-        </p:nvSpPr>
-        <p:spPr/>
-      </p:sp>
-      <p:sp>
-        <p:nvSpPr>
-          <p:cNvPr id="3" name="Notes Placeholder 2"/>
-          <p:cNvSpPr>
-            <a:spLocks noGrp="1"/>
-          </p:cNvSpPr>
-          <p:nvPr>
-            <p:ph type="body" idx="3" sz="quarter"/>
-          </p:nvPr>
-        </p:nvSpPr>
-        <p:spPr/>
-        <p:txBody>
-          <a:bodyPr/>
-          <a:lstStyle/>
-          <a:p>
-            <a:r>
-              <a:t>Tempo matters later, because difficulty controls it. MIDI is a recipe, not a cake.</a:t>
-            </a:r>
-          </a:p>
-        </p:txBody>
-      </p:sp>
-      <p:sp>
-        <p:nvSpPr>
-          <p:cNvPr id="4" name="Slide Number Placeholder 3"/>
-          <p:cNvSpPr>
-            <a:spLocks noGrp="1"/>
-          </p:cNvSpPr>
-          <p:nvPr>
-            <p:ph type="sldNum" idx="5" sz="quarter"/>
-          </p:nvPr>
-        </p:nvSpPr>
-        <p:spPr/>
-      </p:sp>
-    </p:spTree>
-  </p:cSld>
-  <p:clrMapOvr>
-    <a:masterClrMapping/>
-  </p:clrMapOvr>
-</p:notes>
-</file>
-
-<file path=ppt/notesSlides/notesSlide6.xml><?xml version="1.0" encoding="utf-8"?>
-<p:notes xmlns:a="http://schemas.openxmlformats.org/drawingml/2006/main" xmlns:p="http://schemas.openxmlformats.org/presentationml/2006/main" xmlns:r="http://schemas.openxmlformats.org/officeDocument/2006/relationships">
-  <p:cSld>
-    <p:spTree>
-      <p:nvGrpSpPr>
-        <p:cNvPr id="1" name=""/>
-        <p:cNvGrpSpPr/>
-        <p:nvPr/>
-      </p:nvGrpSpPr>
-      <p:grpSpPr>
-        <a:xfrm>
-          <a:off x="0" y="0"/>
-          <a:ext cx="0" cy="0"/>
-          <a:chOff x="0" y="0"/>
-          <a:chExt cx="0" cy="0"/>
-        </a:xfrm>
-      </p:grpSpPr>
-      <p:sp>
-        <p:nvSpPr>
-          <p:cNvPr id="2" name="Slide Image Placeholder 1"/>
-          <p:cNvSpPr>
-            <a:spLocks noGrp="1"/>
-          </p:cNvSpPr>
-          <p:nvPr>
-            <p:ph type="sldImg" idx="2"/>
-          </p:nvPr>
-        </p:nvSpPr>
-        <p:spPr/>
-      </p:sp>
-      <p:sp>
-        <p:nvSpPr>
-          <p:cNvPr id="3" name="Notes Placeholder 2"/>
-          <p:cNvSpPr>
-            <a:spLocks noGrp="1"/>
-          </p:cNvSpPr>
-          <p:nvPr>
-            <p:ph type="body" idx="3" sz="quarter"/>
-          </p:nvPr>
-        </p:nvSpPr>
-        <p:spPr/>
-        <p:txBody>
-          <a:bodyPr/>
-          <a:lstStyle/>
-          <a:p>
-            <a:r>
-              <a:t>This is the core. Without the repeat you get low high low high forever and every level is identical. The repeat creates the variety. The proper name is a two state Markov chain.</a:t>
-            </a:r>
-          </a:p>
-        </p:txBody>
-      </p:sp>
-      <p:sp>
-        <p:nvSpPr>
-          <p:cNvPr id="4" name="Slide Number Placeholder 3"/>
-          <p:cNvSpPr>
-            <a:spLocks noGrp="1"/>
-          </p:cNvSpPr>
-          <p:nvPr>
-            <p:ph type="sldNum" idx="5" sz="quarter"/>
-          </p:nvPr>
-        </p:nvSpPr>
-        <p:spPr/>
-      </p:sp>
-    </p:spTree>
-  </p:cSld>
-  <p:clrMapOvr>
-    <a:masterClrMapping/>
-  </p:clrMapOvr>
-</p:notes>
-</file>
-
-<file path=ppt/notesSlides/notesSlide7.xml><?xml version="1.0" encoding="utf-8"?>
-<p:notes xmlns:a="http://schemas.openxmlformats.org/drawingml/2006/main" xmlns:p="http://schemas.openxmlformats.org/presentationml/2006/main" xmlns:r="http://schemas.openxmlformats.org/officeDocument/2006/relationships">
-  <p:cSld>
-    <p:spTree>
-      <p:nvGrpSpPr>
-        <p:cNvPr id="1" name=""/>
-        <p:cNvGrpSpPr/>
-        <p:nvPr/>
-      </p:nvGrpSpPr>
-      <p:grpSpPr>
-        <a:xfrm>
-          <a:off x="0" y="0"/>
-          <a:ext cx="0" cy="0"/>
-          <a:chOff x="0" y="0"/>
-          <a:chExt cx="0" cy="0"/>
-        </a:xfrm>
-      </p:grpSpPr>
-      <p:sp>
-        <p:nvSpPr>
-          <p:cNvPr id="2" name="Slide Image Placeholder 1"/>
-          <p:cNvSpPr>
-            <a:spLocks noGrp="1"/>
-          </p:cNvSpPr>
-          <p:nvPr>
-            <p:ph type="sldImg" idx="2"/>
-          </p:nvPr>
-        </p:nvSpPr>
-        <p:spPr/>
-      </p:sp>
-      <p:sp>
-        <p:nvSpPr>
-          <p:cNvPr id="3" name="Notes Placeholder 2"/>
-          <p:cNvSpPr>
-            <a:spLocks noGrp="1"/>
-          </p:cNvSpPr>
-          <p:nvPr>
-            <p:ph type="body" idx="3" sz="quarter"/>
-          </p:nvPr>
-        </p:nvSpPr>
-        <p:spPr/>
-        <p:txBody>
-          <a:bodyPr/>
-          <a:lstStyle/>
-          <a:p>
-            <a:r>
-              <a:t>The strongest practical argument. Five numbers instead of five audio files.</a:t>
-            </a:r>
-          </a:p>
-        </p:txBody>
-      </p:sp>
-      <p:sp>
-        <p:nvSpPr>
-          <p:cNvPr id="4" name="Slide Number Placeholder 3"/>
-          <p:cNvSpPr>
-            <a:spLocks noGrp="1"/>
-          </p:cNvSpPr>
-          <p:nvPr>
-            <p:ph type="sldNum" idx="5" sz="quarter"/>
-          </p:nvPr>
-        </p:nvSpPr>
-        <p:spPr/>
-      </p:sp>
-    </p:spTree>
-  </p:cSld>
-  <p:clrMapOvr>
-    <a:masterClrMapping/>
-  </p:clrMapOvr>
-</p:notes>
-</file>
-
-<file path=ppt/notesSlides/notesSlide8.xml><?xml version="1.0" encoding="utf-8"?>
-<p:notes xmlns:a="http://schemas.openxmlformats.org/drawingml/2006/main" xmlns:p="http://schemas.openxmlformats.org/presentationml/2006/main" xmlns:r="http://schemas.openxmlformats.org/officeDocument/2006/relationships">
-  <p:cSld>
-    <p:spTree>
-      <p:nvGrpSpPr>
-        <p:cNvPr id="1" name=""/>
-        <p:cNvGrpSpPr/>
-        <p:nvPr/>
-      </p:nvGrpSpPr>
-      <p:grpSpPr>
-        <a:xfrm>
-          <a:off x="0" y="0"/>
-          <a:ext cx="0" cy="0"/>
-          <a:chOff x="0" y="0"/>
-          <a:chExt cx="0" cy="0"/>
-        </a:xfrm>
-      </p:grpSpPr>
-      <p:sp>
-        <p:nvSpPr>
-          <p:cNvPr id="2" name="Slide Image Placeholder 1"/>
-          <p:cNvSpPr>
-            <a:spLocks noGrp="1"/>
-          </p:cNvSpPr>
-          <p:nvPr>
-            <p:ph type="sldImg" idx="2"/>
-          </p:nvPr>
-        </p:nvSpPr>
-        <p:spPr/>
-      </p:sp>
-      <p:sp>
-        <p:nvSpPr>
-          <p:cNvPr id="3" name="Notes Placeholder 2"/>
-          <p:cNvSpPr>
-            <a:spLocks noGrp="1"/>
-          </p:cNvSpPr>
-          <p:nvPr>
-            <p:ph type="body" idx="3" sz="quarter"/>
-          </p:nvPr>
-        </p:nvSpPr>
-        <p:spPr/>
-        <p:txBody>
-          <a:bodyPr/>
-          <a:lstStyle/>
-          <a:p>
-            <a:r>
-              <a:t>Taxonomy is from Shaker, Togelius and Nelson. Almost everything in the course is generic. This one reacts to the game.</a:t>
-            </a:r>
-          </a:p>
-        </p:txBody>
-      </p:sp>
-      <p:sp>
-        <p:nvSpPr>
-          <p:cNvPr id="4" name="Slide Number Placeholder 3"/>
-          <p:cNvSpPr>
-            <a:spLocks noGrp="1"/>
-          </p:cNvSpPr>
-          <p:nvPr>
-            <p:ph type="sldNum" idx="5" sz="quarter"/>
-          </p:nvPr>
-        </p:nvSpPr>
-        <p:spPr/>
-      </p:sp>
-    </p:spTree>
-  </p:cSld>
-  <p:clrMapOvr>
-    <a:masterClrMapping/>
-  </p:clrMapOvr>
-</p:notes>
-</file>
-
-<file path=ppt/notesSlides/notesSlide9.xml><?xml version="1.0" encoding="utf-8"?>
-<p:notes xmlns:a="http://schemas.openxmlformats.org/drawingml/2006/main" xmlns:p="http://schemas.openxmlformats.org/presentationml/2006/main" xmlns:r="http://schemas.openxmlformats.org/officeDocument/2006/relationships">
-  <p:cSld>
-    <p:spTree>
-      <p:nvGrpSpPr>
-        <p:cNvPr id="1" name=""/>
-        <p:cNvGrpSpPr/>
-        <p:nvPr/>
-      </p:nvGrpSpPr>
-      <p:grpSpPr>
-        <a:xfrm>
-          <a:off x="0" y="0"/>
-          <a:ext cx="0" cy="0"/>
-          <a:chOff x="0" y="0"/>
-          <a:chExt cx="0" cy="0"/>
-        </a:xfrm>
-      </p:grpSpPr>
-      <p:sp>
-        <p:nvSpPr>
-          <p:cNvPr id="2" name="Slide Image Placeholder 1"/>
-          <p:cNvSpPr>
-            <a:spLocks noGrp="1"/>
-          </p:cNvSpPr>
-          <p:nvPr>
-            <p:ph type="sldImg" idx="2"/>
-          </p:nvPr>
-        </p:nvSpPr>
-        <p:spPr/>
-      </p:sp>
-      <p:sp>
-        <p:nvSpPr>
-          <p:cNvPr id="3" name="Notes Placeholder 2"/>
-          <p:cNvSpPr>
-            <a:spLocks noGrp="1"/>
-          </p:cNvSpPr>
-          <p:nvPr>
-            <p:ph type="body" idx="3" sz="quarter"/>
-          </p:nvPr>
-        </p:nvSpPr>
-        <p:spPr/>
-        <p:txBody>
-          <a:bodyPr/>
-          <a:lstStyle/>
-          <a:p>
-            <a:r>
-              <a:t>Each block is one beat. Top row is the high note, bottom row is the low note. The zig zag is the swapping. Two blocks together on one row is a repeat. Same two notes every level. Only the repeats and the speed change.</a:t>
-            </a:r>
-          </a:p>
-        </p:txBody>
-      </p:sp>
-      <p:sp>
-        <p:nvSpPr>
-          <p:cNvPr id="4" name="Slide Number Placeholder 3"/>
-          <p:cNvSpPr>
-            <a:spLocks noGrp="1"/>
-          </p:cNvSpPr>
-          <p:nvPr>
-            <p:ph type="sldNum" idx="5" sz="quarter"/>
-          </p:nvPr>
-        </p:nvSpPr>
-        <p:spPr/>
-      </p:sp>
-    </p:spTree>
-  </p:cSld>
-  <p:clrMapOvr>
-    <a:masterClrMapping/>
-  </p:clrMapOvr>
-</p:notes>
 </file>
 
 <file path=ppt/slideLayouts/slideLayout1.xml><?xml version="1.0" encoding="utf-8"?>
@@ -1417,10 +300,9 @@
           <a:lstStyle/>
           <a:p>
             <a:r>
-              <a:rPr lang="en-US" smtClean="0"/>
+              <a:rPr lang="en-US"/>
               <a:t>Click to edit Master title style</a:t>
             </a:r>
-            <a:endParaRPr lang="en-US"/>
           </a:p>
         </p:txBody>
       </p:sp>
@@ -1536,10 +418,9 @@
           </a:lstStyle>
           <a:p>
             <a:r>
-              <a:rPr lang="en-US" smtClean="0"/>
+              <a:rPr lang="en-US"/>
               <a:t>Click to edit Master subtitle style</a:t>
             </a:r>
-            <a:endParaRPr lang="en-US"/>
           </a:p>
         </p:txBody>
       </p:sp>
@@ -1560,7 +441,7 @@
           <a:p>
             <a:fld id="{5BCAD085-E8A6-8845-BD4E-CB4CCA059FC4}" type="datetimeFigureOut">
               <a:rPr lang="en-US" smtClean="0"/>
-              <a:t>1/27/13</a:t>
+              <a:t>10/18/26</a:t>
             </a:fld>
             <a:endParaRPr lang="en-US"/>
           </a:p>
@@ -1654,10 +535,9 @@
           <a:lstStyle/>
           <a:p>
             <a:r>
-              <a:rPr lang="en-US" smtClean="0"/>
+              <a:rPr lang="en-US"/>
               <a:t>Click to edit Master title style</a:t>
             </a:r>
-            <a:endParaRPr lang="en-US"/>
           </a:p>
         </p:txBody>
       </p:sp>
@@ -1678,38 +558,37 @@
           <a:p>
             <a:pPr lvl="0"/>
             <a:r>
-              <a:rPr lang="en-US" smtClean="0"/>
+              <a:rPr lang="en-US"/>
               <a:t>Click to edit Master text styles</a:t>
             </a:r>
           </a:p>
           <a:p>
             <a:pPr lvl="1"/>
             <a:r>
-              <a:rPr lang="en-US" smtClean="0"/>
+              <a:rPr lang="en-US"/>
               <a:t>Second level</a:t>
             </a:r>
           </a:p>
           <a:p>
             <a:pPr lvl="2"/>
             <a:r>
-              <a:rPr lang="en-US" smtClean="0"/>
+              <a:rPr lang="en-US"/>
               <a:t>Third level</a:t>
             </a:r>
           </a:p>
           <a:p>
             <a:pPr lvl="3"/>
             <a:r>
-              <a:rPr lang="en-US" smtClean="0"/>
+              <a:rPr lang="en-US"/>
               <a:t>Fourth level</a:t>
             </a:r>
           </a:p>
           <a:p>
             <a:pPr lvl="4"/>
             <a:r>
-              <a:rPr lang="en-US" smtClean="0"/>
+              <a:rPr lang="en-US"/>
               <a:t>Fifth level</a:t>
             </a:r>
-            <a:endParaRPr lang="en-US"/>
           </a:p>
         </p:txBody>
       </p:sp>
@@ -1730,7 +609,7 @@
           <a:p>
             <a:fld id="{5BCAD085-E8A6-8845-BD4E-CB4CCA059FC4}" type="datetimeFigureOut">
               <a:rPr lang="en-US" smtClean="0"/>
-              <a:t>1/27/13</a:t>
+              <a:t>10/18/26</a:t>
             </a:fld>
             <a:endParaRPr lang="en-US"/>
           </a:p>
@@ -1829,10 +708,9 @@
           <a:lstStyle/>
           <a:p>
             <a:r>
-              <a:rPr lang="en-US" smtClean="0"/>
+              <a:rPr lang="en-US"/>
               <a:t>Click to edit Master title style</a:t>
             </a:r>
-            <a:endParaRPr lang="en-US"/>
           </a:p>
         </p:txBody>
       </p:sp>
@@ -1858,38 +736,37 @@
           <a:p>
             <a:pPr lvl="0"/>
             <a:r>
-              <a:rPr lang="en-US" smtClean="0"/>
+              <a:rPr lang="en-US"/>
               <a:t>Click to edit Master text styles</a:t>
             </a:r>
           </a:p>
           <a:p>
             <a:pPr lvl="1"/>
             <a:r>
-              <a:rPr lang="en-US" smtClean="0"/>
+              <a:rPr lang="en-US"/>
               <a:t>Second level</a:t>
             </a:r>
           </a:p>
           <a:p>
             <a:pPr lvl="2"/>
             <a:r>
-              <a:rPr lang="en-US" smtClean="0"/>
+              <a:rPr lang="en-US"/>
               <a:t>Third level</a:t>
             </a:r>
           </a:p>
           <a:p>
             <a:pPr lvl="3"/>
             <a:r>
-              <a:rPr lang="en-US" smtClean="0"/>
+              <a:rPr lang="en-US"/>
               <a:t>Fourth level</a:t>
             </a:r>
           </a:p>
           <a:p>
             <a:pPr lvl="4"/>
             <a:r>
-              <a:rPr lang="en-US" smtClean="0"/>
+              <a:rPr lang="en-US"/>
               <a:t>Fifth level</a:t>
             </a:r>
-            <a:endParaRPr lang="en-US"/>
           </a:p>
         </p:txBody>
       </p:sp>
@@ -1910,7 +787,7 @@
           <a:p>
             <a:fld id="{5BCAD085-E8A6-8845-BD4E-CB4CCA059FC4}" type="datetimeFigureOut">
               <a:rPr lang="en-US" smtClean="0"/>
-              <a:t>1/27/13</a:t>
+              <a:t>10/18/26</a:t>
             </a:fld>
             <a:endParaRPr lang="en-US"/>
           </a:p>
@@ -2004,10 +881,9 @@
           <a:lstStyle/>
           <a:p>
             <a:r>
-              <a:rPr lang="en-US" smtClean="0"/>
+              <a:rPr lang="en-US"/>
               <a:t>Click to edit Master title style</a:t>
             </a:r>
-            <a:endParaRPr lang="en-US"/>
           </a:p>
         </p:txBody>
       </p:sp>
@@ -2028,38 +904,37 @@
           <a:p>
             <a:pPr lvl="0"/>
             <a:r>
-              <a:rPr lang="en-US" smtClean="0"/>
+              <a:rPr lang="en-US"/>
               <a:t>Click to edit Master text styles</a:t>
             </a:r>
           </a:p>
           <a:p>
             <a:pPr lvl="1"/>
             <a:r>
-              <a:rPr lang="en-US" smtClean="0"/>
+              <a:rPr lang="en-US"/>
               <a:t>Second level</a:t>
             </a:r>
           </a:p>
           <a:p>
             <a:pPr lvl="2"/>
             <a:r>
-              <a:rPr lang="en-US" smtClean="0"/>
+              <a:rPr lang="en-US"/>
               <a:t>Third level</a:t>
             </a:r>
           </a:p>
           <a:p>
             <a:pPr lvl="3"/>
             <a:r>
-              <a:rPr lang="en-US" smtClean="0"/>
+              <a:rPr lang="en-US"/>
               <a:t>Fourth level</a:t>
             </a:r>
           </a:p>
           <a:p>
             <a:pPr lvl="4"/>
             <a:r>
-              <a:rPr lang="en-US" smtClean="0"/>
+              <a:rPr lang="en-US"/>
               <a:t>Fifth level</a:t>
             </a:r>
-            <a:endParaRPr lang="en-US"/>
           </a:p>
         </p:txBody>
       </p:sp>
@@ -2080,7 +955,7 @@
           <a:p>
             <a:fld id="{5BCAD085-E8A6-8845-BD4E-CB4CCA059FC4}" type="datetimeFigureOut">
               <a:rPr lang="en-US" smtClean="0"/>
-              <a:t>1/27/13</a:t>
+              <a:t>10/18/26</a:t>
             </a:fld>
             <a:endParaRPr lang="en-US"/>
           </a:p>
@@ -2183,10 +1058,9 @@
           </a:lstStyle>
           <a:p>
             <a:r>
-              <a:rPr lang="en-US" smtClean="0"/>
+              <a:rPr lang="en-US"/>
               <a:t>Click to edit Master title style</a:t>
             </a:r>
-            <a:endParaRPr lang="en-US"/>
           </a:p>
         </p:txBody>
       </p:sp>
@@ -2303,7 +1177,7 @@
           <a:p>
             <a:pPr lvl="0"/>
             <a:r>
-              <a:rPr lang="en-US" smtClean="0"/>
+              <a:rPr lang="en-US"/>
               <a:t>Click to edit Master text styles</a:t>
             </a:r>
           </a:p>
@@ -2326,7 +1200,7 @@
           <a:p>
             <a:fld id="{5BCAD085-E8A6-8845-BD4E-CB4CCA059FC4}" type="datetimeFigureOut">
               <a:rPr lang="en-US" smtClean="0"/>
-              <a:t>1/27/13</a:t>
+              <a:t>10/18/26</a:t>
             </a:fld>
             <a:endParaRPr lang="en-US"/>
           </a:p>
@@ -2420,10 +1294,9 @@
           <a:lstStyle/>
           <a:p>
             <a:r>
-              <a:rPr lang="en-US" smtClean="0"/>
+              <a:rPr lang="en-US"/>
               <a:t>Click to edit Master title style</a:t>
             </a:r>
-            <a:endParaRPr lang="en-US"/>
           </a:p>
         </p:txBody>
       </p:sp>
@@ -2477,38 +1350,37 @@
           <a:p>
             <a:pPr lvl="0"/>
             <a:r>
-              <a:rPr lang="en-US" smtClean="0"/>
+              <a:rPr lang="en-US"/>
               <a:t>Click to edit Master text styles</a:t>
             </a:r>
           </a:p>
           <a:p>
             <a:pPr lvl="1"/>
             <a:r>
-              <a:rPr lang="en-US" smtClean="0"/>
+              <a:rPr lang="en-US"/>
               <a:t>Second level</a:t>
             </a:r>
           </a:p>
           <a:p>
             <a:pPr lvl="2"/>
             <a:r>
-              <a:rPr lang="en-US" smtClean="0"/>
+              <a:rPr lang="en-US"/>
               <a:t>Third level</a:t>
             </a:r>
           </a:p>
           <a:p>
             <a:pPr lvl="3"/>
             <a:r>
-              <a:rPr lang="en-US" smtClean="0"/>
+              <a:rPr lang="en-US"/>
               <a:t>Fourth level</a:t>
             </a:r>
           </a:p>
           <a:p>
             <a:pPr lvl="4"/>
             <a:r>
-              <a:rPr lang="en-US" smtClean="0"/>
+              <a:rPr lang="en-US"/>
               <a:t>Fifth level</a:t>
             </a:r>
-            <a:endParaRPr lang="en-US"/>
           </a:p>
         </p:txBody>
       </p:sp>
@@ -2562,38 +1434,37 @@
           <a:p>
             <a:pPr lvl="0"/>
             <a:r>
-              <a:rPr lang="en-US" smtClean="0"/>
+              <a:rPr lang="en-US"/>
               <a:t>Click to edit Master text styles</a:t>
             </a:r>
           </a:p>
           <a:p>
             <a:pPr lvl="1"/>
             <a:r>
-              <a:rPr lang="en-US" smtClean="0"/>
+              <a:rPr lang="en-US"/>
               <a:t>Second level</a:t>
             </a:r>
           </a:p>
           <a:p>
             <a:pPr lvl="2"/>
             <a:r>
-              <a:rPr lang="en-US" smtClean="0"/>
+              <a:rPr lang="en-US"/>
               <a:t>Third level</a:t>
             </a:r>
           </a:p>
           <a:p>
             <a:pPr lvl="3"/>
             <a:r>
-              <a:rPr lang="en-US" smtClean="0"/>
+              <a:rPr lang="en-US"/>
               <a:t>Fourth level</a:t>
             </a:r>
           </a:p>
           <a:p>
             <a:pPr lvl="4"/>
             <a:r>
-              <a:rPr lang="en-US" smtClean="0"/>
+              <a:rPr lang="en-US"/>
               <a:t>Fifth level</a:t>
             </a:r>
-            <a:endParaRPr lang="en-US"/>
           </a:p>
         </p:txBody>
       </p:sp>
@@ -2614,7 +1485,7 @@
           <a:p>
             <a:fld id="{5BCAD085-E8A6-8845-BD4E-CB4CCA059FC4}" type="datetimeFigureOut">
               <a:rPr lang="en-US" smtClean="0"/>
-              <a:t>1/27/13</a:t>
+              <a:t>10/18/26</a:t>
             </a:fld>
             <a:endParaRPr lang="en-US"/>
           </a:p>
@@ -2712,10 +1583,9 @@
           </a:lstStyle>
           <a:p>
             <a:r>
-              <a:rPr lang="en-US" smtClean="0"/>
+              <a:rPr lang="en-US"/>
               <a:t>Click to edit Master title style</a:t>
             </a:r>
-            <a:endParaRPr lang="en-US"/>
           </a:p>
         </p:txBody>
       </p:sp>
@@ -2778,7 +1648,7 @@
           <a:p>
             <a:pPr lvl="0"/>
             <a:r>
-              <a:rPr lang="en-US" smtClean="0"/>
+              <a:rPr lang="en-US"/>
               <a:t>Click to edit Master text styles</a:t>
             </a:r>
           </a:p>
@@ -2834,38 +1704,37 @@
           <a:p>
             <a:pPr lvl="0"/>
             <a:r>
-              <a:rPr lang="en-US" smtClean="0"/>
+              <a:rPr lang="en-US"/>
               <a:t>Click to edit Master text styles</a:t>
             </a:r>
           </a:p>
           <a:p>
             <a:pPr lvl="1"/>
             <a:r>
-              <a:rPr lang="en-US" smtClean="0"/>
+              <a:rPr lang="en-US"/>
               <a:t>Second level</a:t>
             </a:r>
           </a:p>
           <a:p>
             <a:pPr lvl="2"/>
             <a:r>
-              <a:rPr lang="en-US" smtClean="0"/>
+              <a:rPr lang="en-US"/>
               <a:t>Third level</a:t>
             </a:r>
           </a:p>
           <a:p>
             <a:pPr lvl="3"/>
             <a:r>
-              <a:rPr lang="en-US" smtClean="0"/>
+              <a:rPr lang="en-US"/>
               <a:t>Fourth level</a:t>
             </a:r>
           </a:p>
           <a:p>
             <a:pPr lvl="4"/>
             <a:r>
-              <a:rPr lang="en-US" smtClean="0"/>
+              <a:rPr lang="en-US"/>
               <a:t>Fifth level</a:t>
             </a:r>
-            <a:endParaRPr lang="en-US"/>
           </a:p>
         </p:txBody>
       </p:sp>
@@ -2928,7 +1797,7 @@
           <a:p>
             <a:pPr lvl="0"/>
             <a:r>
-              <a:rPr lang="en-US" smtClean="0"/>
+              <a:rPr lang="en-US"/>
               <a:t>Click to edit Master text styles</a:t>
             </a:r>
           </a:p>
@@ -2984,38 +1853,37 @@
           <a:p>
             <a:pPr lvl="0"/>
             <a:r>
-              <a:rPr lang="en-US" smtClean="0"/>
+              <a:rPr lang="en-US"/>
               <a:t>Click to edit Master text styles</a:t>
             </a:r>
           </a:p>
           <a:p>
             <a:pPr lvl="1"/>
             <a:r>
-              <a:rPr lang="en-US" smtClean="0"/>
+              <a:rPr lang="en-US"/>
               <a:t>Second level</a:t>
             </a:r>
           </a:p>
           <a:p>
             <a:pPr lvl="2"/>
             <a:r>
-              <a:rPr lang="en-US" smtClean="0"/>
+              <a:rPr lang="en-US"/>
               <a:t>Third level</a:t>
             </a:r>
           </a:p>
           <a:p>
             <a:pPr lvl="3"/>
             <a:r>
-              <a:rPr lang="en-US" smtClean="0"/>
+              <a:rPr lang="en-US"/>
               <a:t>Fourth level</a:t>
             </a:r>
           </a:p>
           <a:p>
             <a:pPr lvl="4"/>
             <a:r>
-              <a:rPr lang="en-US" smtClean="0"/>
+              <a:rPr lang="en-US"/>
               <a:t>Fifth level</a:t>
             </a:r>
-            <a:endParaRPr lang="en-US"/>
           </a:p>
         </p:txBody>
       </p:sp>
@@ -3036,7 +1904,7 @@
           <a:p>
             <a:fld id="{5BCAD085-E8A6-8845-BD4E-CB4CCA059FC4}" type="datetimeFigureOut">
               <a:rPr lang="en-US" smtClean="0"/>
-              <a:t>1/27/13</a:t>
+              <a:t>10/18/26</a:t>
             </a:fld>
             <a:endParaRPr lang="en-US"/>
           </a:p>
@@ -3130,10 +1998,9 @@
           <a:lstStyle/>
           <a:p>
             <a:r>
-              <a:rPr lang="en-US" smtClean="0"/>
+              <a:rPr lang="en-US"/>
               <a:t>Click to edit Master title style</a:t>
             </a:r>
-            <a:endParaRPr lang="en-US"/>
           </a:p>
         </p:txBody>
       </p:sp>
@@ -3154,7 +2021,7 @@
           <a:p>
             <a:fld id="{5BCAD085-E8A6-8845-BD4E-CB4CCA059FC4}" type="datetimeFigureOut">
               <a:rPr lang="en-US" smtClean="0"/>
-              <a:t>1/27/13</a:t>
+              <a:t>10/18/26</a:t>
             </a:fld>
             <a:endParaRPr lang="en-US"/>
           </a:p>
@@ -3249,7 +2116,7 @@
           <a:p>
             <a:fld id="{5BCAD085-E8A6-8845-BD4E-CB4CCA059FC4}" type="datetimeFigureOut">
               <a:rPr lang="en-US" smtClean="0"/>
-              <a:t>1/27/13</a:t>
+              <a:t>10/18/26</a:t>
             </a:fld>
             <a:endParaRPr lang="en-US"/>
           </a:p>
@@ -3352,10 +2219,9 @@
           </a:lstStyle>
           <a:p>
             <a:r>
-              <a:rPr lang="en-US" smtClean="0"/>
+              <a:rPr lang="en-US"/>
               <a:t>Click to edit Master title style</a:t>
             </a:r>
-            <a:endParaRPr lang="en-US"/>
           </a:p>
         </p:txBody>
       </p:sp>
@@ -3409,38 +2275,37 @@
           <a:p>
             <a:pPr lvl="0"/>
             <a:r>
-              <a:rPr lang="en-US" smtClean="0"/>
+              <a:rPr lang="en-US"/>
               <a:t>Click to edit Master text styles</a:t>
             </a:r>
           </a:p>
           <a:p>
             <a:pPr lvl="1"/>
             <a:r>
-              <a:rPr lang="en-US" smtClean="0"/>
+              <a:rPr lang="en-US"/>
               <a:t>Second level</a:t>
             </a:r>
           </a:p>
           <a:p>
             <a:pPr lvl="2"/>
             <a:r>
-              <a:rPr lang="en-US" smtClean="0"/>
+              <a:rPr lang="en-US"/>
               <a:t>Third level</a:t>
             </a:r>
           </a:p>
           <a:p>
             <a:pPr lvl="3"/>
             <a:r>
-              <a:rPr lang="en-US" smtClean="0"/>
+              <a:rPr lang="en-US"/>
               <a:t>Fourth level</a:t>
             </a:r>
           </a:p>
           <a:p>
             <a:pPr lvl="4"/>
             <a:r>
-              <a:rPr lang="en-US" smtClean="0"/>
+              <a:rPr lang="en-US"/>
               <a:t>Fifth level</a:t>
             </a:r>
-            <a:endParaRPr lang="en-US"/>
           </a:p>
         </p:txBody>
       </p:sp>
@@ -3503,7 +2368,7 @@
           <a:p>
             <a:pPr lvl="0"/>
             <a:r>
-              <a:rPr lang="en-US" smtClean="0"/>
+              <a:rPr lang="en-US"/>
               <a:t>Click to edit Master text styles</a:t>
             </a:r>
           </a:p>
@@ -3526,7 +2391,7 @@
           <a:p>
             <a:fld id="{5BCAD085-E8A6-8845-BD4E-CB4CCA059FC4}" type="datetimeFigureOut">
               <a:rPr lang="en-US" smtClean="0"/>
-              <a:t>1/27/13</a:t>
+              <a:t>10/18/26</a:t>
             </a:fld>
             <a:endParaRPr lang="en-US"/>
           </a:p>
@@ -3629,10 +2494,9 @@
           </a:lstStyle>
           <a:p>
             <a:r>
-              <a:rPr lang="en-US" smtClean="0"/>
+              <a:rPr lang="en-US"/>
               <a:t>Click to edit Master title style</a:t>
             </a:r>
-            <a:endParaRPr lang="en-US"/>
           </a:p>
         </p:txBody>
       </p:sp>
@@ -3756,7 +2620,7 @@
           <a:p>
             <a:pPr lvl="0"/>
             <a:r>
-              <a:rPr lang="en-US" smtClean="0"/>
+              <a:rPr lang="en-US"/>
               <a:t>Click to edit Master text styles</a:t>
             </a:r>
           </a:p>
@@ -3779,7 +2643,7 @@
           <a:p>
             <a:fld id="{5BCAD085-E8A6-8845-BD4E-CB4CCA059FC4}" type="datetimeFigureOut">
               <a:rPr lang="en-US" smtClean="0"/>
-              <a:t>1/27/13</a:t>
+              <a:t>10/18/26</a:t>
             </a:fld>
             <a:endParaRPr lang="en-US"/>
           </a:p>
@@ -3888,10 +2752,9 @@
           <a:lstStyle/>
           <a:p>
             <a:r>
-              <a:rPr lang="en-US" smtClean="0"/>
+              <a:rPr lang="en-US"/>
               <a:t>Click to edit Master title style</a:t>
             </a:r>
-            <a:endParaRPr lang="en-US"/>
           </a:p>
         </p:txBody>
       </p:sp>
@@ -3922,38 +2785,37 @@
           <a:p>
             <a:pPr lvl="0"/>
             <a:r>
-              <a:rPr lang="en-US" smtClean="0"/>
+              <a:rPr lang="en-US"/>
               <a:t>Click to edit Master text styles</a:t>
             </a:r>
           </a:p>
           <a:p>
             <a:pPr lvl="1"/>
             <a:r>
-              <a:rPr lang="en-US" smtClean="0"/>
+              <a:rPr lang="en-US"/>
               <a:t>Second level</a:t>
             </a:r>
           </a:p>
           <a:p>
             <a:pPr lvl="2"/>
             <a:r>
-              <a:rPr lang="en-US" smtClean="0"/>
+              <a:rPr lang="en-US"/>
               <a:t>Third level</a:t>
             </a:r>
           </a:p>
           <a:p>
             <a:pPr lvl="3"/>
             <a:r>
-              <a:rPr lang="en-US" smtClean="0"/>
+              <a:rPr lang="en-US"/>
               <a:t>Fourth level</a:t>
             </a:r>
           </a:p>
           <a:p>
             <a:pPr lvl="4"/>
             <a:r>
-              <a:rPr lang="en-US" smtClean="0"/>
+              <a:rPr lang="en-US"/>
               <a:t>Fifth level</a:t>
             </a:r>
-            <a:endParaRPr lang="en-US"/>
           </a:p>
         </p:txBody>
       </p:sp>
@@ -3992,7 +2854,7 @@
           <a:p>
             <a:fld id="{5BCAD085-E8A6-8845-BD4E-CB4CCA059FC4}" type="datetimeFigureOut">
               <a:rPr lang="en-US" smtClean="0"/>
-              <a:t>1/27/13</a:t>
+              <a:t>10/18/26</a:t>
             </a:fld>
             <a:endParaRPr lang="en-US"/>
           </a:p>
@@ -4351,7 +3213,7 @@
 </file>
 
 <file path=ppt/slides/slide1.xml><?xml version="1.0" encoding="utf-8"?>
-<p:sld xmlns:a="http://schemas.openxmlformats.org/drawingml/2006/main" xmlns:p="http://schemas.openxmlformats.org/presentationml/2006/main" xmlns:r="http://schemas.openxmlformats.org/officeDocument/2006/relationships">
+<p:sld xmlns:a="http://schemas.openxmlformats.org/drawingml/2006/main" xmlns:r="http://schemas.openxmlformats.org/officeDocument/2006/relationships" xmlns:p="http://schemas.openxmlformats.org/presentationml/2006/main">
   <p:cSld>
     <p:spTree>
       <p:nvGrpSpPr>
@@ -4359,7 +3221,14 @@
         <p:cNvGrpSpPr/>
         <p:nvPr/>
       </p:nvGrpSpPr>
-      <p:grpSpPr/>
+      <p:grpSpPr>
+        <a:xfrm>
+          <a:off x="0" y="0"/>
+          <a:ext cx="0" cy="0"/>
+          <a:chOff x="0" y="0"/>
+          <a:chExt cx="0" cy="0"/>
+        </a:xfrm>
+      </p:grpSpPr>
       <p:sp>
         <p:nvSpPr>
           <p:cNvPr id="2" name="Title 1"/>
@@ -4397,12 +3266,14 @@
           <a:lstStyle/>
           <a:p>
             <a:r>
+              <a:rPr dirty="0"/>
               <a:t>Samar Khajuria, T00714740</a:t>
             </a:r>
           </a:p>
           <a:p>
             <a:r>
-              <a:t>COMP 4980, Category 3</a:t>
+              <a:rPr dirty="0"/>
+              <a:t>COMP 4980</a:t>
             </a:r>
           </a:p>
         </p:txBody>
@@ -4416,7 +3287,7 @@
 </file>
 
 <file path=ppt/slides/slide10.xml><?xml version="1.0" encoding="utf-8"?>
-<p:sld xmlns:a="http://schemas.openxmlformats.org/drawingml/2006/main" xmlns:p="http://schemas.openxmlformats.org/presentationml/2006/main" xmlns:r="http://schemas.openxmlformats.org/officeDocument/2006/relationships">
+<p:sld xmlns:a="http://schemas.openxmlformats.org/drawingml/2006/main" xmlns:r="http://schemas.openxmlformats.org/officeDocument/2006/relationships" xmlns:p="http://schemas.openxmlformats.org/presentationml/2006/main">
   <p:cSld>
     <p:spTree>
       <p:nvGrpSpPr>
@@ -4424,7 +3295,14 @@
         <p:cNvGrpSpPr/>
         <p:nvPr/>
       </p:nvGrpSpPr>
-      <p:grpSpPr/>
+      <p:grpSpPr>
+        <a:xfrm>
+          <a:off x="0" y="0"/>
+          <a:ext cx="0" cy="0"/>
+          <a:chOff x="0" y="0"/>
+          <a:chExt cx="0" cy="0"/>
+        </a:xfrm>
+      </p:grpSpPr>
       <p:sp>
         <p:nvSpPr>
           <p:cNvPr id="2" name="Title 1"/>
@@ -4441,7 +3319,7 @@
           <a:lstStyle/>
           <a:p>
             <a:r>
-              <a:t>Difficulty Sets The Speed</a:t>
+              <a:t>What It Does Not Do</a:t>
             </a:r>
           </a:p>
         </p:txBody>
@@ -4462,32 +3340,20 @@
           <a:lstStyle/>
           <a:p>
             <a:r>
-              <a:t>Level 1, 80 beats per minute, 24.0 seconds</a:t>
-            </a:r>
-          </a:p>
-          <a:p>
-            <a:r>
-              <a:t>Level 2, 110 beats per minute, 17.5 seconds</a:t>
-            </a:r>
-          </a:p>
-          <a:p>
-            <a:r>
-              <a:t>Level 3, 140 beats per minute, 13.7 seconds</a:t>
-            </a:r>
-          </a:p>
-          <a:p>
-            <a:r>
-              <a:t>Level 4, 170 beats per minute, 11.3 seconds</a:t>
-            </a:r>
-          </a:p>
-          <a:p>
-            <a:r>
-              <a:t>Level 5, 200 beats per minute, 9.6 seconds</a:t>
-            </a:r>
-          </a:p>
-          <a:p>
-            <a:r>
-              <a:t>Each level adds 30 beats per minute</a:t>
+              <a:rPr dirty="0"/>
+              <a:t>Two notes is not really a melody</a:t>
+            </a:r>
+          </a:p>
+          <a:p>
+            <a:r>
+              <a:rPr dirty="0"/>
+              <a:t>The rhythm never changes</a:t>
+            </a:r>
+          </a:p>
+          <a:p>
+            <a:r>
+              <a:rPr dirty="0"/>
+              <a:t>Difficulty only controls the speed</a:t>
             </a:r>
           </a:p>
         </p:txBody>
@@ -4501,7 +3367,7 @@
 </file>
 
 <file path=ppt/slides/slide11.xml><?xml version="1.0" encoding="utf-8"?>
-<p:sld xmlns:a="http://schemas.openxmlformats.org/drawingml/2006/main" xmlns:p="http://schemas.openxmlformats.org/presentationml/2006/main" xmlns:r="http://schemas.openxmlformats.org/officeDocument/2006/relationships">
+<p:sld xmlns:a="http://schemas.openxmlformats.org/drawingml/2006/main" xmlns:r="http://schemas.openxmlformats.org/officeDocument/2006/relationships" xmlns:p="http://schemas.openxmlformats.org/presentationml/2006/main">
   <p:cSld>
     <p:spTree>
       <p:nvGrpSpPr>
@@ -4509,7 +3375,14 @@
         <p:cNvGrpSpPr/>
         <p:nvPr/>
       </p:nvGrpSpPr>
-      <p:grpSpPr/>
+      <p:grpSpPr>
+        <a:xfrm>
+          <a:off x="0" y="0"/>
+          <a:ext cx="0" cy="0"/>
+          <a:chOff x="0" y="0"/>
+          <a:chExt cx="0" cy="0"/>
+        </a:xfrm>
+      </p:grpSpPr>
       <p:sp>
         <p:nvSpPr>
           <p:cNvPr id="2" name="Title 1"/>
@@ -4526,7 +3399,7 @@
           <a:lstStyle/>
           <a:p>
             <a:r>
-              <a:t>What It Does Not Do</a:t>
+              <a:t>Where I Would Take It Next</a:t>
             </a:r>
           </a:p>
         </p:txBody>
@@ -4547,22 +3420,20 @@
           <a:lstStyle/>
           <a:p>
             <a:r>
-              <a:t>Two notes is not really a melody</a:t>
-            </a:r>
-          </a:p>
-          <a:p>
-            <a:r>
-              <a:t>The rhythm never changes</a:t>
-            </a:r>
-          </a:p>
-          <a:p>
-            <a:r>
-              <a:t>Difficulty only controls the speed</a:t>
-            </a:r>
-          </a:p>
-          <a:p>
-            <a:r>
-              <a:t>Nobody has listened to it and rated it</a:t>
+              <a:rPr dirty="0"/>
+              <a:t>Use a few more notes, so it can suggest a key</a:t>
+            </a:r>
+          </a:p>
+          <a:p>
+            <a:r>
+              <a:rPr dirty="0"/>
+              <a:t>Let difficulty change the randomness too</a:t>
+            </a:r>
+          </a:p>
+          <a:p>
+            <a:r>
+              <a:rPr dirty="0"/>
+              <a:t>Vary the drum as well as the speed</a:t>
             </a:r>
           </a:p>
         </p:txBody>
@@ -4576,7 +3447,7 @@
 </file>
 
 <file path=ppt/slides/slide12.xml><?xml version="1.0" encoding="utf-8"?>
-<p:sld xmlns:a="http://schemas.openxmlformats.org/drawingml/2006/main" xmlns:p="http://schemas.openxmlformats.org/presentationml/2006/main" xmlns:r="http://schemas.openxmlformats.org/officeDocument/2006/relationships">
+<p:sld xmlns:a="http://schemas.openxmlformats.org/drawingml/2006/main" xmlns:r="http://schemas.openxmlformats.org/officeDocument/2006/relationships" xmlns:p="http://schemas.openxmlformats.org/presentationml/2006/main">
   <p:cSld>
     <p:spTree>
       <p:nvGrpSpPr>
@@ -4584,82 +3455,14 @@
         <p:cNvGrpSpPr/>
         <p:nvPr/>
       </p:nvGrpSpPr>
-      <p:grpSpPr/>
-      <p:sp>
-        <p:nvSpPr>
-          <p:cNvPr id="2" name="Title 1"/>
-          <p:cNvSpPr>
-            <a:spLocks noGrp="1"/>
-          </p:cNvSpPr>
-          <p:nvPr>
-            <p:ph type="title"/>
-          </p:nvPr>
-        </p:nvSpPr>
-        <p:spPr/>
-        <p:txBody>
-          <a:bodyPr/>
-          <a:lstStyle/>
-          <a:p>
-            <a:r>
-              <a:t>Where I Would Take It Next</a:t>
-            </a:r>
-          </a:p>
-        </p:txBody>
-      </p:sp>
-      <p:sp>
-        <p:nvSpPr>
-          <p:cNvPr id="3" name="Content Placeholder 2"/>
-          <p:cNvSpPr>
-            <a:spLocks noGrp="1"/>
-          </p:cNvSpPr>
-          <p:nvPr>
-            <p:ph idx="1"/>
-          </p:nvPr>
-        </p:nvSpPr>
-        <p:spPr/>
-        <p:txBody>
-          <a:bodyPr/>
-          <a:lstStyle/>
-          <a:p>
-            <a:r>
-              <a:t>Use a few more notes, so it can suggest a key</a:t>
-            </a:r>
-          </a:p>
-          <a:p>
-            <a:r>
-              <a:t>Let difficulty change the randomness too</a:t>
-            </a:r>
-          </a:p>
-          <a:p>
-            <a:r>
-              <a:t>Vary the drum as well as the speed</a:t>
-            </a:r>
-          </a:p>
-          <a:p>
-            <a:r>
-              <a:t>Drive it from live game state, like Left 4 Dead</a:t>
-            </a:r>
-          </a:p>
-        </p:txBody>
-      </p:sp>
-    </p:spTree>
-  </p:cSld>
-  <p:clrMapOvr>
-    <a:masterClrMapping/>
-  </p:clrMapOvr>
-</p:sld>
-</file>
-
-<file path=ppt/slides/slide13.xml><?xml version="1.0" encoding="utf-8"?>
-<p:sld xmlns:a="http://schemas.openxmlformats.org/drawingml/2006/main" xmlns:p="http://schemas.openxmlformats.org/presentationml/2006/main" xmlns:r="http://schemas.openxmlformats.org/officeDocument/2006/relationships">
-  <p:cSld>
-    <p:spTree>
-      <p:nvGrpSpPr>
-        <p:cNvPr id="1" name=""/>
-        <p:cNvGrpSpPr/>
-        <p:nvPr/>
-      </p:nvGrpSpPr>
-      <p:grpSpPr/>
+      <p:grpSpPr>
+        <a:xfrm>
+          <a:off x="0" y="0"/>
+          <a:ext cx="0" cy="0"/>
+          <a:chOff x="0" y="0"/>
+          <a:chExt cx="0" cy="0"/>
+        </a:xfrm>
+      </p:grpSpPr>
       <p:sp>
         <p:nvSpPr>
           <p:cNvPr id="2" name="Title 1"/>
@@ -4711,7 +3514,7 @@
 </file>
 
 <file path=ppt/slides/slide2.xml><?xml version="1.0" encoding="utf-8"?>
-<p:sld xmlns:a="http://schemas.openxmlformats.org/drawingml/2006/main" xmlns:p="http://schemas.openxmlformats.org/presentationml/2006/main" xmlns:r="http://schemas.openxmlformats.org/officeDocument/2006/relationships">
+<p:sld xmlns:a="http://schemas.openxmlformats.org/drawingml/2006/main" xmlns:r="http://schemas.openxmlformats.org/officeDocument/2006/relationships" xmlns:p="http://schemas.openxmlformats.org/presentationml/2006/main">
   <p:cSld>
     <p:spTree>
       <p:nvGrpSpPr>
@@ -4719,7 +3522,14 @@
         <p:cNvGrpSpPr/>
         <p:nvPr/>
       </p:nvGrpSpPr>
-      <p:grpSpPr/>
+      <p:grpSpPr>
+        <a:xfrm>
+          <a:off x="0" y="0"/>
+          <a:ext cx="0" cy="0"/>
+          <a:chOff x="0" y="0"/>
+          <a:chExt cx="0" cy="0"/>
+        </a:xfrm>
+      </p:grpSpPr>
       <p:sp>
         <p:nvSpPr>
           <p:cNvPr id="2" name="Title 1"/>
@@ -4757,26 +3567,31 @@
           <a:lstStyle/>
           <a:p>
             <a:r>
+              <a:rPr dirty="0"/>
               <a:t>Game music is normally a fixed audio file</a:t>
             </a:r>
           </a:p>
           <a:p>
             <a:r>
+              <a:rPr dirty="0"/>
               <a:t>It plays the same way on every replay</a:t>
             </a:r>
           </a:p>
           <a:p>
             <a:r>
+              <a:rPr dirty="0"/>
               <a:t>It does not know what the player is doing</a:t>
             </a:r>
           </a:p>
           <a:p>
             <a:r>
+              <a:rPr dirty="0"/>
               <a:t>PCG means the computer builds content instead</a:t>
             </a:r>
           </a:p>
           <a:p>
             <a:r>
+              <a:rPr dirty="0"/>
               <a:t>This project does that for the music</a:t>
             </a:r>
           </a:p>
@@ -4791,7 +3606,7 @@
 </file>
 
 <file path=ppt/slides/slide3.xml><?xml version="1.0" encoding="utf-8"?>
-<p:sld xmlns:a="http://schemas.openxmlformats.org/drawingml/2006/main" xmlns:p="http://schemas.openxmlformats.org/presentationml/2006/main" xmlns:r="http://schemas.openxmlformats.org/officeDocument/2006/relationships">
+<p:sld xmlns:a="http://schemas.openxmlformats.org/drawingml/2006/main" xmlns:r="http://schemas.openxmlformats.org/officeDocument/2006/relationships" xmlns:p="http://schemas.openxmlformats.org/presentationml/2006/main">
   <p:cSld>
     <p:spTree>
       <p:nvGrpSpPr>
@@ -4799,7 +3614,14 @@
         <p:cNvGrpSpPr/>
         <p:nvPr/>
       </p:nvGrpSpPr>
-      <p:grpSpPr/>
+      <p:grpSpPr>
+        <a:xfrm>
+          <a:off x="0" y="0"/>
+          <a:ext cx="0" cy="0"/>
+          <a:chOff x="0" y="0"/>
+          <a:chExt cx="0" cy="0"/>
+        </a:xfrm>
+      </p:grpSpPr>
       <p:sp>
         <p:nvSpPr>
           <p:cNvPr id="2" name="Title 1"/>
@@ -4837,27 +3659,14 @@
           <a:lstStyle/>
           <a:p>
             <a:r>
+              <a:rPr dirty="0"/>
               <a:t>A program that writes music for each level</a:t>
             </a:r>
           </a:p>
           <a:p>
             <a:r>
+              <a:rPr dirty="0"/>
               <a:t>A level number goes in, a music file comes out</a:t>
-            </a:r>
-          </a:p>
-          <a:p>
-            <a:r>
-              <a:t>One Java file, about 220 lines</a:t>
-            </a:r>
-          </a:p>
-          <a:p>
-            <a:r>
-              <a:t>No outside libraries</a:t>
-            </a:r>
-          </a:p>
-          <a:p>
-            <a:r>
-              <a:t>Five pieces of music in under a second</a:t>
             </a:r>
           </a:p>
         </p:txBody>
@@ -4871,7 +3680,7 @@
 </file>
 
 <file path=ppt/slides/slide4.xml><?xml version="1.0" encoding="utf-8"?>
-<p:sld xmlns:a="http://schemas.openxmlformats.org/drawingml/2006/main" xmlns:p="http://schemas.openxmlformats.org/presentationml/2006/main" xmlns:r="http://schemas.openxmlformats.org/officeDocument/2006/relationships">
+<p:sld xmlns:a="http://schemas.openxmlformats.org/drawingml/2006/main" xmlns:r="http://schemas.openxmlformats.org/officeDocument/2006/relationships" xmlns:p="http://schemas.openxmlformats.org/presentationml/2006/main">
   <p:cSld>
     <p:spTree>
       <p:nvGrpSpPr>
@@ -4879,7 +3688,14 @@
         <p:cNvGrpSpPr/>
         <p:nvPr/>
       </p:nvGrpSpPr>
-      <p:grpSpPr/>
+      <p:grpSpPr>
+        <a:xfrm>
+          <a:off x="0" y="0"/>
+          <a:ext cx="0" cy="0"/>
+          <a:chOff x="0" y="0"/>
+          <a:chExt cx="0" cy="0"/>
+        </a:xfrm>
+      </p:grpSpPr>
       <p:sp>
         <p:nvSpPr>
           <p:cNvPr id="2" name="Title 1"/>
@@ -4910,7 +3726,7 @@
           <p:nvPr/>
         </p:nvPicPr>
         <p:blipFill>
-          <a:blip r:embed="rId2"/>
+          <a:blip r:embed="rId3"/>
           <a:stretch>
             <a:fillRect/>
           </a:stretch>
@@ -4934,7 +3750,7 @@
 </file>
 
 <file path=ppt/slides/slide5.xml><?xml version="1.0" encoding="utf-8"?>
-<p:sld xmlns:a="http://schemas.openxmlformats.org/drawingml/2006/main" xmlns:p="http://schemas.openxmlformats.org/presentationml/2006/main" xmlns:r="http://schemas.openxmlformats.org/officeDocument/2006/relationships">
+<p:sld xmlns:a="http://schemas.openxmlformats.org/drawingml/2006/main" xmlns:r="http://schemas.openxmlformats.org/officeDocument/2006/relationships" xmlns:p="http://schemas.openxmlformats.org/presentationml/2006/main">
   <p:cSld>
     <p:spTree>
       <p:nvGrpSpPr>
@@ -4942,7 +3758,14 @@
         <p:cNvGrpSpPr/>
         <p:nvPr/>
       </p:nvGrpSpPr>
-      <p:grpSpPr/>
+      <p:grpSpPr>
+        <a:xfrm>
+          <a:off x="0" y="0"/>
+          <a:ext cx="0" cy="0"/>
+          <a:chOff x="0" y="0"/>
+          <a:chExt cx="0" cy="0"/>
+        </a:xfrm>
+      </p:grpSpPr>
       <p:sp>
         <p:nvSpPr>
           <p:cNvPr id="2" name="Title 1"/>
@@ -4980,26 +3803,31 @@
           <a:lstStyle/>
           <a:p>
             <a:r>
+              <a:rPr dirty="0"/>
               <a:t>A beat is the pulse you tap your foot to</a:t>
             </a:r>
           </a:p>
           <a:p>
             <a:r>
+              <a:rPr dirty="0"/>
               <a:t>Tempo is beats per minute, so higher is faster</a:t>
             </a:r>
           </a:p>
           <a:p>
             <a:r>
+              <a:rPr dirty="0"/>
               <a:t>A MIDI file is not a recording</a:t>
             </a:r>
           </a:p>
           <a:p>
             <a:r>
+              <a:rPr dirty="0"/>
               <a:t>It is a list of which note to play and when</a:t>
             </a:r>
           </a:p>
           <a:p>
             <a:r>
+              <a:rPr dirty="0"/>
               <a:t>That is why one level is only 600 bytes</a:t>
             </a:r>
           </a:p>
@@ -5014,7 +3842,7 @@
 </file>
 
 <file path=ppt/slides/slide6.xml><?xml version="1.0" encoding="utf-8"?>
-<p:sld xmlns:a="http://schemas.openxmlformats.org/drawingml/2006/main" xmlns:p="http://schemas.openxmlformats.org/presentationml/2006/main" xmlns:r="http://schemas.openxmlformats.org/officeDocument/2006/relationships">
+<p:sld xmlns:a="http://schemas.openxmlformats.org/drawingml/2006/main" xmlns:r="http://schemas.openxmlformats.org/officeDocument/2006/relationships" xmlns:p="http://schemas.openxmlformats.org/presentationml/2006/main">
   <p:cSld>
     <p:spTree>
       <p:nvGrpSpPr>
@@ -5022,7 +3850,14 @@
         <p:cNvGrpSpPr/>
         <p:nvPr/>
       </p:nvGrpSpPr>
-      <p:grpSpPr/>
+      <p:grpSpPr>
+        <a:xfrm>
+          <a:off x="0" y="0"/>
+          <a:ext cx="0" cy="0"/>
+          <a:chOff x="0" y="0"/>
+          <a:chExt cx="0" cy="0"/>
+        </a:xfrm>
+      </p:grpSpPr>
       <p:sp>
         <p:nvSpPr>
           <p:cNvPr id="2" name="Title 1"/>
@@ -5099,7 +3934,7 @@
 </file>
 
 <file path=ppt/slides/slide7.xml><?xml version="1.0" encoding="utf-8"?>
-<p:sld xmlns:a="http://schemas.openxmlformats.org/drawingml/2006/main" xmlns:p="http://schemas.openxmlformats.org/presentationml/2006/main" xmlns:r="http://schemas.openxmlformats.org/officeDocument/2006/relationships">
+<p:sld xmlns:a="http://schemas.openxmlformats.org/drawingml/2006/main" xmlns:r="http://schemas.openxmlformats.org/officeDocument/2006/relationships" xmlns:p="http://schemas.openxmlformats.org/presentationml/2006/main">
   <p:cSld>
     <p:spTree>
       <p:nvGrpSpPr>
@@ -5107,7 +3942,14 @@
         <p:cNvGrpSpPr/>
         <p:nvPr/>
       </p:nvGrpSpPr>
-      <p:grpSpPr/>
+      <p:grpSpPr>
+        <a:xfrm>
+          <a:off x="0" y="0"/>
+          <a:ext cx="0" cy="0"/>
+          <a:chOff x="0" y="0"/>
+          <a:chExt cx="0" cy="0"/>
+        </a:xfrm>
+      </p:grpSpPr>
       <p:sp>
         <p:nvSpPr>
           <p:cNvPr id="2" name="Title 1"/>
@@ -5124,7 +3966,7 @@
           <a:lstStyle/>
           <a:p>
             <a:r>
-              <a:t>One Number Holds The Song</a:t>
+              <a:t>Where This Sits In PCG</a:t>
             </a:r>
           </a:p>
         </p:txBody>
@@ -5145,27 +3987,26 @@
           <a:lstStyle/>
           <a:p>
             <a:r>
-              <a:t>The level number starts the random numbers</a:t>
-            </a:r>
-          </a:p>
-          <a:p>
-            <a:r>
-              <a:t>Level 3 always gives exactly the same music</a:t>
-            </a:r>
-          </a:p>
-          <a:p>
-            <a:r>
-              <a:t>Level 4 gives different music</a:t>
-            </a:r>
-          </a:p>
-          <a:p>
-            <a:r>
-              <a:t>The game stores a number, not an audio file</a:t>
-            </a:r>
-          </a:p>
-          <a:p>
-            <a:r>
-              <a:t>The music is rebuilt from it every time</a:t>
+              <a:rPr dirty="0"/>
+              <a:t>Stochastic, because it uses randomness</a:t>
+            </a:r>
+          </a:p>
+          <a:p>
+            <a:r>
+              <a:rPr dirty="0"/>
+              <a:t>Constructive, it builds in one pass</a:t>
+            </a:r>
+          </a:p>
+          <a:p>
+            <a:r>
+              <a:rPr dirty="0"/>
+              <a:t>Automatic, no human picks the notes</a:t>
+            </a:r>
+          </a:p>
+          <a:p>
+            <a:r>
+              <a:rPr dirty="0"/>
+              <a:t>Adaptive, the output follows the game</a:t>
             </a:r>
           </a:p>
         </p:txBody>
@@ -5179,7 +4020,7 @@
 </file>
 
 <file path=ppt/slides/slide8.xml><?xml version="1.0" encoding="utf-8"?>
-<p:sld xmlns:a="http://schemas.openxmlformats.org/drawingml/2006/main" xmlns:p="http://schemas.openxmlformats.org/presentationml/2006/main" xmlns:r="http://schemas.openxmlformats.org/officeDocument/2006/relationships">
+<p:sld xmlns:a="http://schemas.openxmlformats.org/drawingml/2006/main" xmlns:r="http://schemas.openxmlformats.org/officeDocument/2006/relationships" xmlns:p="http://schemas.openxmlformats.org/presentationml/2006/main">
   <p:cSld>
     <p:spTree>
       <p:nvGrpSpPr>
@@ -5187,87 +4028,14 @@
         <p:cNvGrpSpPr/>
         <p:nvPr/>
       </p:nvGrpSpPr>
-      <p:grpSpPr/>
-      <p:sp>
-        <p:nvSpPr>
-          <p:cNvPr id="2" name="Title 1"/>
-          <p:cNvSpPr>
-            <a:spLocks noGrp="1"/>
-          </p:cNvSpPr>
-          <p:nvPr>
-            <p:ph type="title"/>
-          </p:nvPr>
-        </p:nvSpPr>
-        <p:spPr/>
-        <p:txBody>
-          <a:bodyPr/>
-          <a:lstStyle/>
-          <a:p>
-            <a:r>
-              <a:t>Where This Sits In PCG</a:t>
-            </a:r>
-          </a:p>
-        </p:txBody>
-      </p:sp>
-      <p:sp>
-        <p:nvSpPr>
-          <p:cNvPr id="3" name="Content Placeholder 2"/>
-          <p:cNvSpPr>
-            <a:spLocks noGrp="1"/>
-          </p:cNvSpPr>
-          <p:nvPr>
-            <p:ph idx="1"/>
-          </p:nvPr>
-        </p:nvSpPr>
-        <p:spPr/>
-        <p:txBody>
-          <a:bodyPr/>
-          <a:lstStyle/>
-          <a:p>
-            <a:r>
-              <a:t>Stochastic, because it uses randomness</a:t>
-            </a:r>
-          </a:p>
-          <a:p>
-            <a:r>
-              <a:t>Constructive, it builds in one pass</a:t>
-            </a:r>
-          </a:p>
-          <a:p>
-            <a:r>
-              <a:t>Automatic, no human picks the notes</a:t>
-            </a:r>
-          </a:p>
-          <a:p>
-            <a:r>
-              <a:t>Adaptive, the output follows the game</a:t>
-            </a:r>
-          </a:p>
-          <a:p>
-            <a:r>
-              <a:t>Adaptive is the important one</a:t>
-            </a:r>
-          </a:p>
-        </p:txBody>
-      </p:sp>
-    </p:spTree>
-  </p:cSld>
-  <p:clrMapOvr>
-    <a:masterClrMapping/>
-  </p:clrMapOvr>
-</p:sld>
-</file>
-
-<file path=ppt/slides/slide9.xml><?xml version="1.0" encoding="utf-8"?>
-<p:sld xmlns:a="http://schemas.openxmlformats.org/drawingml/2006/main" xmlns:p="http://schemas.openxmlformats.org/presentationml/2006/main" xmlns:r="http://schemas.openxmlformats.org/officeDocument/2006/relationships">
-  <p:cSld>
-    <p:spTree>
-      <p:nvGrpSpPr>
-        <p:cNvPr id="1" name=""/>
-        <p:cNvGrpSpPr/>
-        <p:nvPr/>
-      </p:nvGrpSpPr>
-      <p:grpSpPr/>
+      <p:grpSpPr>
+        <a:xfrm>
+          <a:off x="0" y="0"/>
+          <a:ext cx="0" cy="0"/>
+          <a:chOff x="0" y="0"/>
+          <a:chExt cx="0" cy="0"/>
+        </a:xfrm>
+      </p:grpSpPr>
       <p:sp>
         <p:nvSpPr>
           <p:cNvPr id="2" name="Title 1"/>
@@ -5298,7 +4066,7 @@
           <p:nvPr/>
         </p:nvPicPr>
         <p:blipFill>
-          <a:blip r:embed="rId2"/>
+          <a:blip r:embed="rId3"/>
           <a:stretch>
             <a:fillRect/>
           </a:stretch>
@@ -5313,6 +4081,98 @@
           </a:prstGeom>
         </p:spPr>
       </p:pic>
+    </p:spTree>
+  </p:cSld>
+  <p:clrMapOvr>
+    <a:masterClrMapping/>
+  </p:clrMapOvr>
+</p:sld>
+</file>
+
+<file path=ppt/slides/slide9.xml><?xml version="1.0" encoding="utf-8"?>
+<p:sld xmlns:a="http://schemas.openxmlformats.org/drawingml/2006/main" xmlns:r="http://schemas.openxmlformats.org/officeDocument/2006/relationships" xmlns:p="http://schemas.openxmlformats.org/presentationml/2006/main">
+  <p:cSld>
+    <p:spTree>
+      <p:nvGrpSpPr>
+        <p:cNvPr id="1" name=""/>
+        <p:cNvGrpSpPr/>
+        <p:nvPr/>
+      </p:nvGrpSpPr>
+      <p:grpSpPr>
+        <a:xfrm>
+          <a:off x="0" y="0"/>
+          <a:ext cx="0" cy="0"/>
+          <a:chOff x="0" y="0"/>
+          <a:chExt cx="0" cy="0"/>
+        </a:xfrm>
+      </p:grpSpPr>
+      <p:sp>
+        <p:nvSpPr>
+          <p:cNvPr id="2" name="Title 1"/>
+          <p:cNvSpPr>
+            <a:spLocks noGrp="1"/>
+          </p:cNvSpPr>
+          <p:nvPr>
+            <p:ph type="title"/>
+          </p:nvPr>
+        </p:nvSpPr>
+        <p:spPr/>
+        <p:txBody>
+          <a:bodyPr/>
+          <a:lstStyle/>
+          <a:p>
+            <a:r>
+              <a:t>Difficulty Sets The Speed</a:t>
+            </a:r>
+          </a:p>
+        </p:txBody>
+      </p:sp>
+      <p:sp>
+        <p:nvSpPr>
+          <p:cNvPr id="3" name="Content Placeholder 2"/>
+          <p:cNvSpPr>
+            <a:spLocks noGrp="1"/>
+          </p:cNvSpPr>
+          <p:nvPr>
+            <p:ph idx="1"/>
+          </p:nvPr>
+        </p:nvSpPr>
+        <p:spPr/>
+        <p:txBody>
+          <a:bodyPr/>
+          <a:lstStyle/>
+          <a:p>
+            <a:r>
+              <a:t>Level 1, 80 beats per minute, 24.0 seconds</a:t>
+            </a:r>
+          </a:p>
+          <a:p>
+            <a:r>
+              <a:t>Level 2, 110 beats per minute, 17.5 seconds</a:t>
+            </a:r>
+          </a:p>
+          <a:p>
+            <a:r>
+              <a:t>Level 3, 140 beats per minute, 13.7 seconds</a:t>
+            </a:r>
+          </a:p>
+          <a:p>
+            <a:r>
+              <a:t>Level 4, 170 beats per minute, 11.3 seconds</a:t>
+            </a:r>
+          </a:p>
+          <a:p>
+            <a:r>
+              <a:t>Level 5, 200 beats per minute, 9.6 seconds</a:t>
+            </a:r>
+          </a:p>
+          <a:p>
+            <a:r>
+              <a:t>Each level adds 30 beats per minute</a:t>
+            </a:r>
+          </a:p>
+        </p:txBody>
+      </p:sp>
     </p:spTree>
   </p:cSld>
   <p:clrMapOvr>
@@ -5652,44 +4512,44 @@
         <a:sysClr val="window" lastClr="FFFFFF"/>
       </a:lt1>
       <a:dk2>
-        <a:srgbClr val="1F497D"/>
+        <a:srgbClr val="0E2841"/>
       </a:dk2>
       <a:lt2>
-        <a:srgbClr val="EEECE1"/>
+        <a:srgbClr val="E8E8E8"/>
       </a:lt2>
       <a:accent1>
-        <a:srgbClr val="4F81BD"/>
+        <a:srgbClr val="156082"/>
       </a:accent1>
       <a:accent2>
-        <a:srgbClr val="C0504D"/>
+        <a:srgbClr val="E97132"/>
       </a:accent2>
       <a:accent3>
-        <a:srgbClr val="9BBB59"/>
+        <a:srgbClr val="196B24"/>
       </a:accent3>
       <a:accent4>
-        <a:srgbClr val="8064A2"/>
+        <a:srgbClr val="0F9ED5"/>
       </a:accent4>
       <a:accent5>
-        <a:srgbClr val="4BACC6"/>
+        <a:srgbClr val="A02B93"/>
       </a:accent5>
       <a:accent6>
-        <a:srgbClr val="F79646"/>
+        <a:srgbClr val="4EA72E"/>
       </a:accent6>
       <a:hlink>
-        <a:srgbClr val="0000FF"/>
+        <a:srgbClr val="467886"/>
       </a:hlink>
       <a:folHlink>
-        <a:srgbClr val="800080"/>
+        <a:srgbClr val="96607D"/>
       </a:folHlink>
     </a:clrScheme>
     <a:fontScheme name="Office">
       <a:majorFont>
-        <a:latin typeface="Calibri"/>
+        <a:latin typeface="Aptos Display" panose="02110004020202020204"/>
         <a:ea typeface=""/>
         <a:cs typeface=""/>
-        <a:font script="Jpan" typeface="ＭＳ Ｐゴシック"/>
+        <a:font script="Jpan" typeface="游ゴシック Light"/>
         <a:font script="Hang" typeface="맑은 고딕"/>
-        <a:font script="Hans" typeface="宋体"/>
+        <a:font script="Hans" typeface="等线 Light"/>
         <a:font script="Hant" typeface="新細明體"/>
         <a:font script="Arab" typeface="Times New Roman"/>
         <a:font script="Hebr" typeface="Times New Roman"/>
@@ -5717,14 +4577,31 @@
         <a:font script="Viet" typeface="Times New Roman"/>
         <a:font script="Uigh" typeface="Microsoft Uighur"/>
         <a:font script="Geor" typeface="Sylfaen"/>
+        <a:font script="Armn" typeface="Arial"/>
+        <a:font script="Bugi" typeface="Leelawadee UI"/>
+        <a:font script="Bopo" typeface="Microsoft JhengHei"/>
+        <a:font script="Java" typeface="Javanese Text"/>
+        <a:font script="Lisu" typeface="Segoe UI"/>
+        <a:font script="Mymr" typeface="Myanmar Text"/>
+        <a:font script="Nkoo" typeface="Ebrima"/>
+        <a:font script="Olck" typeface="Nirmala UI"/>
+        <a:font script="Osma" typeface="Ebrima"/>
+        <a:font script="Phag" typeface="Phagspa"/>
+        <a:font script="Syrn" typeface="Estrangelo Edessa"/>
+        <a:font script="Syrj" typeface="Estrangelo Edessa"/>
+        <a:font script="Syre" typeface="Estrangelo Edessa"/>
+        <a:font script="Sora" typeface="Nirmala UI"/>
+        <a:font script="Tale" typeface="Microsoft Tai Le"/>
+        <a:font script="Talu" typeface="Microsoft New Tai Lue"/>
+        <a:font script="Tfng" typeface="Ebrima"/>
       </a:majorFont>
       <a:minorFont>
-        <a:latin typeface="Calibri"/>
+        <a:latin typeface="Aptos" panose="02110004020202020204"/>
         <a:ea typeface=""/>
         <a:cs typeface=""/>
-        <a:font script="Jpan" typeface="ＭＳ Ｐゴシック"/>
+        <a:font script="Jpan" typeface="游ゴシック"/>
         <a:font script="Hang" typeface="맑은 고딕"/>
-        <a:font script="Hans" typeface="宋体"/>
+        <a:font script="Hans" typeface="等线"/>
         <a:font script="Hant" typeface="新細明體"/>
         <a:font script="Arab" typeface="Arial"/>
         <a:font script="Hebr" typeface="Arial"/>
@@ -5752,6 +4629,23 @@
         <a:font script="Viet" typeface="Arial"/>
         <a:font script="Uigh" typeface="Microsoft Uighur"/>
         <a:font script="Geor" typeface="Sylfaen"/>
+        <a:font script="Armn" typeface="Arial"/>
+        <a:font script="Bugi" typeface="Leelawadee UI"/>
+        <a:font script="Bopo" typeface="Microsoft JhengHei"/>
+        <a:font script="Java" typeface="Javanese Text"/>
+        <a:font script="Lisu" typeface="Segoe UI"/>
+        <a:font script="Mymr" typeface="Myanmar Text"/>
+        <a:font script="Nkoo" typeface="Ebrima"/>
+        <a:font script="Olck" typeface="Nirmala UI"/>
+        <a:font script="Osma" typeface="Ebrima"/>
+        <a:font script="Phag" typeface="Phagspa"/>
+        <a:font script="Syrn" typeface="Estrangelo Edessa"/>
+        <a:font script="Syrj" typeface="Estrangelo Edessa"/>
+        <a:font script="Syre" typeface="Estrangelo Edessa"/>
+        <a:font script="Sora" typeface="Nirmala UI"/>
+        <a:font script="Tale" typeface="Microsoft Tai Le"/>
+        <a:font script="Talu" typeface="Microsoft New Tai Lue"/>
+        <a:font script="Tfng" typeface="Ebrima"/>
       </a:minorFont>
     </a:fontScheme>
     <a:fmtScheme name="Office">
@@ -5763,180 +4657,136 @@
           <a:gsLst>
             <a:gs pos="0">
               <a:schemeClr val="phClr">
-                <a:tint val="50000"/>
-                <a:satMod val="300000"/>
+                <a:lumMod val="110000"/>
+                <a:satMod val="105000"/>
+                <a:tint val="67000"/>
               </a:schemeClr>
             </a:gs>
-            <a:gs pos="35000">
+            <a:gs pos="50000">
               <a:schemeClr val="phClr">
-                <a:tint val="37000"/>
-                <a:satMod val="300000"/>
+                <a:lumMod val="105000"/>
+                <a:satMod val="103000"/>
+                <a:tint val="73000"/>
               </a:schemeClr>
             </a:gs>
             <a:gs pos="100000">
               <a:schemeClr val="phClr">
-                <a:tint val="15000"/>
-                <a:satMod val="350000"/>
+                <a:lumMod val="105000"/>
+                <a:satMod val="109000"/>
+                <a:tint val="81000"/>
               </a:schemeClr>
             </a:gs>
           </a:gsLst>
-          <a:lin ang="16200000" scaled="1"/>
+          <a:lin ang="5400000" scaled="0"/>
         </a:gradFill>
         <a:gradFill rotWithShape="1">
           <a:gsLst>
             <a:gs pos="0">
               <a:schemeClr val="phClr">
-                <a:tint val="100000"/>
+                <a:satMod val="103000"/>
+                <a:lumMod val="102000"/>
+                <a:tint val="94000"/>
+              </a:schemeClr>
+            </a:gs>
+            <a:gs pos="50000">
+              <a:schemeClr val="phClr">
+                <a:satMod val="110000"/>
+                <a:lumMod val="100000"/>
                 <a:shade val="100000"/>
-                <a:satMod val="130000"/>
               </a:schemeClr>
             </a:gs>
             <a:gs pos="100000">
               <a:schemeClr val="phClr">
-                <a:tint val="50000"/>
-                <a:shade val="100000"/>
-                <a:satMod val="350000"/>
+                <a:lumMod val="99000"/>
+                <a:satMod val="120000"/>
+                <a:shade val="78000"/>
               </a:schemeClr>
             </a:gs>
           </a:gsLst>
-          <a:lin ang="16200000" scaled="0"/>
+          <a:lin ang="5400000" scaled="0"/>
         </a:gradFill>
       </a:fillStyleLst>
       <a:lnStyleLst>
-        <a:ln w="9525" cap="flat" cmpd="sng" algn="ctr">
+        <a:ln w="12700" cap="flat" cmpd="sng" algn="ctr">
           <a:solidFill>
-            <a:schemeClr val="phClr">
-              <a:shade val="95000"/>
-              <a:satMod val="105000"/>
-            </a:schemeClr>
+            <a:schemeClr val="phClr"/>
           </a:solidFill>
           <a:prstDash val="solid"/>
+          <a:miter lim="800000"/>
+        </a:ln>
+        <a:ln w="19050" cap="flat" cmpd="sng" algn="ctr">
+          <a:solidFill>
+            <a:schemeClr val="phClr"/>
+          </a:solidFill>
+          <a:prstDash val="solid"/>
+          <a:miter lim="800000"/>
         </a:ln>
         <a:ln w="25400" cap="flat" cmpd="sng" algn="ctr">
           <a:solidFill>
             <a:schemeClr val="phClr"/>
           </a:solidFill>
           <a:prstDash val="solid"/>
-        </a:ln>
-        <a:ln w="38100" cap="flat" cmpd="sng" algn="ctr">
-          <a:solidFill>
-            <a:schemeClr val="phClr"/>
-          </a:solidFill>
-          <a:prstDash val="solid"/>
+          <a:miter lim="800000"/>
         </a:ln>
       </a:lnStyleLst>
       <a:effectStyleLst>
         <a:effectStyle>
+          <a:effectLst/>
+        </a:effectStyle>
+        <a:effectStyle>
+          <a:effectLst/>
+        </a:effectStyle>
+        <a:effectStyle>
           <a:effectLst>
-            <a:outerShdw blurRad="40000" dist="20000" dir="5400000" rotWithShape="0">
+            <a:outerShdw blurRad="57150" dist="19050" dir="5400000" algn="ctr" rotWithShape="0">
               <a:srgbClr val="000000">
-                <a:alpha val="38000"/>
+                <a:alpha val="63000"/>
               </a:srgbClr>
             </a:outerShdw>
           </a:effectLst>
-        </a:effectStyle>
-        <a:effectStyle>
-          <a:effectLst>
-            <a:outerShdw blurRad="40000" dist="23000" dir="5400000" rotWithShape="0">
-              <a:srgbClr val="000000">
-                <a:alpha val="35000"/>
-              </a:srgbClr>
-            </a:outerShdw>
-          </a:effectLst>
-        </a:effectStyle>
-        <a:effectStyle>
-          <a:effectLst>
-            <a:outerShdw blurRad="40000" dist="23000" dir="5400000" rotWithShape="0">
-              <a:srgbClr val="000000">
-                <a:alpha val="35000"/>
-              </a:srgbClr>
-            </a:outerShdw>
-          </a:effectLst>
-          <a:scene3d>
-            <a:camera prst="orthographicFront">
-              <a:rot lat="0" lon="0" rev="0"/>
-            </a:camera>
-            <a:lightRig rig="threePt" dir="t">
-              <a:rot lat="0" lon="0" rev="1200000"/>
-            </a:lightRig>
-          </a:scene3d>
-          <a:sp3d>
-            <a:bevelT w="63500" h="25400"/>
-          </a:sp3d>
         </a:effectStyle>
       </a:effectStyleLst>
       <a:bgFillStyleLst>
         <a:solidFill>
           <a:schemeClr val="phClr"/>
         </a:solidFill>
+        <a:solidFill>
+          <a:schemeClr val="phClr">
+            <a:tint val="95000"/>
+            <a:satMod val="170000"/>
+          </a:schemeClr>
+        </a:solidFill>
         <a:gradFill rotWithShape="1">
           <a:gsLst>
             <a:gs pos="0">
               <a:schemeClr val="phClr">
-                <a:tint val="40000"/>
-                <a:satMod val="350000"/>
+                <a:tint val="93000"/>
+                <a:satMod val="150000"/>
+                <a:shade val="98000"/>
+                <a:lumMod val="102000"/>
               </a:schemeClr>
             </a:gs>
-            <a:gs pos="40000">
+            <a:gs pos="50000">
               <a:schemeClr val="phClr">
-                <a:tint val="45000"/>
-                <a:shade val="99000"/>
-                <a:satMod val="350000"/>
+                <a:tint val="98000"/>
+                <a:satMod val="130000"/>
+                <a:shade val="90000"/>
+                <a:lumMod val="103000"/>
               </a:schemeClr>
             </a:gs>
             <a:gs pos="100000">
               <a:schemeClr val="phClr">
-                <a:shade val="20000"/>
-                <a:satMod val="255000"/>
+                <a:shade val="63000"/>
+                <a:satMod val="120000"/>
               </a:schemeClr>
             </a:gs>
           </a:gsLst>
-          <a:path path="circle">
-            <a:fillToRect l="50000" t="-80000" r="50000" b="180000"/>
-          </a:path>
-        </a:gradFill>
-        <a:gradFill rotWithShape="1">
-          <a:gsLst>
-            <a:gs pos="0">
-              <a:schemeClr val="phClr">
-                <a:tint val="80000"/>
-                <a:satMod val="300000"/>
-              </a:schemeClr>
-            </a:gs>
-            <a:gs pos="100000">
-              <a:schemeClr val="phClr">
-                <a:shade val="30000"/>
-                <a:satMod val="200000"/>
-              </a:schemeClr>
-            </a:gs>
-          </a:gsLst>
-          <a:path path="circle">
-            <a:fillToRect l="50000" t="50000" r="50000" b="50000"/>
-          </a:path>
+          <a:lin ang="5400000" scaled="0"/>
         </a:gradFill>
       </a:bgFillStyleLst>
     </a:fmtScheme>
   </a:themeElements>
   <a:objectDefaults>
-    <a:spDef>
-      <a:spPr/>
-      <a:bodyPr/>
-      <a:lstStyle/>
-      <a:style>
-        <a:lnRef idx="1">
-          <a:schemeClr val="accent1"/>
-        </a:lnRef>
-        <a:fillRef idx="3">
-          <a:schemeClr val="accent1"/>
-        </a:fillRef>
-        <a:effectRef idx="2">
-          <a:schemeClr val="accent1"/>
-        </a:effectRef>
-        <a:fontRef idx="minor">
-          <a:schemeClr val="lt1"/>
-        </a:fontRef>
-      </a:style>
-    </a:spDef>
     <a:lnDef>
       <a:spPr/>
       <a:bodyPr/>
@@ -5958,5 +4808,10 @@
     </a:lnDef>
   </a:objectDefaults>
   <a:extraClrSchemeLst/>
+  <a:extLst>
+    <a:ext uri="{05A4C25C-085E-4340-85A3-A5531E510DB2}">
+      <thm15:themeFamily xmlns:thm15="http://schemas.microsoft.com/office/thememl/2012/main" name="Office Theme" id="{2E142A2C-CD16-42D6-873A-C26D2A0506FA}" vid="{1BDDFF52-6CD6-40A5-AB3C-68EB2F1E4D0A}"/>
+    </a:ext>
+  </a:extLst>
 </a:theme>
 </file>
--- a/Presentation.pptx
+++ b/Presentation.pptx
@@ -4137,7 +4137,12 @@
             <p:ph idx="1"/>
           </p:nvPr>
         </p:nvSpPr>
-        <p:spPr/>
+        <p:spPr>
+          <a:xfrm>
+            <a:off x="457200" y="1600200"/>
+            <a:ext cx="8229600" cy="3200400"/>
+          </a:xfrm>
+        </p:spPr>
         <p:txBody>
           <a:bodyPr/>
           <a:lstStyle/>
@@ -4169,6 +4174,130 @@
           <a:p>
             <a:r>
               <a:t>Each level adds 30 beats per minute</a:t>
+            </a:r>
+          </a:p>
+        </p:txBody>
+      </p:sp>
+      <p:pic>
+        <p:nvPicPr>
+          <p:cNvPr id="4" name="level1.wav">
+            <a:hlinkClick r:id="" action="ppaction://media"/>
+          </p:cNvPr>
+          <p:cNvPicPr>
+            <a:picLocks noChangeAspect="1"/>
+          </p:cNvPicPr>
+          <p:nvPr>
+            <a:audioFile r:link="rId3"/>
+            <p:extLst>
+              <p:ext uri="{DAA4B4D4-6D71-4841-9C94-3DE7FCFB9230}">
+                <p14:media xmlns:p14="http://schemas.microsoft.com/office/powerpoint/2010/main" r:embed="rId2"/>
+              </p:ext>
+            </p:extLst>
+          </p:nvPr>
+        </p:nvPicPr>
+        <p:blipFill>
+          <a:blip r:embed="rId4"/>
+          <a:stretch>
+            <a:fillRect/>
+          </a:stretch>
+        </p:blipFill>
+        <p:spPr>
+          <a:xfrm>
+            <a:off x="1371600" y="5029200"/>
+            <a:ext cx="914400" cy="914400"/>
+          </a:xfrm>
+          <a:prstGeom prst="rect">
+            <a:avLst/>
+          </a:prstGeom>
+        </p:spPr>
+      </p:pic>
+      <p:sp>
+        <p:nvSpPr>
+          <p:cNvPr id="5" name="TextBox 4"/>
+          <p:cNvSpPr txBox="1"/>
+          <p:nvPr/>
+        </p:nvSpPr>
+        <p:spPr>
+          <a:xfrm>
+            <a:off x="2423160" y="5303520"/>
+            <a:ext cx="1463040" cy="365760"/>
+          </a:xfrm>
+          <a:prstGeom prst="rect">
+            <a:avLst/>
+          </a:prstGeom>
+          <a:noFill/>
+        </p:spPr>
+        <p:txBody>
+          <a:bodyPr wrap="none">
+            <a:spAutoFit/>
+          </a:bodyPr>
+          <a:lstStyle/>
+          <a:p>
+            <a:r>
+              <a:rPr sz="1800"/>
+              <a:t>Level 1</a:t>
+            </a:r>
+          </a:p>
+        </p:txBody>
+      </p:sp>
+      <p:pic>
+        <p:nvPicPr>
+          <p:cNvPr id="6" name="level5.wav">
+            <a:hlinkClick r:id="" action="ppaction://media"/>
+          </p:cNvPr>
+          <p:cNvPicPr>
+            <a:picLocks noChangeAspect="1"/>
+          </p:cNvPicPr>
+          <p:nvPr>
+            <a:audioFile r:link="rId6"/>
+            <p:extLst>
+              <p:ext uri="{DAA4B4D4-6D71-4841-9C94-3DE7FCFB9230}">
+                <p14:media xmlns:p14="http://schemas.microsoft.com/office/powerpoint/2010/main" r:embed="rId5"/>
+              </p:ext>
+            </p:extLst>
+          </p:nvPr>
+        </p:nvPicPr>
+        <p:blipFill>
+          <a:blip r:embed="rId4"/>
+          <a:stretch>
+            <a:fillRect/>
+          </a:stretch>
+        </p:blipFill>
+        <p:spPr>
+          <a:xfrm>
+            <a:off x="5029200" y="5029200"/>
+            <a:ext cx="914400" cy="914400"/>
+          </a:xfrm>
+          <a:prstGeom prst="rect">
+            <a:avLst/>
+          </a:prstGeom>
+        </p:spPr>
+      </p:pic>
+      <p:sp>
+        <p:nvSpPr>
+          <p:cNvPr id="7" name="TextBox 6"/>
+          <p:cNvSpPr txBox="1"/>
+          <p:nvPr/>
+        </p:nvSpPr>
+        <p:spPr>
+          <a:xfrm>
+            <a:off x="6080760" y="5303520"/>
+            <a:ext cx="1463040" cy="365760"/>
+          </a:xfrm>
+          <a:prstGeom prst="rect">
+            <a:avLst/>
+          </a:prstGeom>
+          <a:noFill/>
+        </p:spPr>
+        <p:txBody>
+          <a:bodyPr wrap="none">
+            <a:spAutoFit/>
+          </a:bodyPr>
+          <a:lstStyle/>
+          <a:p>
+            <a:r>
+              <a:rPr sz="1800"/>
+              <a:t>Level 5</a:t>
             </a:r>
           </a:p>
         </p:txBody>
@@ -4178,6 +4307,40 @@
   <p:clrMapOvr>
     <a:masterClrMapping/>
   </p:clrMapOvr>
+  <p:timing>
+    <p:tnLst>
+      <p:par>
+        <p:cTn id="1" dur="indefinite" restart="never" nodeType="tmRoot">
+          <p:childTnLst>
+            <p:video>
+              <p:cMediaNode vol="80000">
+                <p:cTn id="2" fill="hold" display="0">
+                  <p:stCondLst>
+                    <p:cond delay="indefinite"/>
+                  </p:stCondLst>
+                </p:cTn>
+                <p:tgtEl>
+                  <p:spTgt spid="4"/>
+                </p:tgtEl>
+              </p:cMediaNode>
+            </p:video>
+            <p:video>
+              <p:cMediaNode vol="80000">
+                <p:cTn id="3" fill="hold" display="0">
+                  <p:stCondLst>
+                    <p:cond delay="indefinite"/>
+                  </p:stCondLst>
+                </p:cTn>
+                <p:tgtEl>
+                  <p:spTgt spid="6"/>
+                </p:tgtEl>
+              </p:cMediaNode>
+            </p:video>
+          </p:childTnLst>
+        </p:cTn>
+      </p:par>
+    </p:tnLst>
+  </p:timing>
 </p:sld>
 </file>
 

--- a/Presentation.pptx
+++ b/Presentation.pptx
@@ -4137,12 +4137,7 @@
             <p:ph idx="1"/>
           </p:nvPr>
         </p:nvSpPr>
-        <p:spPr>
-          <a:xfrm>
-            <a:off x="457200" y="1600200"/>
-            <a:ext cx="8229600" cy="3200400"/>
-          </a:xfrm>
-        </p:spPr>
+        <p:spPr/>
         <p:txBody>
           <a:bodyPr/>
           <a:lstStyle/>
@@ -4174,130 +4169,6 @@
           <a:p>
             <a:r>
               <a:t>Each level adds 30 beats per minute</a:t>
-            </a:r>
-          </a:p>
-        </p:txBody>
-      </p:sp>
-      <p:pic>
-        <p:nvPicPr>
-          <p:cNvPr id="4" name="level1.wav">
-            <a:hlinkClick r:id="" action="ppaction://media"/>
-          </p:cNvPr>
-          <p:cNvPicPr>
-            <a:picLocks noChangeAspect="1"/>
-          </p:cNvPicPr>
-          <p:nvPr>
-            <a:audioFile r:link="rId3"/>
-            <p:extLst>
-              <p:ext uri="{DAA4B4D4-6D71-4841-9C94-3DE7FCFB9230}">
-                <p14:media xmlns:p14="http://schemas.microsoft.com/office/powerpoint/2010/main" r:embed="rId2"/>
-              </p:ext>
-            </p:extLst>
-          </p:nvPr>
-        </p:nvPicPr>
-        <p:blipFill>
-          <a:blip r:embed="rId4"/>
-          <a:stretch>
-            <a:fillRect/>
-          </a:stretch>
-        </p:blipFill>
-        <p:spPr>
-          <a:xfrm>
-            <a:off x="1371600" y="5029200"/>
-            <a:ext cx="914400" cy="914400"/>
-          </a:xfrm>
-          <a:prstGeom prst="rect">
-            <a:avLst/>
-          </a:prstGeom>
-        </p:spPr>
-      </p:pic>
-      <p:sp>
-        <p:nvSpPr>
-          <p:cNvPr id="5" name="TextBox 4"/>
-          <p:cNvSpPr txBox="1"/>
-          <p:nvPr/>
-        </p:nvSpPr>
-        <p:spPr>
-          <a:xfrm>
-            <a:off x="2423160" y="5303520"/>
-            <a:ext cx="1463040" cy="365760"/>
-          </a:xfrm>
-          <a:prstGeom prst="rect">
-            <a:avLst/>
-          </a:prstGeom>
-          <a:noFill/>
-        </p:spPr>
-        <p:txBody>
-          <a:bodyPr wrap="none">
-            <a:spAutoFit/>
-          </a:bodyPr>
-          <a:lstStyle/>
-          <a:p>
-            <a:r>
-              <a:rPr sz="1800"/>
-              <a:t>Level 1</a:t>
-            </a:r>
-          </a:p>
-        </p:txBody>
-      </p:sp>
-      <p:pic>
-        <p:nvPicPr>
-          <p:cNvPr id="6" name="level5.wav">
-            <a:hlinkClick r:id="" action="ppaction://media"/>
-          </p:cNvPr>
-          <p:cNvPicPr>
-            <a:picLocks noChangeAspect="1"/>
-          </p:cNvPicPr>
-          <p:nvPr>
-            <a:audioFile r:link="rId6"/>
-            <p:extLst>
-              <p:ext uri="{DAA4B4D4-6D71-4841-9C94-3DE7FCFB9230}">
-                <p14:media xmlns:p14="http://schemas.microsoft.com/office/powerpoint/2010/main" r:embed="rId5"/>
-              </p:ext>
-            </p:extLst>
-          </p:nvPr>
-        </p:nvPicPr>
-        <p:blipFill>
-          <a:blip r:embed="rId4"/>
-          <a:stretch>
-            <a:fillRect/>
-          </a:stretch>
-        </p:blipFill>
-        <p:spPr>
-          <a:xfrm>
-            <a:off x="5029200" y="5029200"/>
-            <a:ext cx="914400" cy="914400"/>
-          </a:xfrm>
-          <a:prstGeom prst="rect">
-            <a:avLst/>
-          </a:prstGeom>
-        </p:spPr>
-      </p:pic>
-      <p:sp>
-        <p:nvSpPr>
-          <p:cNvPr id="7" name="TextBox 6"/>
-          <p:cNvSpPr txBox="1"/>
-          <p:nvPr/>
-        </p:nvSpPr>
-        <p:spPr>
-          <a:xfrm>
-            <a:off x="6080760" y="5303520"/>
-            <a:ext cx="1463040" cy="365760"/>
-          </a:xfrm>
-          <a:prstGeom prst="rect">
-            <a:avLst/>
-          </a:prstGeom>
-          <a:noFill/>
-        </p:spPr>
-        <p:txBody>
-          <a:bodyPr wrap="none">
-            <a:spAutoFit/>
-          </a:bodyPr>
-          <a:lstStyle/>
-          <a:p>
-            <a:r>
-              <a:rPr sz="1800"/>
-              <a:t>Level 5</a:t>
             </a:r>
           </a:p>
         </p:txBody>
@@ -4307,40 +4178,6 @@
   <p:clrMapOvr>
     <a:masterClrMapping/>
   </p:clrMapOvr>
-  <p:timing>
-    <p:tnLst>
-      <p:par>
-        <p:cTn id="1" dur="indefinite" restart="never" nodeType="tmRoot">
-          <p:childTnLst>
-            <p:video>
-              <p:cMediaNode vol="80000">
-                <p:cTn id="2" fill="hold" display="0">
-                  <p:stCondLst>
-                    <p:cond delay="indefinite"/>
-                  </p:stCondLst>
-                </p:cTn>
-                <p:tgtEl>
-                  <p:spTgt spid="4"/>
-                </p:tgtEl>
-              </p:cMediaNode>
-            </p:video>
-            <p:video>
-              <p:cMediaNode vol="80000">
-                <p:cTn id="3" fill="hold" display="0">
-                  <p:stCondLst>
-                    <p:cond delay="indefinite"/>
-                  </p:stCondLst>
-                </p:cTn>
-                <p:tgtEl>
-                  <p:spTgt spid="6"/>
-                </p:tgtEl>
-              </p:cMediaNode>
-            </p:video>
-          </p:childTnLst>
-        </p:cTn>
-      </p:par>
-    </p:tnLst>
-  </p:timing>
 </p:sld>
 </file>
 

--- a/Presentation.pptx
+++ b/Presentation.pptx
@@ -3334,7 +3334,12 @@
             <p:ph idx="1"/>
           </p:nvPr>
         </p:nvSpPr>
-        <p:spPr/>
+        <p:spPr>
+          <a:xfrm>
+            <a:off x="457200" y="1600201"/>
+            <a:ext cx="8229600" cy="2046642"/>
+          </a:xfrm>
+        </p:spPr>
         <p:txBody>
           <a:bodyPr/>
           <a:lstStyle/>
@@ -3354,6 +3359,164 @@
             <a:r>
               <a:rPr dirty="0"/>
               <a:t>Difficulty only controls the speed</a:t>
+            </a:r>
+            <a:endParaRPr lang="en-CA" dirty="0"/>
+          </a:p>
+          <a:p>
+            <a:pPr marL="0" indent="0">
+              <a:buNone/>
+            </a:pPr>
+            <a:endParaRPr dirty="0"/>
+          </a:p>
+        </p:txBody>
+      </p:sp>
+      <p:pic>
+        <p:nvPicPr>
+          <p:cNvPr id="4" name="level1.mp3">
+            <a:hlinkClick r:id="" action="ppaction://media"/>
+            <a:extLst>
+              <a:ext uri="{FF2B5EF4-FFF2-40B4-BE49-F238E27FC236}">
+                <a16:creationId xmlns:a16="http://schemas.microsoft.com/office/drawing/2014/main" id="{9DA4A675-07B5-123E-6C69-BE6194ED685D}"/>
+              </a:ext>
+            </a:extLst>
+          </p:cNvPr>
+          <p:cNvPicPr>
+            <a:picLocks noChangeAspect="1"/>
+          </p:cNvPicPr>
+          <p:nvPr>
+            <a:audioFile r:link="rId2"/>
+            <p:extLst>
+              <p:ext uri="{DAA4B4D4-6D71-4841-9C94-3DE7FCFB9230}">
+                <p14:media xmlns:p14="http://schemas.microsoft.com/office/powerpoint/2010/main" r:embed="rId1"/>
+              </p:ext>
+            </p:extLst>
+          </p:nvPr>
+        </p:nvPicPr>
+        <p:blipFill>
+          <a:blip r:embed="rId6"/>
+          <a:stretch>
+            <a:fillRect/>
+          </a:stretch>
+        </p:blipFill>
+        <p:spPr>
+          <a:xfrm>
+            <a:off x="1486947" y="3969273"/>
+            <a:ext cx="812800" cy="812800"/>
+          </a:xfrm>
+          <a:prstGeom prst="rect">
+            <a:avLst/>
+          </a:prstGeom>
+          <a:ln>
+            <a:solidFill>
+              <a:schemeClr val="accent1"/>
+            </a:solidFill>
+          </a:ln>
+        </p:spPr>
+      </p:pic>
+      <p:sp>
+        <p:nvSpPr>
+          <p:cNvPr id="5" name="TextBox 4">
+            <a:extLst>
+              <a:ext uri="{FF2B5EF4-FFF2-40B4-BE49-F238E27FC236}">
+                <a16:creationId xmlns:a16="http://schemas.microsoft.com/office/drawing/2014/main" id="{94CA1ACF-0743-7485-EC85-5940C014BA21}"/>
+              </a:ext>
+            </a:extLst>
+          </p:cNvPr>
+          <p:cNvSpPr txBox="1"/>
+          <p:nvPr/>
+        </p:nvSpPr>
+        <p:spPr>
+          <a:xfrm>
+            <a:off x="1433756" y="5314278"/>
+            <a:ext cx="1731982" cy="369332"/>
+          </a:xfrm>
+          <a:prstGeom prst="rect">
+            <a:avLst/>
+          </a:prstGeom>
+          <a:noFill/>
+        </p:spPr>
+        <p:txBody>
+          <a:bodyPr wrap="square" rtlCol="0">
+            <a:spAutoFit/>
+          </a:bodyPr>
+          <a:lstStyle/>
+          <a:p>
+            <a:r>
+              <a:rPr lang="en-US" dirty="0"/>
+              <a:t>Level 1</a:t>
+            </a:r>
+          </a:p>
+        </p:txBody>
+      </p:sp>
+      <p:pic>
+        <p:nvPicPr>
+          <p:cNvPr id="6" name="level5.mp3">
+            <a:hlinkClick r:id="" action="ppaction://media"/>
+            <a:extLst>
+              <a:ext uri="{FF2B5EF4-FFF2-40B4-BE49-F238E27FC236}">
+                <a16:creationId xmlns:a16="http://schemas.microsoft.com/office/drawing/2014/main" id="{D8443CF0-5306-56B2-5006-328FB81B9570}"/>
+              </a:ext>
+            </a:extLst>
+          </p:cNvPr>
+          <p:cNvPicPr>
+            <a:picLocks noChangeAspect="1"/>
+          </p:cNvPicPr>
+          <p:nvPr>
+            <a:audioFile r:link="rId4"/>
+            <p:extLst>
+              <p:ext uri="{DAA4B4D4-6D71-4841-9C94-3DE7FCFB9230}">
+                <p14:media xmlns:p14="http://schemas.microsoft.com/office/powerpoint/2010/main" r:embed="rId3"/>
+              </p:ext>
+            </p:extLst>
+          </p:nvPr>
+        </p:nvPicPr>
+        <p:blipFill>
+          <a:blip r:embed="rId6"/>
+          <a:stretch>
+            <a:fillRect/>
+          </a:stretch>
+        </p:blipFill>
+        <p:spPr>
+          <a:xfrm>
+            <a:off x="6682890" y="3969273"/>
+            <a:ext cx="812800" cy="812800"/>
+          </a:xfrm>
+          <a:prstGeom prst="rect">
+            <a:avLst/>
+          </a:prstGeom>
+        </p:spPr>
+      </p:pic>
+      <p:sp>
+        <p:nvSpPr>
+          <p:cNvPr id="7" name="TextBox 6">
+            <a:extLst>
+              <a:ext uri="{FF2B5EF4-FFF2-40B4-BE49-F238E27FC236}">
+                <a16:creationId xmlns:a16="http://schemas.microsoft.com/office/drawing/2014/main" id="{7D0BE36D-9601-052B-51C2-B3FB36C06BC7}"/>
+              </a:ext>
+            </a:extLst>
+          </p:cNvPr>
+          <p:cNvSpPr txBox="1"/>
+          <p:nvPr/>
+        </p:nvSpPr>
+        <p:spPr>
+          <a:xfrm>
+            <a:off x="6682890" y="5314278"/>
+            <a:ext cx="1731982" cy="369332"/>
+          </a:xfrm>
+          <a:prstGeom prst="rect">
+            <a:avLst/>
+          </a:prstGeom>
+          <a:noFill/>
+        </p:spPr>
+        <p:txBody>
+          <a:bodyPr wrap="square" rtlCol="0">
+            <a:spAutoFit/>
+          </a:bodyPr>
+          <a:lstStyle/>
+          <a:p>
+            <a:r>
+              <a:rPr lang="en-US" dirty="0"/>
+              <a:t>Level 5</a:t>
             </a:r>
           </a:p>
         </p:txBody>
@@ -3363,6 +3526,144 @@
   <p:clrMapOvr>
     <a:masterClrMapping/>
   </p:clrMapOvr>
+  <p:timing>
+    <p:tnLst>
+      <p:par>
+        <p:cTn id="1" dur="indefinite" restart="never" nodeType="tmRoot">
+          <p:childTnLst>
+            <p:seq concurrent="1" nextAc="seek">
+              <p:cTn id="2" dur="indefinite" nodeType="mainSeq">
+                <p:childTnLst>
+                  <p:par>
+                    <p:cTn id="3" fill="hold">
+                      <p:stCondLst>
+                        <p:cond delay="indefinite"/>
+                      </p:stCondLst>
+                      <p:childTnLst>
+                        <p:par>
+                          <p:cTn id="4" fill="hold">
+                            <p:stCondLst>
+                              <p:cond delay="0"/>
+                            </p:stCondLst>
+                            <p:childTnLst>
+                              <p:par>
+                                <p:cTn id="5" presetID="1" presetClass="mediacall" presetSubtype="0" fill="hold" nodeType="clickEffect">
+                                  <p:stCondLst>
+                                    <p:cond delay="0"/>
+                                  </p:stCondLst>
+                                  <p:childTnLst>
+                                    <p:cmd type="call" cmd="playFrom(0.0)">
+                                      <p:cBhvr>
+                                        <p:cTn id="6" dur="26044" fill="hold"/>
+                                        <p:tgtEl>
+                                          <p:spTgt spid="4"/>
+                                        </p:tgtEl>
+                                      </p:cBhvr>
+                                    </p:cmd>
+                                  </p:childTnLst>
+                                </p:cTn>
+                              </p:par>
+                            </p:childTnLst>
+                          </p:cTn>
+                        </p:par>
+                      </p:childTnLst>
+                    </p:cTn>
+                  </p:par>
+                  <p:par>
+                    <p:cTn id="7" fill="hold">
+                      <p:stCondLst>
+                        <p:cond delay="indefinite"/>
+                      </p:stCondLst>
+                      <p:childTnLst>
+                        <p:par>
+                          <p:cTn id="8" fill="hold">
+                            <p:stCondLst>
+                              <p:cond delay="0"/>
+                            </p:stCondLst>
+                            <p:childTnLst>
+                              <p:par>
+                                <p:cTn id="9" presetID="1" presetClass="mediacall" presetSubtype="0" fill="hold" nodeType="clickEffect">
+                                  <p:stCondLst>
+                                    <p:cond delay="0"/>
+                                  </p:stCondLst>
+                                  <p:childTnLst>
+                                    <p:cmd type="call" cmd="playFrom(0.0)">
+                                      <p:cBhvr>
+                                        <p:cTn id="10" dur="11650" fill="hold"/>
+                                        <p:tgtEl>
+                                          <p:spTgt spid="6"/>
+                                        </p:tgtEl>
+                                      </p:cBhvr>
+                                    </p:cmd>
+                                  </p:childTnLst>
+                                </p:cTn>
+                              </p:par>
+                            </p:childTnLst>
+                          </p:cTn>
+                        </p:par>
+                      </p:childTnLst>
+                    </p:cTn>
+                  </p:par>
+                </p:childTnLst>
+              </p:cTn>
+              <p:prevCondLst>
+                <p:cond evt="onPrev" delay="0">
+                  <p:tgtEl>
+                    <p:sldTgt/>
+                  </p:tgtEl>
+                </p:cond>
+              </p:prevCondLst>
+              <p:nextCondLst>
+                <p:cond evt="onNext" delay="0">
+                  <p:tgtEl>
+                    <p:sldTgt/>
+                  </p:tgtEl>
+                </p:cond>
+              </p:nextCondLst>
+            </p:seq>
+            <p:audio>
+              <p:cMediaNode vol="80000">
+                <p:cTn id="11" fill="hold" display="0">
+                  <p:stCondLst>
+                    <p:cond delay="indefinite"/>
+                  </p:stCondLst>
+                  <p:endCondLst>
+                    <p:cond evt="onStopAudio" delay="0">
+                      <p:tgtEl>
+                        <p:sldTgt/>
+                      </p:tgtEl>
+                    </p:cond>
+                  </p:endCondLst>
+                </p:cTn>
+                <p:tgtEl>
+                  <p:spTgt spid="4"/>
+                </p:tgtEl>
+              </p:cMediaNode>
+            </p:audio>
+            <p:audio>
+              <p:cMediaNode vol="80000">
+                <p:cTn id="12" fill="hold" display="0">
+                  <p:stCondLst>
+                    <p:cond delay="indefinite"/>
+                  </p:stCondLst>
+                  <p:endCondLst>
+                    <p:cond evt="onStopAudio" delay="0">
+                      <p:tgtEl>
+                        <p:sldTgt/>
+                      </p:tgtEl>
+                    </p:cond>
+                  </p:endCondLst>
+                </p:cTn>
+                <p:tgtEl>
+                  <p:spTgt spid="6"/>
+                </p:tgtEl>
+              </p:cMediaNode>
+            </p:audio>
+          </p:childTnLst>
+        </p:cTn>
+      </p:par>
+    </p:tnLst>
+  </p:timing>
 </p:sld>
 </file>
 
@@ -3726,7 +4027,7 @@
           <p:nvPr/>
         </p:nvPicPr>
         <p:blipFill>
-          <a:blip r:embed="rId3"/>
+          <a:blip r:embed="rId2"/>
           <a:stretch>
             <a:fillRect/>
           </a:stretch>
@@ -3828,7 +4129,7 @@
           <a:p>
             <a:r>
               <a:rPr dirty="0"/>
-              <a:t>That is why one level is only 600 bytes</a:t>
+              <a:t>Each level is stored in a 620-byte MIDI file</a:t>
             </a:r>
           </a:p>
         </p:txBody>
@@ -3900,7 +4201,7 @@
           </a:p>
           <a:p>
             <a:r>
-              <a:t>One note per beat, thirty two notes in total</a:t>
+              <a:t>One note per beat, thirty-two notes in total</a:t>
             </a:r>
           </a:p>
           <a:p>
@@ -3920,7 +4221,7 @@
           </a:p>
           <a:p>
             <a:r>
-              <a:t>A repeat shifts the pattern, so levels differ</a:t>
+              <a:t>Each level uses a seed to repeat its pattern</a:t>
             </a:r>
           </a:p>
         </p:txBody>
@@ -4066,7 +4367,7 @@
           <p:nvPr/>
         </p:nvPicPr>
         <p:blipFill>
-          <a:blip r:embed="rId3"/>
+          <a:blip r:embed="rId2"/>
           <a:stretch>
             <a:fillRect/>
           </a:stretch>
